--- a/deliverables/2026-08-10-nias-seminar/저지종_유가공목장_운영_현장사례.pptx
+++ b/deliverables/2026-08-10-nias-seminar/저지종_유가공목장_운영_현장사례.pptx
@@ -16375,7 +16375,7 @@
                 <a:ea typeface="Malgun Gothic" pitchFamily="34" charset="-122"/>
                 <a:cs typeface="Malgun Gothic" pitchFamily="34" charset="-120"/>
               </a:rPr>
-              <a:t>코리아동물병원</a:t>
+              <a:t>고려동물병원</a:t>
             </a:r>
             <a:endParaRPr lang="en-US" sz="1500" dirty="0"/>
           </a:p>

--- a/deliverables/2026-08-10-nias-seminar/저지종_유가공목장_운영_현장사례.pptx
+++ b/deliverables/2026-08-10-nias-seminar/저지종_유가공목장_운영_현장사례.pptx
@@ -4934,7 +4934,7 @@
           <a:p>
             <a:r>
               <a:rPr lang="en-US" dirty="0"/>
-              <a:t>실측치를 채워 발표. 특히 두당 유량과 유성분은 반드시 실제 검정 성적으로 말할 것. 청중이 연구·지도 인력이므로 근거 없는 수치는 바로 신뢰를 잃는다.</a:t>
+              <a:t>착유 35두 소규모임을 먼저 인정하고 시작한다. 규모가 작아서 오히려 유가공·직판이 필수였다는 논리로 연결. 두당 유량·유성분 검정 성적을 말할 수 있으면 여기서 구두로 덧붙인다.</a:t>
             </a:r>
             <a:endParaRPr lang="en-US" dirty="0"/>
           </a:p>
@@ -11741,7 +11741,7 @@
                 <a:ea typeface="Malgun Gothic" pitchFamily="34" charset="-122"/>
                 <a:cs typeface="Malgun Gothic" pitchFamily="34" charset="-120"/>
               </a:rPr>
-              <a:t>수란우(홀스타인)를 활용해 기존 사육 자원을 그대로 씁니다</a:t>
+              <a:t>수란우를 활용하므로 기존 축군을 그대로 증식 자원으로 씁니다</a:t>
             </a:r>
             <a:endParaRPr lang="en-US" sz="1350" dirty="0"/>
           </a:p>
@@ -16073,7 +16073,7 @@
                 <a:ea typeface="Malgun Gothic" pitchFamily="34" charset="-122"/>
                 <a:cs typeface="Malgun Gothic" pitchFamily="34" charset="-120"/>
               </a:rPr>
-              <a:t>저지·홀스타인 사육</a:t>
+              <a:t>저지종 단일 품종 사육</a:t>
             </a:r>
             <a:endParaRPr lang="en-US" sz="1250" dirty="0"/>
           </a:p>
@@ -41042,7 +41042,7 @@
                 <a:ea typeface="Malgun Gothic" pitchFamily="34" charset="-122"/>
                 <a:cs typeface="Malgun Gothic" pitchFamily="34" charset="-120"/>
               </a:rPr>
-              <a:t>저지·홀스타인 축군과 개체별 사육·번식 이력</a:t>
+              <a:t>저지종 단일 축군 70두의 개체별 사육·번식 이력</a:t>
             </a:r>
             <a:endParaRPr lang="en-US" sz="1300" dirty="0"/>
           </a:p>
@@ -43198,7 +43198,7 @@
                 <a:ea typeface="Malgun Gothic" pitchFamily="34" charset="-122"/>
                 <a:cs typeface="Malgun Gothic" pitchFamily="34" charset="-120"/>
               </a:rPr>
-              <a:t>목장 개요</a:t>
+              <a:t>목장 개요 — 저지종 단일 품종, 총 70두</a:t>
             </a:r>
             <a:endParaRPr lang="en-US" sz="3000" dirty="0"/>
           </a:p>
@@ -43212,12 +43212,12 @@
         </p:nvSpPr>
         <p:spPr>
           <a:xfrm>
-            <a:off x="566928" y="1325880"/>
-            <a:ext cx="3547872" cy="1920240"/>
+            <a:off x="566928" y="1298448"/>
+            <a:ext cx="2633472" cy="1600200"/>
           </a:xfrm>
           <a:prstGeom prst="roundRect">
             <a:avLst>
-              <a:gd name="adj" fmla="val 4762"/>
+              <a:gd name="adj" fmla="val 5714"/>
             </a:avLst>
           </a:prstGeom>
           <a:solidFill>
@@ -43234,8 +43234,8 @@
         </p:nvSpPr>
         <p:spPr>
           <a:xfrm>
-            <a:off x="566928" y="1490472"/>
-            <a:ext cx="3547872" cy="658368"/>
+            <a:off x="566928" y="1463040"/>
+            <a:ext cx="2633472" cy="658368"/>
           </a:xfrm>
           <a:prstGeom prst="rect">
             <a:avLst/>
@@ -43259,7 +43259,7 @@
                 <a:ea typeface="Malgun Gothic" pitchFamily="34" charset="-122"/>
                 <a:cs typeface="Malgun Gothic" pitchFamily="34" charset="-120"/>
               </a:rPr>
-              <a:t>[  ]두</a:t>
+              <a:t>70두</a:t>
             </a:r>
             <a:endParaRPr lang="en-US" sz="3200" dirty="0"/>
           </a:p>
@@ -43273,8 +43273,8 @@
         </p:nvSpPr>
         <p:spPr>
           <a:xfrm>
-            <a:off x="658368" y="2167128"/>
-            <a:ext cx="3364992" cy="987552"/>
+            <a:off x="658368" y="2139696"/>
+            <a:ext cx="2450592" cy="667512"/>
           </a:xfrm>
           <a:prstGeom prst="rect">
             <a:avLst/>
@@ -43315,7 +43315,7 @@
                 <a:ea typeface="Malgun Gothic" pitchFamily="34" charset="-122"/>
                 <a:cs typeface="Malgun Gothic" pitchFamily="34" charset="-120"/>
               </a:rPr>
-              <a:t>(저지 [  ]두 / 홀스타인 [  ]두)</a:t>
+              <a:t>저지종 단일 품종</a:t>
             </a:r>
             <a:endParaRPr lang="en-US" sz="1150" dirty="0"/>
           </a:p>
@@ -43329,12 +43329,12 @@
         </p:nvSpPr>
         <p:spPr>
           <a:xfrm>
-            <a:off x="4315968" y="1325880"/>
-            <a:ext cx="3547872" cy="1920240"/>
+            <a:off x="3401568" y="1298448"/>
+            <a:ext cx="2633472" cy="1600200"/>
           </a:xfrm>
           <a:prstGeom prst="roundRect">
             <a:avLst>
-              <a:gd name="adj" fmla="val 4762"/>
+              <a:gd name="adj" fmla="val 5714"/>
             </a:avLst>
           </a:prstGeom>
           <a:solidFill>
@@ -43351,8 +43351,8 @@
         </p:nvSpPr>
         <p:spPr>
           <a:xfrm>
-            <a:off x="4315968" y="1490472"/>
-            <a:ext cx="3547872" cy="658368"/>
+            <a:off x="3401568" y="1463040"/>
+            <a:ext cx="2633472" cy="658368"/>
           </a:xfrm>
           <a:prstGeom prst="rect">
             <a:avLst/>
@@ -43376,7 +43376,7 @@
                 <a:ea typeface="Malgun Gothic" pitchFamily="34" charset="-122"/>
                 <a:cs typeface="Malgun Gothic" pitchFamily="34" charset="-120"/>
               </a:rPr>
-              <a:t>[  ]두</a:t>
+              <a:t>35두</a:t>
             </a:r>
             <a:endParaRPr lang="en-US" sz="3200" dirty="0"/>
           </a:p>
@@ -43390,8 +43390,8 @@
         </p:nvSpPr>
         <p:spPr>
           <a:xfrm>
-            <a:off x="4407408" y="2167128"/>
-            <a:ext cx="3364992" cy="987552"/>
+            <a:off x="3493008" y="2139696"/>
+            <a:ext cx="2450592" cy="667512"/>
           </a:xfrm>
           <a:prstGeom prst="rect">
             <a:avLst/>
@@ -43415,27 +43415,10 @@
                 <a:ea typeface="Malgun Gothic" pitchFamily="34" charset="-122"/>
                 <a:cs typeface="Malgun Gothic" pitchFamily="34" charset="-120"/>
               </a:rPr>
-              <a:t>착유두수</a:t>
+              <a:t>착유우</a:t>
             </a:r>
             <a:endParaRPr lang="en-US" sz="1150" dirty="0"/>
           </a:p>
-          <a:p>
-            <a:pPr algn="ctr" indent="0" marL="0">
-              <a:buNone/>
-            </a:pPr>
-            <a:r>
-              <a:rPr lang="en-US" sz="1150" dirty="0">
-                <a:solidFill>
-                  <a:srgbClr val="5E6B5F"/>
-                </a:solidFill>
-                <a:latin typeface="Malgun Gothic" pitchFamily="34" charset="0"/>
-                <a:ea typeface="Malgun Gothic" pitchFamily="34" charset="-122"/>
-                <a:cs typeface="Malgun Gothic" pitchFamily="34" charset="-120"/>
-              </a:rPr>
-              <a:t>두당 일 평균 유량 [  ] kg</a:t>
-            </a:r>
-            <a:endParaRPr lang="en-US" sz="1150" dirty="0"/>
-          </a:p>
         </p:txBody>
       </p:sp>
       <p:sp>
@@ -43446,12 +43429,12 @@
         </p:nvSpPr>
         <p:spPr>
           <a:xfrm>
-            <a:off x="8065008" y="1325880"/>
-            <a:ext cx="3547872" cy="1920240"/>
+            <a:off x="6236208" y="1298448"/>
+            <a:ext cx="2633472" cy="1600200"/>
           </a:xfrm>
           <a:prstGeom prst="roundRect">
             <a:avLst>
-              <a:gd name="adj" fmla="val 4762"/>
+              <a:gd name="adj" fmla="val 5714"/>
             </a:avLst>
           </a:prstGeom>
           <a:solidFill>
@@ -43468,8 +43451,8 @@
         </p:nvSpPr>
         <p:spPr>
           <a:xfrm>
-            <a:off x="8065008" y="1490472"/>
-            <a:ext cx="3547872" cy="658368"/>
+            <a:off x="6236208" y="1463040"/>
+            <a:ext cx="2633472" cy="658368"/>
           </a:xfrm>
           <a:prstGeom prst="rect">
             <a:avLst/>
@@ -43493,7 +43476,7 @@
                 <a:ea typeface="Malgun Gothic" pitchFamily="34" charset="-122"/>
                 <a:cs typeface="Malgun Gothic" pitchFamily="34" charset="-120"/>
               </a:rPr>
-              <a:t>[  ]㎡</a:t>
+              <a:t>10두</a:t>
             </a:r>
             <a:endParaRPr lang="en-US" sz="3200" dirty="0"/>
           </a:p>
@@ -43507,8 +43490,8 @@
         </p:nvSpPr>
         <p:spPr>
           <a:xfrm>
-            <a:off x="8156448" y="2167128"/>
-            <a:ext cx="3364992" cy="987552"/>
+            <a:off x="6327648" y="2139696"/>
+            <a:ext cx="2450592" cy="667512"/>
           </a:xfrm>
           <a:prstGeom prst="rect">
             <a:avLst/>
@@ -43532,27 +43515,10 @@
                 <a:ea typeface="Malgun Gothic" pitchFamily="34" charset="-122"/>
                 <a:cs typeface="Malgun Gothic" pitchFamily="34" charset="-120"/>
               </a:rPr>
-              <a:t>축사 면적</a:t>
+              <a:t>건유우 · 초임만삭</a:t>
             </a:r>
             <a:endParaRPr lang="en-US" sz="1150" dirty="0"/>
           </a:p>
-          <a:p>
-            <a:pPr algn="ctr" indent="0" marL="0">
-              <a:buNone/>
-            </a:pPr>
-            <a:r>
-              <a:rPr lang="en-US" sz="1150" dirty="0">
-                <a:solidFill>
-                  <a:srgbClr val="5E6B5F"/>
-                </a:solidFill>
-                <a:latin typeface="Malgun Gothic" pitchFamily="34" charset="0"/>
-                <a:ea typeface="Malgun Gothic" pitchFamily="34" charset="-122"/>
-                <a:cs typeface="Malgun Gothic" pitchFamily="34" charset="-120"/>
-              </a:rPr>
-              <a:t>(HBP 운용 구간 [  ]㎡)</a:t>
-            </a:r>
-            <a:endParaRPr lang="en-US" sz="1150" dirty="0"/>
-          </a:p>
         </p:txBody>
       </p:sp>
       <p:sp>
@@ -43563,12 +43529,12 @@
         </p:nvSpPr>
         <p:spPr>
           <a:xfrm>
-            <a:off x="566928" y="3474720"/>
-            <a:ext cx="3547872" cy="1920240"/>
+            <a:off x="9070848" y="1298448"/>
+            <a:ext cx="2633472" cy="1600200"/>
           </a:xfrm>
           <a:prstGeom prst="roundRect">
             <a:avLst>
-              <a:gd name="adj" fmla="val 4762"/>
+              <a:gd name="adj" fmla="val 5714"/>
             </a:avLst>
           </a:prstGeom>
           <a:solidFill>
@@ -43585,8 +43551,8 @@
         </p:nvSpPr>
         <p:spPr>
           <a:xfrm>
-            <a:off x="566928" y="3639312"/>
-            <a:ext cx="3547872" cy="658368"/>
+            <a:off x="9070848" y="1463040"/>
+            <a:ext cx="2633472" cy="658368"/>
           </a:xfrm>
           <a:prstGeom prst="rect">
             <a:avLst/>
@@ -43610,7 +43576,7 @@
                 <a:ea typeface="Malgun Gothic" pitchFamily="34" charset="-122"/>
                 <a:cs typeface="Malgun Gothic" pitchFamily="34" charset="-120"/>
               </a:rPr>
-              <a:t>[  ]</a:t>
+              <a:t>25두</a:t>
             </a:r>
             <a:endParaRPr lang="en-US" sz="3200" dirty="0"/>
           </a:p>
@@ -43624,8 +43590,8 @@
         </p:nvSpPr>
         <p:spPr>
           <a:xfrm>
-            <a:off x="658368" y="4315968"/>
-            <a:ext cx="3364992" cy="987552"/>
+            <a:off x="9162288" y="2139696"/>
+            <a:ext cx="2450592" cy="667512"/>
           </a:xfrm>
           <a:prstGeom prst="rect">
             <a:avLst/>
@@ -43649,27 +43615,10 @@
                 <a:ea typeface="Malgun Gothic" pitchFamily="34" charset="-122"/>
                 <a:cs typeface="Malgun Gothic" pitchFamily="34" charset="-120"/>
               </a:rPr>
-              <a:t>유가공장 처리 용량</a:t>
+              <a:t>송아지 · 육성우</a:t>
             </a:r>
             <a:endParaRPr lang="en-US" sz="1150" dirty="0"/>
           </a:p>
-          <a:p>
-            <a:pPr algn="ctr" indent="0" marL="0">
-              <a:buNone/>
-            </a:pPr>
-            <a:r>
-              <a:rPr lang="en-US" sz="1150" dirty="0">
-                <a:solidFill>
-                  <a:srgbClr val="5E6B5F"/>
-                </a:solidFill>
-                <a:latin typeface="Malgun Gothic" pitchFamily="34" charset="0"/>
-                <a:ea typeface="Malgun Gothic" pitchFamily="34" charset="-122"/>
-                <a:cs typeface="Malgun Gothic" pitchFamily="34" charset="-120"/>
-              </a:rPr>
-              <a:t>(일 처리 [  ] L)</a:t>
-            </a:r>
-            <a:endParaRPr lang="en-US" sz="1150" dirty="0"/>
-          </a:p>
         </p:txBody>
       </p:sp>
       <p:sp>
@@ -43680,16 +43629,16 @@
         </p:nvSpPr>
         <p:spPr>
           <a:xfrm>
-            <a:off x="4315968" y="3474720"/>
-            <a:ext cx="3547872" cy="1920240"/>
+            <a:off x="566928" y="3127248"/>
+            <a:ext cx="3547872" cy="1600200"/>
           </a:xfrm>
           <a:prstGeom prst="roundRect">
             <a:avLst>
-              <a:gd name="adj" fmla="val 4762"/>
+              <a:gd name="adj" fmla="val 5714"/>
             </a:avLst>
           </a:prstGeom>
           <a:solidFill>
-            <a:srgbClr val="EEF4E9"/>
+            <a:srgbClr val="F3F6F1"/>
           </a:solidFill>
           <a:ln/>
         </p:spPr>
@@ -43702,7 +43651,7 @@
         </p:nvSpPr>
         <p:spPr>
           <a:xfrm>
-            <a:off x="4315968" y="3639312"/>
+            <a:off x="566928" y="3291840"/>
             <a:ext cx="3547872" cy="658368"/>
           </a:xfrm>
           <a:prstGeom prst="rect">
@@ -43719,7 +43668,7 @@
               <a:buNone/>
             </a:pPr>
             <a:r>
-              <a:rPr lang="en-US" sz="3200" b="1" dirty="0">
+              <a:rPr lang="en-US" sz="3000" b="1" dirty="0">
                 <a:solidFill>
                   <a:srgbClr val="1E4420"/>
                 </a:solidFill>
@@ -43727,9 +43676,9 @@
                 <a:ea typeface="Malgun Gothic" pitchFamily="34" charset="-122"/>
                 <a:cs typeface="Malgun Gothic" pitchFamily="34" charset="-120"/>
               </a:rPr>
-              <a:t>6종</a:t>
-            </a:r>
-            <a:endParaRPr lang="en-US" sz="3200" dirty="0"/>
+              <a:t>2,000㎡</a:t>
+            </a:r>
+            <a:endParaRPr lang="en-US" sz="3000" dirty="0"/>
           </a:p>
         </p:txBody>
       </p:sp>
@@ -43741,8 +43690,8 @@
         </p:nvSpPr>
         <p:spPr>
           <a:xfrm>
-            <a:off x="4407408" y="4315968"/>
-            <a:ext cx="3364992" cy="987552"/>
+            <a:off x="658368" y="3968496"/>
+            <a:ext cx="3364992" cy="667512"/>
           </a:xfrm>
           <a:prstGeom prst="rect">
             <a:avLst/>
@@ -43766,44 +43715,10 @@
                 <a:ea typeface="Malgun Gothic" pitchFamily="34" charset="-122"/>
                 <a:cs typeface="Malgun Gothic" pitchFamily="34" charset="-120"/>
               </a:rPr>
-              <a:t>제품 라인업</a:t>
+              <a:t>축사 면적</a:t>
             </a:r>
             <a:endParaRPr lang="en-US" sz="1150" dirty="0"/>
           </a:p>
-          <a:p>
-            <a:pPr algn="ctr" indent="0" marL="0">
-              <a:buNone/>
-            </a:pPr>
-            <a:r>
-              <a:rPr lang="en-US" sz="1150" dirty="0">
-                <a:solidFill>
-                  <a:srgbClr val="5E6B5F"/>
-                </a:solidFill>
-                <a:latin typeface="Malgun Gothic" pitchFamily="34" charset="0"/>
-                <a:ea typeface="Malgun Gothic" pitchFamily="34" charset="-122"/>
-                <a:cs typeface="Malgun Gothic" pitchFamily="34" charset="-120"/>
-              </a:rPr>
-              <a:t>우유·요거트·그릭·카이막</a:t>
-            </a:r>
-            <a:endParaRPr lang="en-US" sz="1150" dirty="0"/>
-          </a:p>
-          <a:p>
-            <a:pPr algn="ctr" indent="0" marL="0">
-              <a:buNone/>
-            </a:pPr>
-            <a:r>
-              <a:rPr lang="en-US" sz="1150" dirty="0">
-                <a:solidFill>
-                  <a:srgbClr val="5E6B5F"/>
-                </a:solidFill>
-                <a:latin typeface="Malgun Gothic" pitchFamily="34" charset="0"/>
-                <a:ea typeface="Malgun Gothic" pitchFamily="34" charset="-122"/>
-                <a:cs typeface="Malgun Gothic" pitchFamily="34" charset="-120"/>
-              </a:rPr>
-              <a:t>아이스크림·밀크티</a:t>
-            </a:r>
-            <a:endParaRPr lang="en-US" sz="1150" dirty="0"/>
-          </a:p>
         </p:txBody>
       </p:sp>
       <p:sp>
@@ -43814,16 +43729,16 @@
         </p:nvSpPr>
         <p:spPr>
           <a:xfrm>
-            <a:off x="8065008" y="3474720"/>
-            <a:ext cx="3547872" cy="1920240"/>
+            <a:off x="4315968" y="3127248"/>
+            <a:ext cx="3547872" cy="1600200"/>
           </a:xfrm>
           <a:prstGeom prst="roundRect">
             <a:avLst>
-              <a:gd name="adj" fmla="val 4762"/>
+              <a:gd name="adj" fmla="val 5714"/>
             </a:avLst>
           </a:prstGeom>
           <a:solidFill>
-            <a:srgbClr val="EEF4E9"/>
+            <a:srgbClr val="F3F6F1"/>
           </a:solidFill>
           <a:ln/>
         </p:spPr>
@@ -43836,7 +43751,7 @@
         </p:nvSpPr>
         <p:spPr>
           <a:xfrm>
-            <a:off x="8065008" y="3639312"/>
+            <a:off x="4315968" y="3291840"/>
             <a:ext cx="3547872" cy="658368"/>
           </a:xfrm>
           <a:prstGeom prst="rect">
@@ -43853,7 +43768,7 @@
               <a:buNone/>
             </a:pPr>
             <a:r>
-              <a:rPr lang="en-US" sz="3200" b="1" dirty="0">
+              <a:rPr lang="en-US" sz="3000" b="1" dirty="0">
                 <a:solidFill>
                   <a:srgbClr val="1E4420"/>
                 </a:solidFill>
@@ -43861,9 +43776,9 @@
                 <a:ea typeface="Malgun Gothic" pitchFamily="34" charset="-122"/>
                 <a:cs typeface="Malgun Gothic" pitchFamily="34" charset="-120"/>
               </a:rPr>
-              <a:t>D2C</a:t>
-            </a:r>
-            <a:endParaRPr lang="en-US" sz="3200" dirty="0"/>
+              <a:t>450㎡</a:t>
+            </a:r>
+            <a:endParaRPr lang="en-US" sz="3000" dirty="0"/>
           </a:p>
         </p:txBody>
       </p:sp>
@@ -43875,8 +43790,8 @@
         </p:nvSpPr>
         <p:spPr>
           <a:xfrm>
-            <a:off x="8156448" y="4315968"/>
-            <a:ext cx="3364992" cy="987552"/>
+            <a:off x="4407408" y="3968496"/>
+            <a:ext cx="3364992" cy="667512"/>
           </a:xfrm>
           <a:prstGeom prst="rect">
             <a:avLst/>
@@ -43900,15 +43815,98 @@
                 <a:ea typeface="Malgun Gothic" pitchFamily="34" charset="-122"/>
                 <a:cs typeface="Malgun Gothic" pitchFamily="34" charset="-120"/>
               </a:rPr>
-              <a:t>주 판매채널</a:t>
+              <a:t>퇴비장 면적</a:t>
             </a:r>
             <a:endParaRPr lang="en-US" sz="1150" dirty="0"/>
           </a:p>
+        </p:txBody>
+      </p:sp>
+      <p:sp>
+        <p:nvSpPr>
+          <p:cNvPr id="22" name="Shape 20"/>
+          <p:cNvSpPr/>
+          <p:nvPr/>
+        </p:nvSpPr>
+        <p:spPr>
+          <a:xfrm>
+            <a:off x="8065008" y="3127248"/>
+            <a:ext cx="3547872" cy="1600200"/>
+          </a:xfrm>
+          <a:prstGeom prst="roundRect">
+            <a:avLst>
+              <a:gd name="adj" fmla="val 5714"/>
+            </a:avLst>
+          </a:prstGeom>
+          <a:solidFill>
+            <a:srgbClr val="F3F6F1"/>
+          </a:solidFill>
+          <a:ln/>
+        </p:spPr>
+      </p:sp>
+      <p:sp>
+        <p:nvSpPr>
+          <p:cNvPr id="23" name="Text 21"/>
+          <p:cNvSpPr/>
+          <p:nvPr/>
+        </p:nvSpPr>
+        <p:spPr>
+          <a:xfrm>
+            <a:off x="8065008" y="3291840"/>
+            <a:ext cx="3547872" cy="658368"/>
+          </a:xfrm>
+          <a:prstGeom prst="rect">
+            <a:avLst/>
+          </a:prstGeom>
+          <a:noFill/>
+          <a:ln/>
+        </p:spPr>
+        <p:txBody>
+          <a:bodyPr wrap="square" lIns="0" tIns="0" rIns="0" bIns="0" rtlCol="0" anchor="ctr"/>
+          <a:lstStyle/>
           <a:p>
             <a:pPr algn="ctr" indent="0" marL="0">
               <a:buNone/>
             </a:pPr>
             <a:r>
+              <a:rPr lang="en-US" sz="3000" b="1" dirty="0">
+                <a:solidFill>
+                  <a:srgbClr val="1E4420"/>
+                </a:solidFill>
+                <a:latin typeface="Malgun Gothic" pitchFamily="34" charset="0"/>
+                <a:ea typeface="Malgun Gothic" pitchFamily="34" charset="-122"/>
+                <a:cs typeface="Malgun Gothic" pitchFamily="34" charset="-120"/>
+              </a:rPr>
+              <a:t>시간당 500L</a:t>
+            </a:r>
+            <a:endParaRPr lang="en-US" sz="3000" dirty="0"/>
+          </a:p>
+        </p:txBody>
+      </p:sp>
+      <p:sp>
+        <p:nvSpPr>
+          <p:cNvPr id="24" name="Text 22"/>
+          <p:cNvSpPr/>
+          <p:nvPr/>
+        </p:nvSpPr>
+        <p:spPr>
+          <a:xfrm>
+            <a:off x="8156448" y="3968496"/>
+            <a:ext cx="3364992" cy="667512"/>
+          </a:xfrm>
+          <a:prstGeom prst="rect">
+            <a:avLst/>
+          </a:prstGeom>
+          <a:noFill/>
+          <a:ln/>
+        </p:spPr>
+        <p:txBody>
+          <a:bodyPr wrap="square" lIns="0" tIns="0" rIns="0" bIns="0" rtlCol="0" anchor="t"/>
+          <a:lstStyle/>
+          <a:p>
+            <a:pPr algn="ctr" indent="0" marL="0">
+              <a:buNone/>
+            </a:pPr>
+            <a:r>
               <a:rPr lang="en-US" sz="1150" dirty="0">
                 <a:solidFill>
                   <a:srgbClr val="5E6B5F"/>
@@ -43917,65 +43915,132 @@
                 <a:ea typeface="Malgun Gothic" pitchFamily="34" charset="-122"/>
                 <a:cs typeface="Malgun Gothic" pitchFamily="34" charset="-120"/>
               </a:rPr>
-              <a:t>shop.a2jerseymilk.com</a:t>
+              <a:t>유가공장 처리 용량</a:t>
             </a:r>
             <a:endParaRPr lang="en-US" sz="1150" dirty="0"/>
           </a:p>
-          <a:p>
-            <a:pPr algn="ctr" indent="0" marL="0">
-              <a:buNone/>
-            </a:pPr>
-            <a:r>
-              <a:rPr lang="en-US" sz="1150" dirty="0">
-                <a:solidFill>
-                  <a:srgbClr val="5E6B5F"/>
-                </a:solidFill>
-                <a:latin typeface="Malgun Gothic" pitchFamily="34" charset="0"/>
-                <a:ea typeface="Malgun Gothic" pitchFamily="34" charset="-122"/>
-                <a:cs typeface="Malgun Gothic" pitchFamily="34" charset="-120"/>
-              </a:rPr>
-              <a:t>+ 정기구독 + B2B</a:t>
-            </a:r>
-            <a:endParaRPr lang="en-US" sz="1150" dirty="0"/>
-          </a:p>
-        </p:txBody>
-      </p:sp>
-      <p:sp>
-        <p:nvSpPr>
-          <p:cNvPr id="22" name="Text 20"/>
-          <p:cNvSpPr/>
-          <p:nvPr/>
-        </p:nvSpPr>
-        <p:spPr>
-          <a:xfrm>
-            <a:off x="566928" y="6327648"/>
-            <a:ext cx="11064240" cy="274320"/>
-          </a:xfrm>
-          <a:prstGeom prst="rect">
-            <a:avLst/>
-          </a:prstGeom>
-          <a:noFill/>
-          <a:ln/>
-        </p:spPr>
-        <p:txBody>
-          <a:bodyPr wrap="square" lIns="0" tIns="0" rIns="0" bIns="0" rtlCol="0" anchor="ctr"/>
-          <a:lstStyle/>
-          <a:p>
-            <a:pPr indent="0" marL="0">
-              <a:buNone/>
-            </a:pPr>
-            <a:r>
-              <a:rPr lang="en-US" sz="1000" dirty="0">
-                <a:solidFill>
-                  <a:srgbClr val="5E6B5F"/>
-                </a:solidFill>
-                <a:latin typeface="Malgun Gothic" pitchFamily="34" charset="0"/>
-                <a:ea typeface="Malgun Gothic" pitchFamily="34" charset="-122"/>
-                <a:cs typeface="Malgun Gothic" pitchFamily="34" charset="-120"/>
-              </a:rPr>
-              <a:t>※ [  ] 표시는 발표 직전 목장 실측치로 채워 넣을 항목입니다.</a:t>
-            </a:r>
-            <a:endParaRPr lang="en-US" sz="1000" dirty="0"/>
+        </p:txBody>
+      </p:sp>
+      <p:sp>
+        <p:nvSpPr>
+          <p:cNvPr id="25" name="Shape 23"/>
+          <p:cNvSpPr/>
+          <p:nvPr/>
+        </p:nvSpPr>
+        <p:spPr>
+          <a:xfrm>
+            <a:off x="566928" y="4956048"/>
+            <a:ext cx="11064240" cy="1188720"/>
+          </a:xfrm>
+          <a:prstGeom prst="roundRect">
+            <a:avLst>
+              <a:gd name="adj" fmla="val 7692"/>
+            </a:avLst>
+          </a:prstGeom>
+          <a:solidFill>
+            <a:srgbClr val="13301F"/>
+          </a:solidFill>
+          <a:ln/>
+        </p:spPr>
+      </p:sp>
+      <p:sp>
+        <p:nvSpPr>
+          <p:cNvPr id="26" name="Text 24"/>
+          <p:cNvSpPr/>
+          <p:nvPr/>
+        </p:nvSpPr>
+        <p:spPr>
+          <a:xfrm>
+            <a:off x="868680" y="5102352"/>
+            <a:ext cx="10424160" cy="329184"/>
+          </a:xfrm>
+          <a:prstGeom prst="rect">
+            <a:avLst/>
+          </a:prstGeom>
+          <a:noFill/>
+          <a:ln/>
+        </p:spPr>
+        <p:txBody>
+          <a:bodyPr wrap="square" lIns="0" tIns="0" rIns="0" bIns="0" rtlCol="0" anchor="t"/>
+          <a:lstStyle/>
+          <a:p>
+            <a:pPr algn="l" indent="0" marL="0">
+              <a:buNone/>
+            </a:pPr>
+            <a:r>
+              <a:rPr lang="en-US" sz="1400" b="1" dirty="0">
+                <a:solidFill>
+                  <a:srgbClr val="E9C79A"/>
+                </a:solidFill>
+                <a:latin typeface="Malgun Gothic" pitchFamily="34" charset="0"/>
+                <a:ea typeface="Malgun Gothic" pitchFamily="34" charset="-122"/>
+                <a:cs typeface="Malgun Gothic" pitchFamily="34" charset="-120"/>
+              </a:rPr>
+              <a:t>규모로 읽지 마시고, 구조로 봐주십시오</a:t>
+            </a:r>
+            <a:endParaRPr lang="en-US" sz="1400" dirty="0"/>
+          </a:p>
+        </p:txBody>
+      </p:sp>
+      <p:sp>
+        <p:nvSpPr>
+          <p:cNvPr id="27" name="Text 25"/>
+          <p:cNvSpPr/>
+          <p:nvPr/>
+        </p:nvSpPr>
+        <p:spPr>
+          <a:xfrm>
+            <a:off x="868680" y="5449824"/>
+            <a:ext cx="10424160" cy="603504"/>
+          </a:xfrm>
+          <a:prstGeom prst="rect">
+            <a:avLst/>
+          </a:prstGeom>
+          <a:noFill/>
+          <a:ln/>
+        </p:spPr>
+        <p:txBody>
+          <a:bodyPr wrap="square" lIns="0" tIns="0" rIns="0" bIns="0" rtlCol="0" anchor="t"/>
+          <a:lstStyle/>
+          <a:p>
+            <a:pPr algn="l" indent="0" marL="0">
+              <a:lnSpc>
+                <a:spcPts val="1900"/>
+              </a:lnSpc>
+              <a:buNone/>
+            </a:pPr>
+            <a:r>
+              <a:rPr lang="en-US" sz="1250" dirty="0">
+                <a:solidFill>
+                  <a:srgbClr val="FFFFFF"/>
+                </a:solidFill>
+                <a:latin typeface="Malgun Gothic" pitchFamily="34" charset="0"/>
+                <a:ea typeface="Malgun Gothic" pitchFamily="34" charset="-122"/>
+                <a:cs typeface="Malgun Gothic" pitchFamily="34" charset="-120"/>
+              </a:rPr>
+              <a:t>착유 35두 규모입니다. 이 두수로 원유 납품만 해서는 성립하기 어렵습니다.</a:t>
+            </a:r>
+            <a:endParaRPr lang="en-US" sz="1250" dirty="0"/>
+          </a:p>
+          <a:p>
+            <a:pPr algn="l" indent="0" marL="0">
+              <a:lnSpc>
+                <a:spcPts val="1900"/>
+              </a:lnSpc>
+              <a:buNone/>
+            </a:pPr>
+            <a:r>
+              <a:rPr lang="en-US" sz="1250" dirty="0">
+                <a:solidFill>
+                  <a:srgbClr val="FFFFFF"/>
+                </a:solidFill>
+                <a:latin typeface="Malgun Gothic" pitchFamily="34" charset="0"/>
+                <a:ea typeface="Malgun Gothic" pitchFamily="34" charset="-122"/>
+                <a:cs typeface="Malgun Gothic" pitchFamily="34" charset="-120"/>
+              </a:rPr>
+              <a:t>저지 단일 품종 + 자체 유가공(시간당 500L) + 퇴비장 450㎡의 순환 구조가 함께 있어야 돌아가는 모델입니다.</a:t>
+            </a:r>
+            <a:endParaRPr lang="en-US" sz="1250" dirty="0"/>
           </a:p>
         </p:txBody>
       </p:sp>

--- a/deliverables/2026-08-10-nias-seminar/저지종_유가공목장_운영_현장사례.pptx
+++ b/deliverables/2026-08-10-nias-seminar/저지종_유가공목장_운영_현장사례.pptx
@@ -51,9 +51,11 @@
     <p:sldId id="299" r:id="rId45"/>
     <p:sldId id="300" r:id="rId46"/>
     <p:sldId id="301" r:id="rId47"/>
+    <p:sldId id="302" r:id="rId48"/>
+    <p:sldId id="303" r:id="rId49"/>
   </p:sldIdLst>
   <p:notesMasterIdLst>
-    <p:notesMasterId r:id="rId48"/>
+    <p:notesMasterId r:id="rId50"/>
   </p:notesMasterIdLst>
   <p:sldSz cx="12192000" cy="6858000"/>
   <p:notesSz cx="6858000" cy="12192000"/>
@@ -3438,7 +3440,7 @@
           <a:p>
             <a:r>
               <a:rPr lang="en-US" dirty="0"/>
-              <a:t>실제 시험 성적 수치이므로 자신 있게 말한다. 다만 로트 변동은 인정. 표시·광고 원칙은 유가공을 시작하는 농가에게 가장 필요한 조언.</a:t>
+              <a:t>제품 라벨 표시값이므로 자신 있게 말한다. 지방 4.5g·단백질 3.8g이 저지 원유의 강점이 제품에 그대로 남았다는 근거. 다만 로트 변동은 인정. 표시·광고 원칙은 유가공을 시작하는 농가에게 가장 필요한 조언.</a:t>
             </a:r>
             <a:endParaRPr lang="en-US" dirty="0"/>
           </a:p>
@@ -4494,7 +4496,7 @@
           <a:p>
             <a:r>
               <a:rPr lang="en-US" dirty="0"/>
-              <a:t>로드맵은 '안'임을 명시. 협의로 바꿀 수 있다는 열린 자세를 보인다. 3년 뒤 남는 것 5가지가 기술보급 부서의 성과 지표와 맞물린다.</a:t>
+              <a:t>우리 목장이 이미 데이터를 쌓고 있다는 점이 핵심 근거. 새로 만들자는 게 아니라 '이미 돌고 있는 것을 시험 설계로 정리하자'는 제안이라는 톤으로.</a:t>
             </a:r>
             <a:endParaRPr lang="en-US" dirty="0"/>
           </a:p>
@@ -4582,7 +4584,7 @@
           <a:p>
             <a:r>
               <a:rPr lang="en-US" dirty="0"/>
-              <a:t>가장 중요한 장. 주고받는 관계를 명확히 제시. '데이터를 열겠다'는 약속이 이 제안의 무게를 만든다.</a:t>
+              <a:t>우리 목장의 미완성 지점을 먼저 드러내는 장. 자랑이 아니라 '여기가 비어 있으니 같이 채우자'는 제안. 소규모 유가공장이라 오히려 스마트팩토리 실증 모델로 만들기 쉽다는 점을 덧붙인다.</a:t>
             </a:r>
             <a:endParaRPr lang="en-US" dirty="0"/>
           </a:p>
@@ -4670,7 +4672,7 @@
           <a:p>
             <a:r>
               <a:rPr lang="en-US" dirty="0"/>
-              <a:t>질의응답 20분. 예상 질문: ① 저지로 수익이 나는가 ② HBP 초기 비용과 회수기간 ③ 센서 투자 대비 효과 ④ 유가공 인허가에서 가장 막히는 지점 ⑤ 소규모 농가도 따라 할 수 있는가. 각각 숫자로 답할 준비를 해둘 것.</a:t>
+              <a:t>로드맵은 '안'임을 명시. 협의로 바꿀 수 있다는 열린 자세를 보인다. 3년 뒤 남는 것 5가지가 기술보급 부서의 성과 지표와 맞물린다.</a:t>
             </a:r>
             <a:endParaRPr lang="en-US" dirty="0"/>
           </a:p>
@@ -4758,7 +4760,7 @@
           <a:p>
             <a:r>
               <a:rPr lang="en-US" dirty="0"/>
-              <a:t>발표 시에는 넘기고, 질의응답에서 필요 시 열람.</a:t>
+              <a:t>가장 중요한 장. 주고받는 관계를 명확히 제시. '데이터를 열겠다'는 약속이 이 제안의 무게를 만든다.</a:t>
             </a:r>
             <a:endParaRPr lang="en-US" dirty="0"/>
           </a:p>
@@ -4782,6 +4784,182 @@
             <a:fld id="{F7021451-1387-4CA6-816F-3879F97B5CBC}" type="slidenum">
               <a:rPr lang="en-US"/>
               <a:t>46</a:t>
+            </a:fld>
+            <a:endParaRPr lang="en-US"/>
+          </a:p>
+        </p:txBody>
+      </p:sp>
+    </p:spTree>
+    <p:extLst>
+      <p:ext uri="{BB962C8B-B14F-4D97-AF65-F5344CB8AC3E}">
+        <p14:creationId xmlns:p14="http://schemas.microsoft.com/office/powerpoint/2010/main" val="1024086991"/>
+      </p:ext>
+    </p:extLst>
+  </p:cSld>
+  <p:clrMapOvr>
+    <a:masterClrMapping/>
+  </p:clrMapOvr>
+</p:notes>
+</file>
+
+<file path=ppt/notesSlides/notesSlide47.xml><?xml version="1.0" encoding="utf-8"?>
+<p:notes xmlns:a="http://schemas.openxmlformats.org/drawingml/2006/main" xmlns:r="http://schemas.openxmlformats.org/officeDocument/2006/relationships" xmlns:p="http://schemas.openxmlformats.org/presentationml/2006/main">
+  <p:cSld>
+    <p:spTree>
+      <p:nvGrpSpPr>
+        <p:cNvPr id="1" name=""/>
+        <p:cNvGrpSpPr/>
+        <p:nvPr/>
+      </p:nvGrpSpPr>
+      <p:grpSpPr>
+        <a:xfrm>
+          <a:off x="0" y="0"/>
+          <a:ext cx="0" cy="0"/>
+          <a:chOff x="0" y="0"/>
+          <a:chExt cx="0" cy="0"/>
+        </a:xfrm>
+      </p:grpSpPr>
+      <p:sp>
+        <p:nvSpPr>
+          <p:cNvPr id="2" name="Slide Image Placeholder 1"/>
+          <p:cNvSpPr>
+            <a:spLocks noGrp="1" noRot="1" noChangeAspect="1"/>
+          </p:cNvSpPr>
+          <p:nvPr>
+            <p:ph type="sldImg"/>
+          </p:nvPr>
+        </p:nvSpPr>
+        <p:spPr/>
+      </p:sp>
+      <p:sp>
+        <p:nvSpPr>
+          <p:cNvPr id="3" name="Notes Placeholder 2"/>
+          <p:cNvSpPr>
+            <a:spLocks noGrp="1"/>
+          </p:cNvSpPr>
+          <p:nvPr>
+            <p:ph type="body" idx="1"/>
+          </p:nvPr>
+        </p:nvSpPr>
+        <p:spPr/>
+        <p:txBody>
+          <a:bodyPr/>
+          <a:lstStyle/>
+          <a:p>
+            <a:r>
+              <a:rPr lang="en-US" dirty="0"/>
+              <a:t>질의응답 20분. 예상 질문: ① 저지로 수익이 나는가 ② HBP 초기 비용과 회수기간 ③ 센서 투자 대비 효과 ④ 유가공 인허가에서 가장 막히는 지점 ⑤ 소규모 농가도 따라 할 수 있는가. 각각 숫자로 답할 준비를 해둘 것.</a:t>
+            </a:r>
+            <a:endParaRPr lang="en-US" dirty="0"/>
+          </a:p>
+        </p:txBody>
+      </p:sp>
+      <p:sp>
+        <p:nvSpPr>
+          <p:cNvPr id="4" name="Slide Number Placeholder 3"/>
+          <p:cNvSpPr>
+            <a:spLocks noGrp="1"/>
+          </p:cNvSpPr>
+          <p:nvPr>
+            <p:ph type="sldNum" sz="quarter" idx="10"/>
+          </p:nvPr>
+        </p:nvSpPr>
+        <p:spPr/>
+        <p:txBody>
+          <a:bodyPr/>
+          <a:lstStyle/>
+          <a:p>
+            <a:fld id="{F7021451-1387-4CA6-816F-3879F97B5CBC}" type="slidenum">
+              <a:rPr lang="en-US"/>
+              <a:t>47</a:t>
+            </a:fld>
+            <a:endParaRPr lang="en-US"/>
+          </a:p>
+        </p:txBody>
+      </p:sp>
+    </p:spTree>
+    <p:extLst>
+      <p:ext uri="{BB962C8B-B14F-4D97-AF65-F5344CB8AC3E}">
+        <p14:creationId xmlns:p14="http://schemas.microsoft.com/office/powerpoint/2010/main" val="1024086991"/>
+      </p:ext>
+    </p:extLst>
+  </p:cSld>
+  <p:clrMapOvr>
+    <a:masterClrMapping/>
+  </p:clrMapOvr>
+</p:notes>
+</file>
+
+<file path=ppt/notesSlides/notesSlide48.xml><?xml version="1.0" encoding="utf-8"?>
+<p:notes xmlns:a="http://schemas.openxmlformats.org/drawingml/2006/main" xmlns:r="http://schemas.openxmlformats.org/officeDocument/2006/relationships" xmlns:p="http://schemas.openxmlformats.org/presentationml/2006/main">
+  <p:cSld>
+    <p:spTree>
+      <p:nvGrpSpPr>
+        <p:cNvPr id="1" name=""/>
+        <p:cNvGrpSpPr/>
+        <p:nvPr/>
+      </p:nvGrpSpPr>
+      <p:grpSpPr>
+        <a:xfrm>
+          <a:off x="0" y="0"/>
+          <a:ext cx="0" cy="0"/>
+          <a:chOff x="0" y="0"/>
+          <a:chExt cx="0" cy="0"/>
+        </a:xfrm>
+      </p:grpSpPr>
+      <p:sp>
+        <p:nvSpPr>
+          <p:cNvPr id="2" name="Slide Image Placeholder 1"/>
+          <p:cNvSpPr>
+            <a:spLocks noGrp="1" noRot="1" noChangeAspect="1"/>
+          </p:cNvSpPr>
+          <p:nvPr>
+            <p:ph type="sldImg"/>
+          </p:nvPr>
+        </p:nvSpPr>
+        <p:spPr/>
+      </p:sp>
+      <p:sp>
+        <p:nvSpPr>
+          <p:cNvPr id="3" name="Notes Placeholder 2"/>
+          <p:cNvSpPr>
+            <a:spLocks noGrp="1"/>
+          </p:cNvSpPr>
+          <p:nvPr>
+            <p:ph type="body" idx="1"/>
+          </p:nvPr>
+        </p:nvSpPr>
+        <p:spPr/>
+        <p:txBody>
+          <a:bodyPr/>
+          <a:lstStyle/>
+          <a:p>
+            <a:r>
+              <a:rPr lang="en-US" dirty="0"/>
+              <a:t>발표 시에는 넘기고, 질의응답에서 필요 시 열람.</a:t>
+            </a:r>
+            <a:endParaRPr lang="en-US" dirty="0"/>
+          </a:p>
+        </p:txBody>
+      </p:sp>
+      <p:sp>
+        <p:nvSpPr>
+          <p:cNvPr id="4" name="Slide Number Placeholder 3"/>
+          <p:cNvSpPr>
+            <a:spLocks noGrp="1"/>
+          </p:cNvSpPr>
+          <p:nvPr>
+            <p:ph type="sldNum" sz="quarter" idx="10"/>
+          </p:nvPr>
+        </p:nvSpPr>
+        <p:spPr/>
+        <p:txBody>
+          <a:bodyPr/>
+          <a:lstStyle/>
+          <a:p>
+            <a:fld id="{F7021451-1387-4CA6-816F-3879F97B5CBC}" type="slidenum">
+              <a:rPr lang="en-US"/>
+              <a:t>48</a:t>
             </a:fld>
             <a:endParaRPr lang="en-US"/>
           </a:p>
@@ -27956,7 +28134,7 @@
                           <a:ea typeface="Malgun Gothic" pitchFamily="34" charset="-122"/>
                           <a:cs typeface="Malgun Gothic" pitchFamily="34" charset="-120"/>
                         </a:rPr>
-                        <a:t>92.64 kcal</a:t>
+                        <a:t>75 kcal</a:t>
                       </a:r>
                       <a:endParaRPr lang="en-US" sz="1250" dirty="0">
                         <a:latin typeface="Malgun Gothic" charset="0"/>
@@ -28024,7 +28202,7 @@
                           <a:ea typeface="Malgun Gothic" pitchFamily="34" charset="-122"/>
                           <a:cs typeface="Malgun Gothic" pitchFamily="34" charset="-120"/>
                         </a:rPr>
-                        <a:t>트랜스지방</a:t>
+                        <a:t>지방</a:t>
                       </a:r>
                       <a:endParaRPr lang="en-US" sz="1250" dirty="0">
                         <a:latin typeface="Malgun Gothic" charset="0"/>
@@ -28092,7 +28270,7 @@
                           <a:ea typeface="Malgun Gothic" pitchFamily="34" charset="-122"/>
                           <a:cs typeface="Malgun Gothic" pitchFamily="34" charset="-120"/>
                         </a:rPr>
-                        <a:t>0.16 g</a:t>
+                        <a:t>4.5 g</a:t>
                       </a:r>
                       <a:endParaRPr lang="en-US" sz="1250" dirty="0">
                         <a:latin typeface="Malgun Gothic" charset="0"/>
@@ -28230,7 +28408,7 @@
                           <a:ea typeface="Malgun Gothic" pitchFamily="34" charset="-122"/>
                           <a:cs typeface="Malgun Gothic" pitchFamily="34" charset="-120"/>
                         </a:rPr>
-                        <a:t>5.07 g</a:t>
+                        <a:t>4.8 g</a:t>
                       </a:r>
                       <a:endParaRPr lang="en-US" sz="1250" dirty="0">
                         <a:latin typeface="Malgun Gothic" charset="0"/>
@@ -28298,7 +28476,7 @@
                           <a:ea typeface="Malgun Gothic" pitchFamily="34" charset="-122"/>
                           <a:cs typeface="Malgun Gothic" pitchFamily="34" charset="-120"/>
                         </a:rPr>
-                        <a:t>포화지방</a:t>
+                        <a:t>트랜스지방</a:t>
                       </a:r>
                       <a:endParaRPr lang="en-US" sz="1250" dirty="0">
                         <a:latin typeface="Malgun Gothic" charset="0"/>
@@ -28366,7 +28544,7 @@
                           <a:ea typeface="Malgun Gothic" pitchFamily="34" charset="-122"/>
                           <a:cs typeface="Malgun Gothic" pitchFamily="34" charset="-120"/>
                         </a:rPr>
-                        <a:t>4.4 g</a:t>
+                        <a:t>0 g</a:t>
                       </a:r>
                       <a:endParaRPr lang="en-US" sz="1250" dirty="0">
                         <a:latin typeface="Malgun Gothic" charset="0"/>
@@ -28504,7 +28682,7 @@
                           <a:ea typeface="Malgun Gothic" pitchFamily="34" charset="-122"/>
                           <a:cs typeface="Malgun Gothic" pitchFamily="34" charset="-120"/>
                         </a:rPr>
-                        <a:t>4.75 g</a:t>
+                        <a:t>4.8 g</a:t>
                       </a:r>
                       <a:endParaRPr lang="en-US" sz="1250" dirty="0">
                         <a:latin typeface="Malgun Gothic" charset="0"/>
@@ -28572,7 +28750,7 @@
                           <a:ea typeface="Malgun Gothic" pitchFamily="34" charset="-122"/>
                           <a:cs typeface="Malgun Gothic" pitchFamily="34" charset="-120"/>
                         </a:rPr>
-                        <a:t>콜레스테롤</a:t>
+                        <a:t>포화지방</a:t>
                       </a:r>
                       <a:endParaRPr lang="en-US" sz="1250" dirty="0">
                         <a:latin typeface="Malgun Gothic" charset="0"/>
@@ -28640,7 +28818,7 @@
                           <a:ea typeface="Malgun Gothic" pitchFamily="34" charset="-122"/>
                           <a:cs typeface="Malgun Gothic" pitchFamily="34" charset="-120"/>
                         </a:rPr>
-                        <a:t>21.7 mg</a:t>
+                        <a:t>3.0 g</a:t>
                       </a:r>
                       <a:endParaRPr lang="en-US" sz="1250" dirty="0">
                         <a:latin typeface="Malgun Gothic" charset="0"/>
@@ -28693,142 +28871,6 @@
                 </a:tc>
               </a:tr>
               <a:tr h="420624">
-                <a:tc>
-                  <a:txBody>
-                    <a:bodyPr/>
-                    <a:lstStyle/>
-                    <a:p>
-                      <a:pPr algn="l" indent="0" marL="0">
-                        <a:buNone/>
-                      </a:pPr>
-                      <a:r>
-                        <a:rPr lang="en-US" sz="1250" b="1" dirty="0">
-                          <a:solidFill>
-                            <a:srgbClr val="1F2A20"/>
-                          </a:solidFill>
-                          <a:latin typeface="Malgun Gothic" pitchFamily="34" charset="0"/>
-                          <a:ea typeface="Malgun Gothic" pitchFamily="34" charset="-122"/>
-                          <a:cs typeface="Malgun Gothic" pitchFamily="34" charset="-120"/>
-                        </a:rPr>
-                        <a:t>지방</a:t>
-                      </a:r>
-                      <a:endParaRPr lang="en-US" sz="1250" dirty="0">
-                        <a:latin typeface="Malgun Gothic" charset="0"/>
-                        <a:ea typeface="Malgun Gothic" charset="0"/>
-                        <a:cs typeface="Malgun Gothic" charset="0"/>
-                      </a:endParaRPr>
-                    </a:p>
-                  </a:txBody>
-                  <a:tcPr marL="91440" marR="91440" marT="45720" marB="45720" anchor="ctr">
-                    <a:lnL w="12700" cap="flat" cmpd="sng" algn="ctr">
-                      <a:solidFill>
-                        <a:srgbClr val="DDE4D8"/>
-                      </a:solidFill>
-                      <a:prstDash val="solid"/>
-                      <a:round/>
-                      <a:headEnd type="none" w="med" len="med"/>
-                      <a:tailEnd type="none" w="med" len="med"/>
-                    </a:lnL>
-                    <a:lnR w="12700" cap="flat" cmpd="sng" algn="ctr">
-                      <a:solidFill>
-                        <a:srgbClr val="DDE4D8"/>
-                      </a:solidFill>
-                      <a:prstDash val="solid"/>
-                      <a:round/>
-                      <a:headEnd type="none" w="med" len="med"/>
-                      <a:tailEnd type="none" w="med" len="med"/>
-                    </a:lnR>
-                    <a:lnT w="12700" cap="flat" cmpd="sng" algn="ctr">
-                      <a:solidFill>
-                        <a:srgbClr val="DDE4D8"/>
-                      </a:solidFill>
-                      <a:prstDash val="solid"/>
-                      <a:round/>
-                      <a:headEnd type="none" w="med" len="med"/>
-                      <a:tailEnd type="none" w="med" len="med"/>
-                    </a:lnT>
-                    <a:lnB w="12700" cap="flat" cmpd="sng" algn="ctr">
-                      <a:solidFill>
-                        <a:srgbClr val="DDE4D8"/>
-                      </a:solidFill>
-                      <a:prstDash val="solid"/>
-                      <a:round/>
-                      <a:headEnd type="none" w="med" len="med"/>
-                      <a:tailEnd type="none" w="med" len="med"/>
-                    </a:lnB>
-                    <a:solidFill>
-                      <a:srgbClr val="F3F6F1"/>
-                    </a:solidFill>
-                  </a:tcPr>
-                </a:tc>
-                <a:tc>
-                  <a:txBody>
-                    <a:bodyPr/>
-                    <a:lstStyle/>
-                    <a:p>
-                      <a:pPr algn="r" indent="0" marL="0">
-                        <a:buNone/>
-                      </a:pPr>
-                      <a:r>
-                        <a:rPr lang="en-US" sz="1250" dirty="0">
-                          <a:solidFill>
-                            <a:srgbClr val="1F2A20"/>
-                          </a:solidFill>
-                          <a:latin typeface="Malgun Gothic" pitchFamily="34" charset="0"/>
-                          <a:ea typeface="Malgun Gothic" pitchFamily="34" charset="-122"/>
-                          <a:cs typeface="Malgun Gothic" pitchFamily="34" charset="-120"/>
-                        </a:rPr>
-                        <a:t>6.0 g</a:t>
-                      </a:r>
-                      <a:endParaRPr lang="en-US" sz="1250" dirty="0">
-                        <a:latin typeface="Malgun Gothic" charset="0"/>
-                        <a:ea typeface="Malgun Gothic" charset="0"/>
-                        <a:cs typeface="Malgun Gothic" charset="0"/>
-                      </a:endParaRPr>
-                    </a:p>
-                  </a:txBody>
-                  <a:tcPr marL="91440" marR="91440" marT="45720" marB="45720" anchor="ctr">
-                    <a:lnL w="12700" cap="flat" cmpd="sng" algn="ctr">
-                      <a:solidFill>
-                        <a:srgbClr val="DDE4D8"/>
-                      </a:solidFill>
-                      <a:prstDash val="solid"/>
-                      <a:round/>
-                      <a:headEnd type="none" w="med" len="med"/>
-                      <a:tailEnd type="none" w="med" len="med"/>
-                    </a:lnL>
-                    <a:lnR w="12700" cap="flat" cmpd="sng" algn="ctr">
-                      <a:solidFill>
-                        <a:srgbClr val="DDE4D8"/>
-                      </a:solidFill>
-                      <a:prstDash val="solid"/>
-                      <a:round/>
-                      <a:headEnd type="none" w="med" len="med"/>
-                      <a:tailEnd type="none" w="med" len="med"/>
-                    </a:lnR>
-                    <a:lnT w="12700" cap="flat" cmpd="sng" algn="ctr">
-                      <a:solidFill>
-                        <a:srgbClr val="DDE4D8"/>
-                      </a:solidFill>
-                      <a:prstDash val="solid"/>
-                      <a:round/>
-                      <a:headEnd type="none" w="med" len="med"/>
-                      <a:tailEnd type="none" w="med" len="med"/>
-                    </a:lnT>
-                    <a:lnB w="12700" cap="flat" cmpd="sng" algn="ctr">
-                      <a:solidFill>
-                        <a:srgbClr val="DDE4D8"/>
-                      </a:solidFill>
-                      <a:prstDash val="solid"/>
-                      <a:round/>
-                      <a:headEnd type="none" w="med" len="med"/>
-                      <a:tailEnd type="none" w="med" len="med"/>
-                    </a:lnB>
-                    <a:solidFill>
-                      <a:srgbClr val="F3F6F1"/>
-                    </a:solidFill>
-                  </a:tcPr>
-                </a:tc>
                 <a:tc>
                   <a:txBody>
                     <a:bodyPr/>
@@ -28914,7 +28956,143 @@
                           <a:ea typeface="Malgun Gothic" pitchFamily="34" charset="-122"/>
                           <a:cs typeface="Malgun Gothic" pitchFamily="34" charset="-120"/>
                         </a:rPr>
-                        <a:t>4.59 g</a:t>
+                        <a:t>3.8 g</a:t>
+                      </a:r>
+                      <a:endParaRPr lang="en-US" sz="1250" dirty="0">
+                        <a:latin typeface="Malgun Gothic" charset="0"/>
+                        <a:ea typeface="Malgun Gothic" charset="0"/>
+                        <a:cs typeface="Malgun Gothic" charset="0"/>
+                      </a:endParaRPr>
+                    </a:p>
+                  </a:txBody>
+                  <a:tcPr marL="91440" marR="91440" marT="45720" marB="45720" anchor="ctr">
+                    <a:lnL w="12700" cap="flat" cmpd="sng" algn="ctr">
+                      <a:solidFill>
+                        <a:srgbClr val="DDE4D8"/>
+                      </a:solidFill>
+                      <a:prstDash val="solid"/>
+                      <a:round/>
+                      <a:headEnd type="none" w="med" len="med"/>
+                      <a:tailEnd type="none" w="med" len="med"/>
+                    </a:lnL>
+                    <a:lnR w="12700" cap="flat" cmpd="sng" algn="ctr">
+                      <a:solidFill>
+                        <a:srgbClr val="DDE4D8"/>
+                      </a:solidFill>
+                      <a:prstDash val="solid"/>
+                      <a:round/>
+                      <a:headEnd type="none" w="med" len="med"/>
+                      <a:tailEnd type="none" w="med" len="med"/>
+                    </a:lnR>
+                    <a:lnT w="12700" cap="flat" cmpd="sng" algn="ctr">
+                      <a:solidFill>
+                        <a:srgbClr val="DDE4D8"/>
+                      </a:solidFill>
+                      <a:prstDash val="solid"/>
+                      <a:round/>
+                      <a:headEnd type="none" w="med" len="med"/>
+                      <a:tailEnd type="none" w="med" len="med"/>
+                    </a:lnT>
+                    <a:lnB w="12700" cap="flat" cmpd="sng" algn="ctr">
+                      <a:solidFill>
+                        <a:srgbClr val="DDE4D8"/>
+                      </a:solidFill>
+                      <a:prstDash val="solid"/>
+                      <a:round/>
+                      <a:headEnd type="none" w="med" len="med"/>
+                      <a:tailEnd type="none" w="med" len="med"/>
+                    </a:lnB>
+                    <a:solidFill>
+                      <a:srgbClr val="F3F6F1"/>
+                    </a:solidFill>
+                  </a:tcPr>
+                </a:tc>
+                <a:tc>
+                  <a:txBody>
+                    <a:bodyPr/>
+                    <a:lstStyle/>
+                    <a:p>
+                      <a:pPr algn="l" indent="0" marL="0">
+                        <a:buNone/>
+                      </a:pPr>
+                      <a:r>
+                        <a:rPr lang="en-US" sz="1250" b="1" dirty="0">
+                          <a:solidFill>
+                            <a:srgbClr val="1F2A20"/>
+                          </a:solidFill>
+                          <a:latin typeface="Malgun Gothic" pitchFamily="34" charset="0"/>
+                          <a:ea typeface="Malgun Gothic" pitchFamily="34" charset="-122"/>
+                          <a:cs typeface="Malgun Gothic" pitchFamily="34" charset="-120"/>
+                        </a:rPr>
+                        <a:t>콜레스테롤</a:t>
+                      </a:r>
+                      <a:endParaRPr lang="en-US" sz="1250" dirty="0">
+                        <a:latin typeface="Malgun Gothic" charset="0"/>
+                        <a:ea typeface="Malgun Gothic" charset="0"/>
+                        <a:cs typeface="Malgun Gothic" charset="0"/>
+                      </a:endParaRPr>
+                    </a:p>
+                  </a:txBody>
+                  <a:tcPr marL="91440" marR="91440" marT="45720" marB="45720" anchor="ctr">
+                    <a:lnL w="12700" cap="flat" cmpd="sng" algn="ctr">
+                      <a:solidFill>
+                        <a:srgbClr val="DDE4D8"/>
+                      </a:solidFill>
+                      <a:prstDash val="solid"/>
+                      <a:round/>
+                      <a:headEnd type="none" w="med" len="med"/>
+                      <a:tailEnd type="none" w="med" len="med"/>
+                    </a:lnL>
+                    <a:lnR w="12700" cap="flat" cmpd="sng" algn="ctr">
+                      <a:solidFill>
+                        <a:srgbClr val="DDE4D8"/>
+                      </a:solidFill>
+                      <a:prstDash val="solid"/>
+                      <a:round/>
+                      <a:headEnd type="none" w="med" len="med"/>
+                      <a:tailEnd type="none" w="med" len="med"/>
+                    </a:lnR>
+                    <a:lnT w="12700" cap="flat" cmpd="sng" algn="ctr">
+                      <a:solidFill>
+                        <a:srgbClr val="DDE4D8"/>
+                      </a:solidFill>
+                      <a:prstDash val="solid"/>
+                      <a:round/>
+                      <a:headEnd type="none" w="med" len="med"/>
+                      <a:tailEnd type="none" w="med" len="med"/>
+                    </a:lnT>
+                    <a:lnB w="12700" cap="flat" cmpd="sng" algn="ctr">
+                      <a:solidFill>
+                        <a:srgbClr val="DDE4D8"/>
+                      </a:solidFill>
+                      <a:prstDash val="solid"/>
+                      <a:round/>
+                      <a:headEnd type="none" w="med" len="med"/>
+                      <a:tailEnd type="none" w="med" len="med"/>
+                    </a:lnB>
+                    <a:solidFill>
+                      <a:srgbClr val="F3F6F1"/>
+                    </a:solidFill>
+                  </a:tcPr>
+                </a:tc>
+                <a:tc>
+                  <a:txBody>
+                    <a:bodyPr/>
+                    <a:lstStyle/>
+                    <a:p>
+                      <a:pPr algn="r" indent="0" marL="0">
+                        <a:buNone/>
+                      </a:pPr>
+                      <a:r>
+                        <a:rPr lang="en-US" sz="1250" dirty="0">
+                          <a:solidFill>
+                            <a:srgbClr val="1F2A20"/>
+                          </a:solidFill>
+                          <a:latin typeface="Malgun Gothic" pitchFamily="34" charset="0"/>
+                          <a:ea typeface="Malgun Gothic" pitchFamily="34" charset="-122"/>
+                          <a:cs typeface="Malgun Gothic" pitchFamily="34" charset="-120"/>
+                        </a:rPr>
+                        <a:t>15 mg</a:t>
                       </a:r>
                       <a:endParaRPr lang="en-US" sz="1250" dirty="0">
                         <a:latin typeface="Malgun Gothic" charset="0"/>
@@ -29052,7 +29230,7 @@
                           <a:ea typeface="Malgun Gothic" pitchFamily="34" charset="-122"/>
                           <a:cs typeface="Malgun Gothic" pitchFamily="34" charset="-120"/>
                         </a:rPr>
-                        <a:t>41.8 mg</a:t>
+                        <a:t>40 mg</a:t>
                       </a:r>
                       <a:endParaRPr lang="en-US" sz="1250" dirty="0">
                         <a:latin typeface="Malgun Gothic" charset="0"/>
@@ -29224,7 +29402,46 @@
       </p:graphicFrame>
       <p:sp>
         <p:nvSpPr>
-          <p:cNvPr id="5" name="Shape 2"/>
+          <p:cNvPr id="5" name="Text 2"/>
+          <p:cNvSpPr/>
+          <p:nvPr/>
+        </p:nvSpPr>
+        <p:spPr>
+          <a:xfrm>
+            <a:off x="566928" y="3913632"/>
+            <a:ext cx="6675120" cy="274320"/>
+          </a:xfrm>
+          <a:prstGeom prst="rect">
+            <a:avLst/>
+          </a:prstGeom>
+          <a:noFill/>
+          <a:ln/>
+        </p:spPr>
+        <p:txBody>
+          <a:bodyPr wrap="square" lIns="0" tIns="0" rIns="0" bIns="0" rtlCol="0" anchor="t"/>
+          <a:lstStyle/>
+          <a:p>
+            <a:pPr algn="l" indent="0" marL="0">
+              <a:buNone/>
+            </a:pPr>
+            <a:r>
+              <a:rPr lang="en-US" sz="1150" dirty="0">
+                <a:solidFill>
+                  <a:srgbClr val="5E6B5F"/>
+                </a:solidFill>
+                <a:latin typeface="Malgun Gothic" pitchFamily="34" charset="0"/>
+                <a:ea typeface="Malgun Gothic" pitchFamily="34" charset="-122"/>
+                <a:cs typeface="Malgun Gothic" pitchFamily="34" charset="-120"/>
+              </a:rPr>
+              <a:t>총 내용량 750 mL</a:t>
+            </a:r>
+            <a:endParaRPr lang="en-US" sz="1150" dirty="0"/>
+          </a:p>
+        </p:txBody>
+      </p:sp>
+      <p:sp>
+        <p:nvSpPr>
+          <p:cNvPr id="6" name="Shape 3"/>
           <p:cNvSpPr/>
           <p:nvPr/>
         </p:nvSpPr>
@@ -29246,7 +29463,7 @@
       </p:sp>
       <p:sp>
         <p:nvSpPr>
-          <p:cNvPr id="6" name="Text 3"/>
+          <p:cNvPr id="7" name="Text 4"/>
           <p:cNvSpPr/>
           <p:nvPr/>
         </p:nvSpPr>
@@ -29285,7 +29502,7 @@
       </p:sp>
       <p:sp>
         <p:nvSpPr>
-          <p:cNvPr id="7" name="Text 4"/>
+          <p:cNvPr id="8" name="Text 5"/>
           <p:cNvSpPr/>
           <p:nvPr/>
         </p:nvSpPr>
@@ -29315,7 +29532,7 @@
               <a:buChar char="•"/>
             </a:pPr>
             <a:r>
-              <a:rPr lang="en-US" sz="1250" dirty="0">
+              <a:rPr lang="en-US" sz="1200" dirty="0">
                 <a:solidFill>
                   <a:srgbClr val="1F2A20"/>
                 </a:solidFill>
@@ -29323,9 +29540,9 @@
                 <a:ea typeface="Malgun Gothic" pitchFamily="34" charset="-122"/>
                 <a:cs typeface="Malgun Gothic" pitchFamily="34" charset="-120"/>
               </a:rPr>
-              <a:t>지방 6.0 g / 100 mL — 일반 시유 대비 높은 수준</a:t>
-            </a:r>
-            <a:endParaRPr lang="en-US" sz="1250" dirty="0"/>
+              <a:t>지방 4.5 g — 일반 시유 통상 범위(약 3.4~4.0 g)보다 높습니다</a:t>
+            </a:r>
+            <a:endParaRPr lang="en-US" sz="1200" dirty="0"/>
           </a:p>
           <a:p>
             <a:pPr marL="342900" indent="-342900">
@@ -29339,7 +29556,7 @@
               <a:buChar char="•"/>
             </a:pPr>
             <a:r>
-              <a:rPr lang="en-US" sz="1250" dirty="0">
+              <a:rPr lang="en-US" sz="1200" dirty="0">
                 <a:solidFill>
                   <a:srgbClr val="1F2A20"/>
                 </a:solidFill>
@@ -29347,9 +29564,9 @@
                 <a:ea typeface="Malgun Gothic" pitchFamily="34" charset="-122"/>
                 <a:cs typeface="Malgun Gothic" pitchFamily="34" charset="-120"/>
               </a:rPr>
-              <a:t>단백질 4.59 g — 가공 적성이 좋은 구간</a:t>
-            </a:r>
-            <a:endParaRPr lang="en-US" sz="1250" dirty="0"/>
+              <a:t>단백질 3.8 g — 요거트·그릭요거트 수율에 유리한 구간</a:t>
+            </a:r>
+            <a:endParaRPr lang="en-US" sz="1200" dirty="0"/>
           </a:p>
           <a:p>
             <a:pPr marL="342900" indent="-342900">
@@ -29363,7 +29580,7 @@
               <a:buChar char="•"/>
             </a:pPr>
             <a:r>
-              <a:rPr lang="en-US" sz="1250" dirty="0">
+              <a:rPr lang="en-US" sz="1200" dirty="0">
                 <a:solidFill>
                   <a:srgbClr val="1F2A20"/>
                 </a:solidFill>
@@ -29371,15 +29588,39 @@
                 <a:ea typeface="Malgun Gothic" pitchFamily="34" charset="-122"/>
                 <a:cs typeface="Malgun Gothic" pitchFamily="34" charset="-120"/>
               </a:rPr>
+              <a:t>탄수화물·단백질·지방의 열량 합이 표시 열량 75 kcal와 일치합니다</a:t>
+            </a:r>
+            <a:endParaRPr lang="en-US" sz="1200" dirty="0"/>
+          </a:p>
+          <a:p>
+            <a:pPr marL="342900" indent="-342900">
+              <a:lnSpc>
+                <a:spcPts val="2000"/>
+              </a:lnSpc>
+              <a:spcAft>
+                <a:spcPts val="800"/>
+              </a:spcAft>
+              <a:buSzPct val="100000"/>
+              <a:buChar char="•"/>
+            </a:pPr>
+            <a:r>
+              <a:rPr lang="en-US" sz="1200" dirty="0">
+                <a:solidFill>
+                  <a:srgbClr val="1F2A20"/>
+                </a:solidFill>
+                <a:latin typeface="Malgun Gothic" pitchFamily="34" charset="0"/>
+                <a:ea typeface="Malgun Gothic" pitchFamily="34" charset="-122"/>
+                <a:cs typeface="Malgun Gothic" pitchFamily="34" charset="-120"/>
+              </a:rPr>
               <a:t>진한 맛은 마케팅 문구가 아니라 성분표에 나옵니다</a:t>
             </a:r>
-            <a:endParaRPr lang="en-US" sz="1250" dirty="0"/>
-          </a:p>
-        </p:txBody>
-      </p:sp>
-      <p:sp>
-        <p:nvSpPr>
-          <p:cNvPr id="8" name="Shape 5"/>
+            <a:endParaRPr lang="en-US" sz="1200" dirty="0"/>
+          </a:p>
+        </p:txBody>
+      </p:sp>
+      <p:sp>
+        <p:nvSpPr>
+          <p:cNvPr id="9" name="Shape 6"/>
           <p:cNvSpPr/>
           <p:nvPr/>
         </p:nvSpPr>
@@ -29406,7 +29647,7 @@
       </p:sp>
       <p:sp>
         <p:nvSpPr>
-          <p:cNvPr id="9" name="Text 6"/>
+          <p:cNvPr id="10" name="Text 7"/>
           <p:cNvSpPr/>
           <p:nvPr/>
         </p:nvSpPr>
@@ -29445,7 +29686,7 @@
       </p:sp>
       <p:sp>
         <p:nvSpPr>
-          <p:cNvPr id="10" name="Text 7"/>
+          <p:cNvPr id="11" name="Text 8"/>
           <p:cNvSpPr/>
           <p:nvPr/>
         </p:nvSpPr>
@@ -29507,7 +29748,7 @@
       </p:sp>
       <p:sp>
         <p:nvSpPr>
-          <p:cNvPr id="11" name="Text 8"/>
+          <p:cNvPr id="12" name="Text 9"/>
           <p:cNvSpPr/>
           <p:nvPr/>
         </p:nvSpPr>
@@ -29538,7 +29779,7 @@
                 <a:ea typeface="Malgun Gothic" pitchFamily="34" charset="-122"/>
                 <a:cs typeface="Malgun Gothic" pitchFamily="34" charset="-120"/>
               </a:rPr>
-              <a:t>※ 성분값은 제품 시험 결과 기준이며, 원유 성분 변동에 따라 로트별 차이가 있을 수 있습니다.</a:t>
+              <a:t>※ 제품 영양정보 표시값 기준(100 mL당)이며, 원유 성분 변동에 따라 로트별 차이가 있을 수 있습니다. 일반 시유 범위는 참고값입니다.</a:t>
             </a:r>
             <a:endParaRPr lang="en-US" sz="1000" dirty="0"/>
           </a:p>
@@ -36883,7 +37124,7 @@
                 <a:ea typeface="Malgun Gothic" pitchFamily="34" charset="-122"/>
                 <a:cs typeface="Malgun Gothic" pitchFamily="34" charset="-120"/>
               </a:rPr>
-              <a:t>제안 — 함께 해볼 수 있는 시범사업 5건</a:t>
+              <a:t>제안 — 시범사업 5건, 그리고 확장 2건</a:t>
             </a:r>
             <a:endParaRPr lang="en-US" sz="3000" dirty="0"/>
           </a:p>
@@ -36922,7 +37163,7 @@
                 <a:ea typeface="Malgun Gothic" pitchFamily="34" charset="-122"/>
                 <a:cs typeface="Malgun Gothic" pitchFamily="34" charset="-120"/>
               </a:rPr>
-              <a:t>오늘 말씀드린 내용 중, 국립축산과학원의 측정·검증 역량이 붙으면 산업 전체가 쓸 수 있게 되는 것들을 뽑았습니다.</a:t>
+              <a:t>먼저 지금 바로 착수 가능한 5건입니다. 이어서 한 단계 더 나아간 확장 제안 2건을 말씀드리겠습니다.</a:t>
             </a:r>
             <a:endParaRPr lang="en-US" sz="1350" dirty="0"/>
           </a:p>
@@ -39858,7 +40099,7 @@
                 <a:ea typeface="Malgun Gothic" pitchFamily="34" charset="-122"/>
                 <a:cs typeface="Malgun Gothic" pitchFamily="34" charset="-120"/>
               </a:rPr>
-              <a:t>06 시범사업 제안</a:t>
+              <a:t>06 시범사업 제안 · 확장</a:t>
             </a:r>
             <a:endParaRPr lang="en-US" sz="1200" dirty="0"/>
           </a:p>
@@ -39897,7 +40138,7 @@
                 <a:ea typeface="Malgun Gothic" pitchFamily="34" charset="-122"/>
                 <a:cs typeface="Malgun Gothic" pitchFamily="34" charset="-120"/>
               </a:rPr>
-              <a:t>추진 로드맵 (안) — 3년</a:t>
+              <a:t>확장 제안 ① — 저지 사양실험목장</a:t>
             </a:r>
             <a:endParaRPr lang="en-US" sz="3000" dirty="0"/>
           </a:p>
@@ -39905,18 +40146,80 @@
       </p:sp>
       <p:sp>
         <p:nvSpPr>
-          <p:cNvPr id="4" name="Shape 2"/>
-          <p:cNvSpPr/>
-          <p:nvPr/>
-        </p:nvSpPr>
-        <p:spPr>
-          <a:xfrm>
-            <a:off x="566928" y="1371600"/>
-            <a:ext cx="3547872" cy="3520440"/>
+          <p:cNvPr id="4" name="Text 2"/>
+          <p:cNvSpPr/>
+          <p:nvPr/>
+        </p:nvSpPr>
+        <p:spPr>
+          <a:xfrm>
+            <a:off x="566928" y="1170432"/>
+            <a:ext cx="11064240" cy="685800"/>
+          </a:xfrm>
+          <a:prstGeom prst="rect">
+            <a:avLst/>
+          </a:prstGeom>
+          <a:noFill/>
+          <a:ln/>
+        </p:spPr>
+        <p:txBody>
+          <a:bodyPr wrap="square" lIns="0" tIns="0" rIns="0" bIns="0" rtlCol="0" anchor="t"/>
+          <a:lstStyle/>
+          <a:p>
+            <a:pPr algn="l" indent="0" marL="0">
+              <a:lnSpc>
+                <a:spcPts val="2000"/>
+              </a:lnSpc>
+              <a:buNone/>
+            </a:pPr>
+            <a:r>
+              <a:rPr lang="en-US" sz="1350" dirty="0">
+                <a:solidFill>
+                  <a:srgbClr val="5E6B5F"/>
+                </a:solidFill>
+                <a:latin typeface="Malgun Gothic" pitchFamily="34" charset="0"/>
+                <a:ea typeface="Malgun Gothic" pitchFamily="34" charset="-122"/>
+                <a:cs typeface="Malgun Gothic" pitchFamily="34" charset="-120"/>
+              </a:rPr>
+              <a:t>국내에는 저지 사양 데이터가 사실상 없습니다. 홀스타인 기준 사양표준을 저지에 그대로 적용하고 있는 것이 현실이고,</a:t>
+            </a:r>
+            <a:endParaRPr lang="en-US" sz="1350" dirty="0"/>
+          </a:p>
+          <a:p>
+            <a:pPr algn="l" indent="0" marL="0">
+              <a:lnSpc>
+                <a:spcPts val="2000"/>
+              </a:lnSpc>
+              <a:buNone/>
+            </a:pPr>
+            <a:r>
+              <a:rPr lang="en-US" sz="1350" dirty="0">
+                <a:solidFill>
+                  <a:srgbClr val="5E6B5F"/>
+                </a:solidFill>
+                <a:latin typeface="Malgun Gothic" pitchFamily="34" charset="0"/>
+                <a:ea typeface="Malgun Gothic" pitchFamily="34" charset="-122"/>
+                <a:cs typeface="Malgun Gothic" pitchFamily="34" charset="-120"/>
+              </a:rPr>
+              <a:t>저희도 처음에는 그렇게 시작해서 시행착오를 겪었습니다. 저희 목장은 이미 그 데이터를 쌓고 있는 상태입니다.</a:t>
+            </a:r>
+            <a:endParaRPr lang="en-US" sz="1350" dirty="0"/>
+          </a:p>
+        </p:txBody>
+      </p:sp>
+      <p:sp>
+        <p:nvSpPr>
+          <p:cNvPr id="5" name="Shape 3"/>
+          <p:cNvSpPr/>
+          <p:nvPr/>
+        </p:nvSpPr>
+        <p:spPr>
+          <a:xfrm>
+            <a:off x="566928" y="2011680"/>
+            <a:ext cx="3547872" cy="3063240"/>
           </a:xfrm>
           <a:prstGeom prst="roundRect">
             <a:avLst>
-              <a:gd name="adj" fmla="val 2597"/>
+              <a:gd name="adj" fmla="val 2985"/>
             </a:avLst>
           </a:prstGeom>
           <a:solidFill>
@@ -39934,36 +40237,36 @@
       </p:sp>
       <p:sp>
         <p:nvSpPr>
-          <p:cNvPr id="5" name="Shape 3"/>
-          <p:cNvSpPr/>
-          <p:nvPr/>
-        </p:nvSpPr>
-        <p:spPr>
-          <a:xfrm>
-            <a:off x="566928" y="1371600"/>
-            <a:ext cx="3547872" cy="868680"/>
+          <p:cNvPr id="6" name="Shape 4"/>
+          <p:cNvSpPr/>
+          <p:nvPr/>
+        </p:nvSpPr>
+        <p:spPr>
+          <a:xfrm>
+            <a:off x="566928" y="2011680"/>
+            <a:ext cx="3547872" cy="603504"/>
           </a:xfrm>
           <a:prstGeom prst="roundRect">
             <a:avLst>
-              <a:gd name="adj" fmla="val 10526"/>
+              <a:gd name="adj" fmla="val 15152"/>
             </a:avLst>
           </a:prstGeom>
           <a:solidFill>
-            <a:srgbClr val="97BC62"/>
+            <a:srgbClr val="B87333"/>
           </a:solidFill>
           <a:ln/>
         </p:spPr>
       </p:sp>
       <p:sp>
         <p:nvSpPr>
-          <p:cNvPr id="6" name="Text 4"/>
-          <p:cNvSpPr/>
-          <p:nvPr/>
-        </p:nvSpPr>
-        <p:spPr>
-          <a:xfrm>
-            <a:off x="768096" y="1444752"/>
-            <a:ext cx="3145536" cy="365760"/>
+          <p:cNvPr id="7" name="Text 5"/>
+          <p:cNvSpPr/>
+          <p:nvPr/>
+        </p:nvSpPr>
+        <p:spPr>
+          <a:xfrm>
+            <a:off x="749808" y="2011680"/>
+            <a:ext cx="3182112" cy="603504"/>
           </a:xfrm>
           <a:prstGeom prst="rect">
             <a:avLst/>
@@ -39979,56 +40282,17 @@
               <a:buNone/>
             </a:pPr>
             <a:r>
-              <a:rPr lang="en-US" sz="1300" b="1" dirty="0">
-                <a:solidFill>
-                  <a:srgbClr val="1F2A20"/>
-                </a:solidFill>
-                <a:latin typeface="Malgun Gothic" pitchFamily="34" charset="0"/>
-                <a:ea typeface="Malgun Gothic" pitchFamily="34" charset="-122"/>
-                <a:cs typeface="Malgun Gothic" pitchFamily="34" charset="-120"/>
-              </a:rPr>
-              <a:t>1년차</a:t>
-            </a:r>
-            <a:endParaRPr lang="en-US" sz="1300" dirty="0"/>
-          </a:p>
-        </p:txBody>
-      </p:sp>
-      <p:sp>
-        <p:nvSpPr>
-          <p:cNvPr id="7" name="Text 5"/>
-          <p:cNvSpPr/>
-          <p:nvPr/>
-        </p:nvSpPr>
-        <p:spPr>
-          <a:xfrm>
-            <a:off x="768096" y="1783080"/>
-            <a:ext cx="3145536" cy="402336"/>
-          </a:xfrm>
-          <a:prstGeom prst="rect">
-            <a:avLst/>
-          </a:prstGeom>
-          <a:noFill/>
-          <a:ln/>
-        </p:spPr>
-        <p:txBody>
-          <a:bodyPr wrap="square" lIns="0" tIns="0" rIns="0" bIns="0" rtlCol="0" anchor="ctr"/>
-          <a:lstStyle/>
-          <a:p>
-            <a:pPr indent="0" marL="0">
-              <a:buNone/>
-            </a:pPr>
-            <a:r>
-              <a:rPr lang="en-US" sz="2000" b="1" dirty="0">
-                <a:solidFill>
-                  <a:srgbClr val="1F2A20"/>
-                </a:solidFill>
-                <a:latin typeface="Malgun Gothic" pitchFamily="34" charset="0"/>
-                <a:ea typeface="Malgun Gothic" pitchFamily="34" charset="-122"/>
-                <a:cs typeface="Malgun Gothic" pitchFamily="34" charset="-120"/>
-              </a:rPr>
-              <a:t>실증</a:t>
-            </a:r>
-            <a:endParaRPr lang="en-US" sz="2000" dirty="0"/>
+              <a:rPr lang="en-US" sz="1450" b="1" dirty="0">
+                <a:solidFill>
+                  <a:srgbClr val="FFFFFF"/>
+                </a:solidFill>
+                <a:latin typeface="Malgun Gothic" pitchFamily="34" charset="0"/>
+                <a:ea typeface="Malgun Gothic" pitchFamily="34" charset="-122"/>
+                <a:cs typeface="Malgun Gothic" pitchFamily="34" charset="-120"/>
+              </a:rPr>
+              <a:t>왜 지금 가능한가</a:t>
+            </a:r>
+            <a:endParaRPr lang="en-US" sz="1450" dirty="0"/>
           </a:p>
         </p:txBody>
       </p:sp>
@@ -40040,8 +40304,8 @@
         </p:nvSpPr>
         <p:spPr>
           <a:xfrm>
-            <a:off x="804672" y="2395728"/>
-            <a:ext cx="3090672" cy="2331720"/>
+            <a:off x="786384" y="2761488"/>
+            <a:ext cx="3127248" cy="2194560"/>
           </a:xfrm>
           <a:prstGeom prst="rect">
             <a:avLst/>
@@ -40064,7 +40328,7 @@
               <a:buChar char="•"/>
             </a:pPr>
             <a:r>
-              <a:rPr lang="en-US" sz="1250" dirty="0">
+              <a:rPr lang="en-US" sz="1200" dirty="0">
                 <a:solidFill>
                   <a:srgbClr val="1F2A20"/>
                 </a:solidFill>
@@ -40072,9 +40336,9 @@
                 <a:ea typeface="Malgun Gothic" pitchFamily="34" charset="-122"/>
                 <a:cs typeface="Malgun Gothic" pitchFamily="34" charset="-120"/>
               </a:rPr>
-              <a:t>대조구 설계 및 기초 데이터 확보</a:t>
-            </a:r>
-            <a:endParaRPr lang="en-US" sz="1250" dirty="0"/>
+              <a:t>저지 단일 품종 70두 — 품종 교란요인이 없습니다</a:t>
+            </a:r>
+            <a:endParaRPr lang="en-US" sz="1200" dirty="0"/>
           </a:p>
           <a:p>
             <a:pPr marL="342900" indent="-342900">
@@ -40088,7 +40352,7 @@
               <a:buChar char="•"/>
             </a:pPr>
             <a:r>
-              <a:rPr lang="en-US" sz="1250" dirty="0">
+              <a:rPr lang="en-US" sz="1200" dirty="0">
                 <a:solidFill>
                   <a:srgbClr val="1F2A20"/>
                 </a:solidFill>
@@ -40096,9 +40360,9 @@
                 <a:ea typeface="Malgun Gothic" pitchFamily="34" charset="-122"/>
                 <a:cs typeface="Malgun Gothic" pitchFamily="34" charset="-120"/>
               </a:rPr>
-              <a:t>HBP·센서 구간 운영 개시</a:t>
-            </a:r>
-            <a:endParaRPr lang="en-US" sz="1250" dirty="0"/>
+              <a:t>위내센서로 개체별 반추위·활동·음수 데이터가 이미 축적 중</a:t>
+            </a:r>
+            <a:endParaRPr lang="en-US" sz="1200" dirty="0"/>
           </a:p>
           <a:p>
             <a:pPr marL="342900" indent="-342900">
@@ -40112,7 +40376,7 @@
               <a:buChar char="•"/>
             </a:pPr>
             <a:r>
-              <a:rPr lang="en-US" sz="1250" dirty="0">
+              <a:rPr lang="en-US" sz="1200" dirty="0">
                 <a:solidFill>
                   <a:srgbClr val="1F2A20"/>
                 </a:solidFill>
@@ -40120,9 +40384,9 @@
                 <a:ea typeface="Malgun Gothic" pitchFamily="34" charset="-122"/>
                 <a:cs typeface="Malgun Gothic" pitchFamily="34" charset="-120"/>
               </a:rPr>
-              <a:t>측정 항목·방법 표준 확정</a:t>
-            </a:r>
-            <a:endParaRPr lang="en-US" sz="1250" dirty="0"/>
+              <a:t>급이·번식·진료 기록을 수의사가 직접 남기고 있습니다</a:t>
+            </a:r>
+            <a:endParaRPr lang="en-US" sz="1200" dirty="0"/>
           </a:p>
           <a:p>
             <a:pPr marL="342900" indent="-342900">
@@ -40136,7 +40400,7 @@
               <a:buChar char="•"/>
             </a:pPr>
             <a:r>
-              <a:rPr lang="en-US" sz="1250" dirty="0">
+              <a:rPr lang="en-US" sz="1200" dirty="0">
                 <a:solidFill>
                   <a:srgbClr val="1F2A20"/>
                 </a:solidFill>
@@ -40144,9 +40408,9 @@
                 <a:ea typeface="Malgun Gothic" pitchFamily="34" charset="-122"/>
                 <a:cs typeface="Malgun Gothic" pitchFamily="34" charset="-120"/>
               </a:rPr>
-              <a:t>저지 A2A2 축군 조성 착수</a:t>
-            </a:r>
-            <a:endParaRPr lang="en-US" sz="1250" dirty="0"/>
+              <a:t>시험구와 대조구를 나눌 수 있는 축사 구조</a:t>
+            </a:r>
+            <a:endParaRPr lang="en-US" sz="1200" dirty="0"/>
           </a:p>
         </p:txBody>
       </p:sp>
@@ -40158,32 +40422,12 @@
         </p:nvSpPr>
         <p:spPr>
           <a:xfrm>
-            <a:off x="4169664" y="3017520"/>
-            <a:ext cx="310896" cy="237744"/>
-          </a:xfrm>
-          <a:prstGeom prst="rightArrow">
-            <a:avLst/>
-          </a:prstGeom>
-          <a:solidFill>
-            <a:srgbClr val="97BC62"/>
-          </a:solidFill>
-          <a:ln/>
-        </p:spPr>
-      </p:sp>
-      <p:sp>
-        <p:nvSpPr>
-          <p:cNvPr id="10" name="Shape 8"/>
-          <p:cNvSpPr/>
-          <p:nvPr/>
-        </p:nvSpPr>
-        <p:spPr>
-          <a:xfrm>
-            <a:off x="4315968" y="1371600"/>
-            <a:ext cx="3547872" cy="3520440"/>
+            <a:off x="4315968" y="2011680"/>
+            <a:ext cx="3547872" cy="3063240"/>
           </a:xfrm>
           <a:prstGeom prst="roundRect">
             <a:avLst>
-              <a:gd name="adj" fmla="val 2597"/>
+              <a:gd name="adj" fmla="val 2985"/>
             </a:avLst>
           </a:prstGeom>
           <a:solidFill>
@@ -40201,18 +40445,18 @@
       </p:sp>
       <p:sp>
         <p:nvSpPr>
-          <p:cNvPr id="11" name="Shape 9"/>
-          <p:cNvSpPr/>
-          <p:nvPr/>
-        </p:nvSpPr>
-        <p:spPr>
-          <a:xfrm>
-            <a:off x="4315968" y="1371600"/>
-            <a:ext cx="3547872" cy="868680"/>
+          <p:cNvPr id="10" name="Shape 8"/>
+          <p:cNvSpPr/>
+          <p:nvPr/>
+        </p:nvSpPr>
+        <p:spPr>
+          <a:xfrm>
+            <a:off x="4315968" y="2011680"/>
+            <a:ext cx="3547872" cy="603504"/>
           </a:xfrm>
           <a:prstGeom prst="roundRect">
             <a:avLst>
-              <a:gd name="adj" fmla="val 10526"/>
+              <a:gd name="adj" fmla="val 15152"/>
             </a:avLst>
           </a:prstGeom>
           <a:solidFill>
@@ -40223,92 +40467,53 @@
       </p:sp>
       <p:sp>
         <p:nvSpPr>
+          <p:cNvPr id="11" name="Text 9"/>
+          <p:cNvSpPr/>
+          <p:nvPr/>
+        </p:nvSpPr>
+        <p:spPr>
+          <a:xfrm>
+            <a:off x="4498848" y="2011680"/>
+            <a:ext cx="3182112" cy="603504"/>
+          </a:xfrm>
+          <a:prstGeom prst="rect">
+            <a:avLst/>
+          </a:prstGeom>
+          <a:noFill/>
+          <a:ln/>
+        </p:spPr>
+        <p:txBody>
+          <a:bodyPr wrap="square" lIns="0" tIns="0" rIns="0" bIns="0" rtlCol="0" anchor="ctr"/>
+          <a:lstStyle/>
+          <a:p>
+            <a:pPr indent="0" marL="0">
+              <a:buNone/>
+            </a:pPr>
+            <a:r>
+              <a:rPr lang="en-US" sz="1450" b="1" dirty="0">
+                <a:solidFill>
+                  <a:srgbClr val="FFFFFF"/>
+                </a:solidFill>
+                <a:latin typeface="Malgun Gothic" pitchFamily="34" charset="0"/>
+                <a:ea typeface="Malgun Gothic" pitchFamily="34" charset="-122"/>
+                <a:cs typeface="Malgun Gothic" pitchFamily="34" charset="-120"/>
+              </a:rPr>
+              <a:t>목장이 제공</a:t>
+            </a:r>
+            <a:endParaRPr lang="en-US" sz="1450" dirty="0"/>
+          </a:p>
+        </p:txBody>
+      </p:sp>
+      <p:sp>
+        <p:nvSpPr>
           <p:cNvPr id="12" name="Text 10"/>
           <p:cNvSpPr/>
           <p:nvPr/>
         </p:nvSpPr>
         <p:spPr>
           <a:xfrm>
-            <a:off x="4517136" y="1444752"/>
-            <a:ext cx="3145536" cy="365760"/>
-          </a:xfrm>
-          <a:prstGeom prst="rect">
-            <a:avLst/>
-          </a:prstGeom>
-          <a:noFill/>
-          <a:ln/>
-        </p:spPr>
-        <p:txBody>
-          <a:bodyPr wrap="square" lIns="0" tIns="0" rIns="0" bIns="0" rtlCol="0" anchor="ctr"/>
-          <a:lstStyle/>
-          <a:p>
-            <a:pPr indent="0" marL="0">
-              <a:buNone/>
-            </a:pPr>
-            <a:r>
-              <a:rPr lang="en-US" sz="1300" b="1" dirty="0">
-                <a:solidFill>
-                  <a:srgbClr val="FFFFFF"/>
-                </a:solidFill>
-                <a:latin typeface="Malgun Gothic" pitchFamily="34" charset="0"/>
-                <a:ea typeface="Malgun Gothic" pitchFamily="34" charset="-122"/>
-                <a:cs typeface="Malgun Gothic" pitchFamily="34" charset="-120"/>
-              </a:rPr>
-              <a:t>2년차</a:t>
-            </a:r>
-            <a:endParaRPr lang="en-US" sz="1300" dirty="0"/>
-          </a:p>
-        </p:txBody>
-      </p:sp>
-      <p:sp>
-        <p:nvSpPr>
-          <p:cNvPr id="13" name="Text 11"/>
-          <p:cNvSpPr/>
-          <p:nvPr/>
-        </p:nvSpPr>
-        <p:spPr>
-          <a:xfrm>
-            <a:off x="4517136" y="1783080"/>
-            <a:ext cx="3145536" cy="402336"/>
-          </a:xfrm>
-          <a:prstGeom prst="rect">
-            <a:avLst/>
-          </a:prstGeom>
-          <a:noFill/>
-          <a:ln/>
-        </p:spPr>
-        <p:txBody>
-          <a:bodyPr wrap="square" lIns="0" tIns="0" rIns="0" bIns="0" rtlCol="0" anchor="ctr"/>
-          <a:lstStyle/>
-          <a:p>
-            <a:pPr indent="0" marL="0">
-              <a:buNone/>
-            </a:pPr>
-            <a:r>
-              <a:rPr lang="en-US" sz="2000" b="1" dirty="0">
-                <a:solidFill>
-                  <a:srgbClr val="FFFFFF"/>
-                </a:solidFill>
-                <a:latin typeface="Malgun Gothic" pitchFamily="34" charset="0"/>
-                <a:ea typeface="Malgun Gothic" pitchFamily="34" charset="-122"/>
-                <a:cs typeface="Malgun Gothic" pitchFamily="34" charset="-120"/>
-              </a:rPr>
-              <a:t>확산</a:t>
-            </a:r>
-            <a:endParaRPr lang="en-US" sz="2000" dirty="0"/>
-          </a:p>
-        </p:txBody>
-      </p:sp>
-      <p:sp>
-        <p:nvSpPr>
-          <p:cNvPr id="14" name="Text 12"/>
-          <p:cNvSpPr/>
-          <p:nvPr/>
-        </p:nvSpPr>
-        <p:spPr>
-          <a:xfrm>
-            <a:off x="4553712" y="2395728"/>
-            <a:ext cx="3090672" cy="2331720"/>
+            <a:off x="4535424" y="2761488"/>
+            <a:ext cx="3127248" cy="2194560"/>
           </a:xfrm>
           <a:prstGeom prst="rect">
             <a:avLst/>
@@ -40331,7 +40536,7 @@
               <a:buChar char="•"/>
             </a:pPr>
             <a:r>
-              <a:rPr lang="en-US" sz="1250" dirty="0">
+              <a:rPr lang="en-US" sz="1200" dirty="0">
                 <a:solidFill>
                   <a:srgbClr val="1F2A20"/>
                 </a:solidFill>
@@ -40339,9 +40544,9 @@
                 <a:ea typeface="Malgun Gothic" pitchFamily="34" charset="-122"/>
                 <a:cs typeface="Malgun Gothic" pitchFamily="34" charset="-120"/>
               </a:rPr>
-              <a:t>인근 희망 농가로 실증 확대</a:t>
-            </a:r>
-            <a:endParaRPr lang="en-US" sz="1250" dirty="0"/>
+              <a:t>사양시험 대상 축군과 시험·대조 구간</a:t>
+            </a:r>
+            <a:endParaRPr lang="en-US" sz="1200" dirty="0"/>
           </a:p>
           <a:p>
             <a:pPr marL="342900" indent="-342900">
@@ -40355,7 +40560,7 @@
               <a:buChar char="•"/>
             </a:pPr>
             <a:r>
-              <a:rPr lang="en-US" sz="1250" dirty="0">
+              <a:rPr lang="en-US" sz="1200" dirty="0">
                 <a:solidFill>
                   <a:srgbClr val="1F2A20"/>
                 </a:solidFill>
@@ -40363,9 +40568,9 @@
                 <a:ea typeface="Malgun Gothic" pitchFamily="34" charset="-122"/>
                 <a:cs typeface="Malgun Gothic" pitchFamily="34" charset="-120"/>
               </a:rPr>
-              <a:t>농가용 관리 SOP 초안 배포</a:t>
-            </a:r>
-            <a:endParaRPr lang="en-US" sz="1250" dirty="0"/>
+              <a:t>개체별 센서 원데이터와 급이 기록</a:t>
+            </a:r>
+            <a:endParaRPr lang="en-US" sz="1200" dirty="0"/>
           </a:p>
           <a:p>
             <a:pPr marL="342900" indent="-342900">
@@ -40379,7 +40584,7 @@
               <a:buChar char="•"/>
             </a:pPr>
             <a:r>
-              <a:rPr lang="en-US" sz="1250" dirty="0">
+              <a:rPr lang="en-US" sz="1200" dirty="0">
                 <a:solidFill>
                   <a:srgbClr val="1F2A20"/>
                 </a:solidFill>
@@ -40387,9 +40592,9 @@
                 <a:ea typeface="Malgun Gothic" pitchFamily="34" charset="-122"/>
                 <a:cs typeface="Malgun Gothic" pitchFamily="34" charset="-120"/>
               </a:rPr>
-              <a:t>현장 교육·견학 프로그램 운영</a:t>
-            </a:r>
-            <a:endParaRPr lang="en-US" sz="1250" dirty="0"/>
+              <a:t>착유량·유성분 검정 자료</a:t>
+            </a:r>
+            <a:endParaRPr lang="en-US" sz="1200" dirty="0"/>
           </a:p>
           <a:p>
             <a:pPr marL="342900" indent="-342900">
@@ -40403,7 +40608,7 @@
               <a:buChar char="•"/>
             </a:pPr>
             <a:r>
-              <a:rPr lang="en-US" sz="1250" dirty="0">
+              <a:rPr lang="en-US" sz="1200" dirty="0">
                 <a:solidFill>
                   <a:srgbClr val="1F2A20"/>
                 </a:solidFill>
@@ -40411,46 +40616,26 @@
                 <a:ea typeface="Malgun Gothic" pitchFamily="34" charset="-122"/>
                 <a:cs typeface="Malgun Gothic" pitchFamily="34" charset="-120"/>
               </a:rPr>
-              <a:t>중간 성과 분석 및 보완</a:t>
-            </a:r>
-            <a:endParaRPr lang="en-US" sz="1250" dirty="0"/>
-          </a:p>
-        </p:txBody>
-      </p:sp>
-      <p:sp>
-        <p:nvSpPr>
-          <p:cNvPr id="15" name="Shape 13"/>
-          <p:cNvSpPr/>
-          <p:nvPr/>
-        </p:nvSpPr>
-        <p:spPr>
-          <a:xfrm>
-            <a:off x="7918704" y="3017520"/>
-            <a:ext cx="310896" cy="237744"/>
-          </a:xfrm>
-          <a:prstGeom prst="rightArrow">
-            <a:avLst/>
-          </a:prstGeom>
-          <a:solidFill>
-            <a:srgbClr val="97BC62"/>
-          </a:solidFill>
-          <a:ln/>
-        </p:spPr>
-      </p:sp>
-      <p:sp>
-        <p:nvSpPr>
-          <p:cNvPr id="16" name="Shape 14"/>
-          <p:cNvSpPr/>
-          <p:nvPr/>
-        </p:nvSpPr>
-        <p:spPr>
-          <a:xfrm>
-            <a:off x="8065008" y="1371600"/>
-            <a:ext cx="3547872" cy="3520440"/>
+              <a:t>장기 추적을 감당할 상주 관리 인력</a:t>
+            </a:r>
+            <a:endParaRPr lang="en-US" sz="1200" dirty="0"/>
+          </a:p>
+        </p:txBody>
+      </p:sp>
+      <p:sp>
+        <p:nvSpPr>
+          <p:cNvPr id="13" name="Shape 11"/>
+          <p:cNvSpPr/>
+          <p:nvPr/>
+        </p:nvSpPr>
+        <p:spPr>
+          <a:xfrm>
+            <a:off x="8065008" y="2011680"/>
+            <a:ext cx="3547872" cy="3063240"/>
           </a:xfrm>
           <a:prstGeom prst="roundRect">
             <a:avLst>
-              <a:gd name="adj" fmla="val 2597"/>
+              <a:gd name="adj" fmla="val 2985"/>
             </a:avLst>
           </a:prstGeom>
           <a:solidFill>
@@ -40468,36 +40653,36 @@
       </p:sp>
       <p:sp>
         <p:nvSpPr>
-          <p:cNvPr id="17" name="Shape 15"/>
-          <p:cNvSpPr/>
-          <p:nvPr/>
-        </p:nvSpPr>
-        <p:spPr>
-          <a:xfrm>
-            <a:off x="8065008" y="1371600"/>
-            <a:ext cx="3547872" cy="868680"/>
+          <p:cNvPr id="14" name="Shape 12"/>
+          <p:cNvSpPr/>
+          <p:nvPr/>
+        </p:nvSpPr>
+        <p:spPr>
+          <a:xfrm>
+            <a:off x="8065008" y="2011680"/>
+            <a:ext cx="3547872" cy="603504"/>
           </a:xfrm>
           <a:prstGeom prst="roundRect">
             <a:avLst>
-              <a:gd name="adj" fmla="val 10526"/>
+              <a:gd name="adj" fmla="val 15152"/>
             </a:avLst>
           </a:prstGeom>
           <a:solidFill>
-            <a:srgbClr val="B87333"/>
+            <a:srgbClr val="97BC62"/>
           </a:solidFill>
           <a:ln/>
         </p:spPr>
       </p:sp>
       <p:sp>
         <p:nvSpPr>
-          <p:cNvPr id="18" name="Text 16"/>
-          <p:cNvSpPr/>
-          <p:nvPr/>
-        </p:nvSpPr>
-        <p:spPr>
-          <a:xfrm>
-            <a:off x="8266176" y="1444752"/>
-            <a:ext cx="3145536" cy="365760"/>
+          <p:cNvPr id="15" name="Text 13"/>
+          <p:cNvSpPr/>
+          <p:nvPr/>
+        </p:nvSpPr>
+        <p:spPr>
+          <a:xfrm>
+            <a:off x="8247888" y="2011680"/>
+            <a:ext cx="3182112" cy="603504"/>
           </a:xfrm>
           <a:prstGeom prst="rect">
             <a:avLst/>
@@ -40513,69 +40698,30 @@
               <a:buNone/>
             </a:pPr>
             <a:r>
-              <a:rPr lang="en-US" sz="1300" b="1" dirty="0">
-                <a:solidFill>
-                  <a:srgbClr val="FFFFFF"/>
-                </a:solidFill>
-                <a:latin typeface="Malgun Gothic" pitchFamily="34" charset="0"/>
-                <a:ea typeface="Malgun Gothic" pitchFamily="34" charset="-122"/>
-                <a:cs typeface="Malgun Gothic" pitchFamily="34" charset="-120"/>
-              </a:rPr>
-              <a:t>3년차</a:t>
-            </a:r>
-            <a:endParaRPr lang="en-US" sz="1300" dirty="0"/>
-          </a:p>
-        </p:txBody>
-      </p:sp>
-      <p:sp>
-        <p:nvSpPr>
-          <p:cNvPr id="19" name="Text 17"/>
-          <p:cNvSpPr/>
-          <p:nvPr/>
-        </p:nvSpPr>
-        <p:spPr>
-          <a:xfrm>
-            <a:off x="8266176" y="1783080"/>
-            <a:ext cx="3145536" cy="402336"/>
-          </a:xfrm>
-          <a:prstGeom prst="rect">
-            <a:avLst/>
-          </a:prstGeom>
-          <a:noFill/>
-          <a:ln/>
-        </p:spPr>
-        <p:txBody>
-          <a:bodyPr wrap="square" lIns="0" tIns="0" rIns="0" bIns="0" rtlCol="0" anchor="ctr"/>
-          <a:lstStyle/>
-          <a:p>
-            <a:pPr indent="0" marL="0">
-              <a:buNone/>
-            </a:pPr>
-            <a:r>
-              <a:rPr lang="en-US" sz="2000" b="1" dirty="0">
-                <a:solidFill>
-                  <a:srgbClr val="FFFFFF"/>
-                </a:solidFill>
-                <a:latin typeface="Malgun Gothic" pitchFamily="34" charset="0"/>
-                <a:ea typeface="Malgun Gothic" pitchFamily="34" charset="-122"/>
-                <a:cs typeface="Malgun Gothic" pitchFamily="34" charset="-120"/>
-              </a:rPr>
-              <a:t>표준화</a:t>
-            </a:r>
-            <a:endParaRPr lang="en-US" sz="2000" dirty="0"/>
-          </a:p>
-        </p:txBody>
-      </p:sp>
-      <p:sp>
-        <p:nvSpPr>
-          <p:cNvPr id="20" name="Text 18"/>
-          <p:cNvSpPr/>
-          <p:nvPr/>
-        </p:nvSpPr>
-        <p:spPr>
-          <a:xfrm>
-            <a:off x="8302752" y="2395728"/>
-            <a:ext cx="3090672" cy="2331720"/>
+              <a:rPr lang="en-US" sz="1450" b="1" dirty="0">
+                <a:solidFill>
+                  <a:srgbClr val="1F2A20"/>
+                </a:solidFill>
+                <a:latin typeface="Malgun Gothic" pitchFamily="34" charset="0"/>
+                <a:ea typeface="Malgun Gothic" pitchFamily="34" charset="-122"/>
+                <a:cs typeface="Malgun Gothic" pitchFamily="34" charset="-120"/>
+              </a:rPr>
+              <a:t>연구기관에 요청</a:t>
+            </a:r>
+            <a:endParaRPr lang="en-US" sz="1450" dirty="0"/>
+          </a:p>
+        </p:txBody>
+      </p:sp>
+      <p:sp>
+        <p:nvSpPr>
+          <p:cNvPr id="16" name="Text 14"/>
+          <p:cNvSpPr/>
+          <p:nvPr/>
+        </p:nvSpPr>
+        <p:spPr>
+          <a:xfrm>
+            <a:off x="8284464" y="2761488"/>
+            <a:ext cx="3127248" cy="2194560"/>
           </a:xfrm>
           <a:prstGeom prst="rect">
             <a:avLst/>
@@ -40598,7 +40744,7 @@
               <a:buChar char="•"/>
             </a:pPr>
             <a:r>
-              <a:rPr lang="en-US" sz="1250" dirty="0">
+              <a:rPr lang="en-US" sz="1200" dirty="0">
                 <a:solidFill>
                   <a:srgbClr val="1F2A20"/>
                 </a:solidFill>
@@ -40606,9 +40752,9 @@
                 <a:ea typeface="Malgun Gothic" pitchFamily="34" charset="-122"/>
                 <a:cs typeface="Malgun Gothic" pitchFamily="34" charset="-120"/>
               </a:rPr>
-              <a:t>표준 매뉴얼·가이드라인 확정</a:t>
-            </a:r>
-            <a:endParaRPr lang="en-US" sz="1250" dirty="0"/>
+              <a:t>사양시험 설계 자문 — 처리구·표본수·기간</a:t>
+            </a:r>
+            <a:endParaRPr lang="en-US" sz="1200" dirty="0"/>
           </a:p>
           <a:p>
             <a:pPr marL="342900" indent="-342900">
@@ -40622,7 +40768,7 @@
               <a:buChar char="•"/>
             </a:pPr>
             <a:r>
-              <a:rPr lang="en-US" sz="1250" dirty="0">
+              <a:rPr lang="en-US" sz="1200" dirty="0">
                 <a:solidFill>
                   <a:srgbClr val="1F2A20"/>
                 </a:solidFill>
@@ -40630,9 +40776,9 @@
                 <a:ea typeface="Malgun Gothic" pitchFamily="34" charset="-122"/>
                 <a:cs typeface="Malgun Gothic" pitchFamily="34" charset="-120"/>
               </a:rPr>
-              <a:t>규모별 경제성 모델 공개</a:t>
-            </a:r>
-            <a:endParaRPr lang="en-US" sz="1250" dirty="0"/>
+              <a:t>저지 기준 사료 배합·영양 요구량 설계</a:t>
+            </a:r>
+            <a:endParaRPr lang="en-US" sz="1200" dirty="0"/>
           </a:p>
           <a:p>
             <a:pPr marL="342900" indent="-342900">
@@ -40646,7 +40792,7 @@
               <a:buChar char="•"/>
             </a:pPr>
             <a:r>
-              <a:rPr lang="en-US" sz="1250" dirty="0">
+              <a:rPr lang="en-US" sz="1200" dirty="0">
                 <a:solidFill>
                   <a:srgbClr val="1F2A20"/>
                 </a:solidFill>
@@ -40654,9 +40800,9 @@
                 <a:ea typeface="Malgun Gothic" pitchFamily="34" charset="-122"/>
                 <a:cs typeface="Malgun Gothic" pitchFamily="34" charset="-120"/>
               </a:rPr>
-              <a:t>실패 사례집 포함 결과 발표</a:t>
-            </a:r>
-            <a:endParaRPr lang="en-US" sz="1250" dirty="0"/>
+              <a:t>성적 검정과 통계 분석</a:t>
+            </a:r>
+            <a:endParaRPr lang="en-US" sz="1200" dirty="0"/>
           </a:p>
           <a:p>
             <a:pPr marL="342900" indent="-342900">
@@ -40670,7 +40816,7 @@
               <a:buChar char="•"/>
             </a:pPr>
             <a:r>
-              <a:rPr lang="en-US" sz="1250" dirty="0">
+              <a:rPr lang="en-US" sz="1200" dirty="0">
                 <a:solidFill>
                   <a:srgbClr val="1F2A20"/>
                 </a:solidFill>
@@ -40678,26 +40824,26 @@
                 <a:ea typeface="Malgun Gothic" pitchFamily="34" charset="-122"/>
                 <a:cs typeface="Malgun Gothic" pitchFamily="34" charset="-120"/>
               </a:rPr>
-              <a:t>전국 보급 사업 설계 근거 제공</a:t>
-            </a:r>
-            <a:endParaRPr lang="en-US" sz="1250" dirty="0"/>
-          </a:p>
-        </p:txBody>
-      </p:sp>
-      <p:sp>
-        <p:nvSpPr>
-          <p:cNvPr id="21" name="Shape 19"/>
-          <p:cNvSpPr/>
-          <p:nvPr/>
-        </p:nvSpPr>
-        <p:spPr>
-          <a:xfrm>
-            <a:off x="566928" y="5120640"/>
-            <a:ext cx="11064240" cy="1170432"/>
+              <a:t>저지 사양표준(안) 도출 및 보급</a:t>
+            </a:r>
+            <a:endParaRPr lang="en-US" sz="1200" dirty="0"/>
+          </a:p>
+        </p:txBody>
+      </p:sp>
+      <p:sp>
+        <p:nvSpPr>
+          <p:cNvPr id="17" name="Shape 15"/>
+          <p:cNvSpPr/>
+          <p:nvPr/>
+        </p:nvSpPr>
+        <p:spPr>
+          <a:xfrm>
+            <a:off x="566928" y="5303520"/>
+            <a:ext cx="11064240" cy="960120"/>
           </a:xfrm>
           <a:prstGeom prst="roundRect">
             <a:avLst>
-              <a:gd name="adj" fmla="val 7813"/>
+              <a:gd name="adj" fmla="val 9524"/>
             </a:avLst>
           </a:prstGeom>
           <a:solidFill>
@@ -40708,102 +40854,40 @@
       </p:sp>
       <p:sp>
         <p:nvSpPr>
-          <p:cNvPr id="22" name="Text 20"/>
-          <p:cNvSpPr/>
-          <p:nvPr/>
-        </p:nvSpPr>
-        <p:spPr>
-          <a:xfrm>
-            <a:off x="868680" y="5257800"/>
-            <a:ext cx="10424160" cy="310896"/>
-          </a:xfrm>
-          <a:prstGeom prst="rect">
-            <a:avLst/>
-          </a:prstGeom>
-          <a:noFill/>
-          <a:ln/>
-        </p:spPr>
-        <p:txBody>
-          <a:bodyPr wrap="square" lIns="0" tIns="0" rIns="0" bIns="0" rtlCol="0" anchor="t"/>
-          <a:lstStyle/>
-          <a:p>
-            <a:pPr algn="l" indent="0" marL="0">
-              <a:buNone/>
-            </a:pPr>
-            <a:r>
-              <a:rPr lang="en-US" sz="1400" b="1" dirty="0">
-                <a:solidFill>
-                  <a:srgbClr val="E9C79A"/>
-                </a:solidFill>
-                <a:latin typeface="Malgun Gothic" pitchFamily="34" charset="0"/>
-                <a:ea typeface="Malgun Gothic" pitchFamily="34" charset="-122"/>
-                <a:cs typeface="Malgun Gothic" pitchFamily="34" charset="-120"/>
-              </a:rPr>
-              <a:t>3년 뒤 남는 것</a:t>
-            </a:r>
-            <a:endParaRPr lang="en-US" sz="1400" dirty="0"/>
-          </a:p>
-        </p:txBody>
-      </p:sp>
-      <p:sp>
-        <p:nvSpPr>
-          <p:cNvPr id="23" name="Text 21"/>
-          <p:cNvSpPr/>
-          <p:nvPr/>
-        </p:nvSpPr>
-        <p:spPr>
-          <a:xfrm>
-            <a:off x="868680" y="5596128"/>
-            <a:ext cx="10424160" cy="621792"/>
-          </a:xfrm>
-          <a:prstGeom prst="rect">
-            <a:avLst/>
-          </a:prstGeom>
-          <a:noFill/>
-          <a:ln/>
-        </p:spPr>
-        <p:txBody>
-          <a:bodyPr wrap="square" lIns="0" tIns="0" rIns="0" bIns="0" rtlCol="0" anchor="t"/>
-          <a:lstStyle/>
-          <a:p>
-            <a:pPr algn="l" indent="0" marL="0">
-              <a:lnSpc>
-                <a:spcPts val="1900"/>
-              </a:lnSpc>
-              <a:buNone/>
-            </a:pPr>
-            <a:r>
-              <a:rPr lang="en-US" sz="1250" dirty="0">
-                <a:solidFill>
-                  <a:srgbClr val="FFFFFF"/>
-                </a:solidFill>
-                <a:latin typeface="Malgun Gothic" pitchFamily="34" charset="0"/>
-                <a:ea typeface="Malgun Gothic" pitchFamily="34" charset="-122"/>
-                <a:cs typeface="Malgun Gothic" pitchFamily="34" charset="-120"/>
-              </a:rPr>
-              <a:t>① 공인 측정으로 검증된 기술 효과 데이터  ② 농가가 따라 할 수 있는 표준 매뉴얼  ③ 규모별 경제성 모델</a:t>
-            </a:r>
-            <a:endParaRPr lang="en-US" sz="1250" dirty="0"/>
-          </a:p>
-          <a:p>
-            <a:pPr algn="l" indent="0" marL="0">
-              <a:lnSpc>
-                <a:spcPts val="1900"/>
-              </a:lnSpc>
-              <a:buNone/>
-            </a:pPr>
-            <a:r>
-              <a:rPr lang="en-US" sz="1250" dirty="0">
-                <a:solidFill>
-                  <a:srgbClr val="FFFFFF"/>
-                </a:solidFill>
-                <a:latin typeface="Malgun Gothic" pitchFamily="34" charset="0"/>
-                <a:ea typeface="Malgun Gothic" pitchFamily="34" charset="-122"/>
-                <a:cs typeface="Malgun Gothic" pitchFamily="34" charset="-120"/>
-              </a:rPr>
-              <a:t>④ 실패 사례까지 담긴 보급 자료  ⑤ 다음 국가 보급사업의 설계 근거</a:t>
-            </a:r>
-            <a:endParaRPr lang="en-US" sz="1250" dirty="0"/>
+          <p:cNvPr id="18" name="Text 16"/>
+          <p:cNvSpPr/>
+          <p:nvPr/>
+        </p:nvSpPr>
+        <p:spPr>
+          <a:xfrm>
+            <a:off x="822960" y="5303520"/>
+            <a:ext cx="10515600" cy="960120"/>
+          </a:xfrm>
+          <a:prstGeom prst="rect">
+            <a:avLst/>
+          </a:prstGeom>
+          <a:noFill/>
+          <a:ln/>
+        </p:spPr>
+        <p:txBody>
+          <a:bodyPr wrap="square" lIns="0" tIns="0" rIns="0" bIns="0" rtlCol="0" anchor="ctr"/>
+          <a:lstStyle/>
+          <a:p>
+            <a:pPr indent="0" marL="0">
+              <a:buNone/>
+            </a:pPr>
+            <a:r>
+              <a:rPr lang="en-US" sz="1500" b="1" dirty="0">
+                <a:solidFill>
+                  <a:srgbClr val="C8DDA9"/>
+                </a:solidFill>
+                <a:latin typeface="Malgun Gothic" pitchFamily="34" charset="0"/>
+                <a:ea typeface="Malgun Gothic" pitchFamily="34" charset="-122"/>
+                <a:cs typeface="Malgun Gothic" pitchFamily="34" charset="-120"/>
+              </a:rPr>
+              <a:t>저지 사양표준이 정리되면, 저희 한 목장이 아니라 앞으로 저지를 시작할 모든 농가가 시행착오를 건너뜁니다</a:t>
+            </a:r>
+            <a:endParaRPr lang="en-US" sz="1500" dirty="0"/>
           </a:p>
         </p:txBody>
       </p:sp>
@@ -40818,6 +40902,1519 @@
 <file path=ppt/slides/slide44.xml><?xml version="1.0" encoding="utf-8"?>
 <p:sld xmlns:a="http://schemas.openxmlformats.org/drawingml/2006/main" xmlns:r="http://schemas.openxmlformats.org/officeDocument/2006/relationships" xmlns:p="http://schemas.openxmlformats.org/presentationml/2006/main">
   <p:cSld name="Slide 44">
+    <p:bg>
+      <p:bgPr>
+        <a:solidFill>
+          <a:srgbClr val="13301F"/>
+        </a:solidFill>
+      </p:bgPr>
+    </p:bg>
+    <p:spTree>
+      <p:nvGrpSpPr>
+        <p:cNvPr id="1" name=""/>
+        <p:cNvGrpSpPr/>
+        <p:nvPr/>
+      </p:nvGrpSpPr>
+      <p:grpSpPr>
+        <a:xfrm>
+          <a:off x="0" y="0"/>
+          <a:ext cx="0" cy="0"/>
+          <a:chOff x="0" y="0"/>
+          <a:chExt cx="0" cy="0"/>
+        </a:xfrm>
+      </p:grpSpPr>
+      <p:sp>
+        <p:nvSpPr>
+          <p:cNvPr id="2" name="Text 0"/>
+          <p:cNvSpPr/>
+          <p:nvPr/>
+        </p:nvSpPr>
+        <p:spPr>
+          <a:xfrm>
+            <a:off x="566928" y="109728"/>
+            <a:ext cx="11064240" cy="274320"/>
+          </a:xfrm>
+          <a:prstGeom prst="rect">
+            <a:avLst/>
+          </a:prstGeom>
+          <a:noFill/>
+          <a:ln/>
+        </p:spPr>
+        <p:txBody>
+          <a:bodyPr wrap="square" lIns="0" tIns="0" rIns="0" bIns="0" rtlCol="0" anchor="ctr"/>
+          <a:lstStyle/>
+          <a:p>
+            <a:pPr indent="0" marL="0">
+              <a:buNone/>
+            </a:pPr>
+            <a:r>
+              <a:rPr lang="en-US" sz="1200" b="1" spc="150" kern="0" dirty="0">
+                <a:solidFill>
+                  <a:srgbClr val="97BC62"/>
+                </a:solidFill>
+                <a:latin typeface="Malgun Gothic" pitchFamily="34" charset="0"/>
+                <a:ea typeface="Malgun Gothic" pitchFamily="34" charset="-122"/>
+                <a:cs typeface="Malgun Gothic" pitchFamily="34" charset="-120"/>
+              </a:rPr>
+              <a:t>06 시범사업 제안 · 확장</a:t>
+            </a:r>
+            <a:endParaRPr lang="en-US" sz="1200" dirty="0"/>
+          </a:p>
+        </p:txBody>
+      </p:sp>
+      <p:sp>
+        <p:nvSpPr>
+          <p:cNvPr id="3" name="Text 1"/>
+          <p:cNvSpPr/>
+          <p:nvPr/>
+        </p:nvSpPr>
+        <p:spPr>
+          <a:xfrm>
+            <a:off x="566928" y="365760"/>
+            <a:ext cx="11064240" cy="731520"/>
+          </a:xfrm>
+          <a:prstGeom prst="rect">
+            <a:avLst/>
+          </a:prstGeom>
+          <a:noFill/>
+          <a:ln/>
+        </p:spPr>
+        <p:txBody>
+          <a:bodyPr wrap="square" lIns="0" tIns="0" rIns="0" bIns="0" rtlCol="0" anchor="ctr"/>
+          <a:lstStyle/>
+          <a:p>
+            <a:pPr algn="l" indent="0" marL="0">
+              <a:buNone/>
+            </a:pPr>
+            <a:r>
+              <a:rPr lang="en-US" sz="3000" b="1" dirty="0">
+                <a:solidFill>
+                  <a:srgbClr val="FFFFFF"/>
+                </a:solidFill>
+                <a:latin typeface="Malgun Gothic" pitchFamily="34" charset="0"/>
+                <a:ea typeface="Malgun Gothic" pitchFamily="34" charset="-122"/>
+                <a:cs typeface="Malgun Gothic" pitchFamily="34" charset="-120"/>
+              </a:rPr>
+              <a:t>확장 제안 ② — 생산에서 소비자까지, 하나의 디지털 트윈</a:t>
+            </a:r>
+            <a:endParaRPr lang="en-US" sz="3000" dirty="0"/>
+          </a:p>
+        </p:txBody>
+      </p:sp>
+      <p:sp>
+        <p:nvSpPr>
+          <p:cNvPr id="4" name="Text 2"/>
+          <p:cNvSpPr/>
+          <p:nvPr/>
+        </p:nvSpPr>
+        <p:spPr>
+          <a:xfrm>
+            <a:off x="566928" y="1170432"/>
+            <a:ext cx="11064240" cy="347472"/>
+          </a:xfrm>
+          <a:prstGeom prst="rect">
+            <a:avLst/>
+          </a:prstGeom>
+          <a:noFill/>
+          <a:ln/>
+        </p:spPr>
+        <p:txBody>
+          <a:bodyPr wrap="square" lIns="0" tIns="0" rIns="0" bIns="0" rtlCol="0" anchor="t"/>
+          <a:lstStyle/>
+          <a:p>
+            <a:pPr algn="l" indent="0" marL="0">
+              <a:buNone/>
+            </a:pPr>
+            <a:r>
+              <a:rPr lang="en-US" sz="1400" dirty="0">
+                <a:solidFill>
+                  <a:srgbClr val="E9C79A"/>
+                </a:solidFill>
+                <a:latin typeface="Malgun Gothic" pitchFamily="34" charset="0"/>
+                <a:ea typeface="Malgun Gothic" pitchFamily="34" charset="-122"/>
+                <a:cs typeface="Malgun Gothic" pitchFamily="34" charset="-120"/>
+              </a:rPr>
+              <a:t>목장은 스마트팜이 되었는데, 제조공장은 아직 스마트팩토리가 아닙니다. 데이터가 착유탱크에서 끊깁니다.</a:t>
+            </a:r>
+            <a:endParaRPr lang="en-US" sz="1400" dirty="0"/>
+          </a:p>
+        </p:txBody>
+      </p:sp>
+      <p:sp>
+        <p:nvSpPr>
+          <p:cNvPr id="5" name="Shape 3"/>
+          <p:cNvSpPr/>
+          <p:nvPr/>
+        </p:nvSpPr>
+        <p:spPr>
+          <a:xfrm>
+            <a:off x="566928" y="1691640"/>
+            <a:ext cx="1700784" cy="1371600"/>
+          </a:xfrm>
+          <a:prstGeom prst="roundRect">
+            <a:avLst>
+              <a:gd name="adj" fmla="val 6667"/>
+            </a:avLst>
+          </a:prstGeom>
+          <a:solidFill>
+            <a:srgbClr val="1C4028"/>
+          </a:solidFill>
+          <a:ln/>
+        </p:spPr>
+      </p:sp>
+      <p:sp>
+        <p:nvSpPr>
+          <p:cNvPr id="6" name="Text 4"/>
+          <p:cNvSpPr/>
+          <p:nvPr/>
+        </p:nvSpPr>
+        <p:spPr>
+          <a:xfrm>
+            <a:off x="640080" y="1801368"/>
+            <a:ext cx="1554480" cy="566928"/>
+          </a:xfrm>
+          <a:prstGeom prst="rect">
+            <a:avLst/>
+          </a:prstGeom>
+          <a:noFill/>
+          <a:ln/>
+        </p:spPr>
+        <p:txBody>
+          <a:bodyPr wrap="square" lIns="0" tIns="0" rIns="0" bIns="0" rtlCol="0" anchor="ctr"/>
+          <a:lstStyle/>
+          <a:p>
+            <a:pPr algn="ctr" indent="0" marL="0">
+              <a:lnSpc>
+                <a:spcPts val="1600"/>
+              </a:lnSpc>
+              <a:buNone/>
+            </a:pPr>
+            <a:r>
+              <a:rPr lang="en-US" sz="1250" b="1" dirty="0">
+                <a:solidFill>
+                  <a:srgbClr val="FFFFFF"/>
+                </a:solidFill>
+                <a:latin typeface="Malgun Gothic" pitchFamily="34" charset="0"/>
+                <a:ea typeface="Malgun Gothic" pitchFamily="34" charset="-122"/>
+                <a:cs typeface="Malgun Gothic" pitchFamily="34" charset="-120"/>
+              </a:rPr>
+              <a:t>사료 · 초지</a:t>
+            </a:r>
+            <a:endParaRPr lang="en-US" sz="1250" dirty="0"/>
+          </a:p>
+        </p:txBody>
+      </p:sp>
+      <p:sp>
+        <p:nvSpPr>
+          <p:cNvPr id="7" name="Text 5"/>
+          <p:cNvSpPr/>
+          <p:nvPr/>
+        </p:nvSpPr>
+        <p:spPr>
+          <a:xfrm>
+            <a:off x="640080" y="2395728"/>
+            <a:ext cx="1554480" cy="320040"/>
+          </a:xfrm>
+          <a:prstGeom prst="rect">
+            <a:avLst/>
+          </a:prstGeom>
+          <a:noFill/>
+          <a:ln/>
+        </p:spPr>
+        <p:txBody>
+          <a:bodyPr wrap="square" lIns="0" tIns="0" rIns="0" bIns="0" rtlCol="0" anchor="ctr"/>
+          <a:lstStyle/>
+          <a:p>
+            <a:pPr algn="ctr" indent="0" marL="0">
+              <a:buNone/>
+            </a:pPr>
+            <a:r>
+              <a:rPr lang="en-US" sz="1100" dirty="0">
+                <a:solidFill>
+                  <a:srgbClr val="FFFFFF"/>
+                </a:solidFill>
+                <a:latin typeface="Malgun Gothic" pitchFamily="34" charset="0"/>
+                <a:ea typeface="Malgun Gothic" pitchFamily="34" charset="-122"/>
+                <a:cs typeface="Malgun Gothic" pitchFamily="34" charset="-120"/>
+              </a:rPr>
+              <a:t>부분</a:t>
+            </a:r>
+            <a:endParaRPr lang="en-US" sz="1100" dirty="0"/>
+          </a:p>
+        </p:txBody>
+      </p:sp>
+      <p:sp>
+        <p:nvSpPr>
+          <p:cNvPr id="8" name="Shape 6"/>
+          <p:cNvSpPr/>
+          <p:nvPr/>
+        </p:nvSpPr>
+        <p:spPr>
+          <a:xfrm>
+            <a:off x="2304288" y="2258568"/>
+            <a:ext cx="310896" cy="237744"/>
+          </a:xfrm>
+          <a:prstGeom prst="rightArrow">
+            <a:avLst/>
+          </a:prstGeom>
+          <a:solidFill>
+            <a:srgbClr val="97BC62"/>
+          </a:solidFill>
+          <a:ln/>
+        </p:spPr>
+      </p:sp>
+      <p:sp>
+        <p:nvSpPr>
+          <p:cNvPr id="9" name="Shape 7"/>
+          <p:cNvSpPr/>
+          <p:nvPr/>
+        </p:nvSpPr>
+        <p:spPr>
+          <a:xfrm>
+            <a:off x="2450592" y="1691640"/>
+            <a:ext cx="1700784" cy="1371600"/>
+          </a:xfrm>
+          <a:prstGeom prst="roundRect">
+            <a:avLst>
+              <a:gd name="adj" fmla="val 6667"/>
+            </a:avLst>
+          </a:prstGeom>
+          <a:solidFill>
+            <a:srgbClr val="2C5F2D"/>
+          </a:solidFill>
+          <a:ln/>
+        </p:spPr>
+      </p:sp>
+      <p:sp>
+        <p:nvSpPr>
+          <p:cNvPr id="10" name="Text 8"/>
+          <p:cNvSpPr/>
+          <p:nvPr/>
+        </p:nvSpPr>
+        <p:spPr>
+          <a:xfrm>
+            <a:off x="2523744" y="1801368"/>
+            <a:ext cx="1554480" cy="566928"/>
+          </a:xfrm>
+          <a:prstGeom prst="rect">
+            <a:avLst/>
+          </a:prstGeom>
+          <a:noFill/>
+          <a:ln/>
+        </p:spPr>
+        <p:txBody>
+          <a:bodyPr wrap="square" lIns="0" tIns="0" rIns="0" bIns="0" rtlCol="0" anchor="ctr"/>
+          <a:lstStyle/>
+          <a:p>
+            <a:pPr algn="ctr" indent="0" marL="0">
+              <a:lnSpc>
+                <a:spcPts val="1600"/>
+              </a:lnSpc>
+              <a:buNone/>
+            </a:pPr>
+            <a:r>
+              <a:rPr lang="en-US" sz="1250" b="1" dirty="0">
+                <a:solidFill>
+                  <a:srgbClr val="FFFFFF"/>
+                </a:solidFill>
+                <a:latin typeface="Malgun Gothic" pitchFamily="34" charset="0"/>
+                <a:ea typeface="Malgun Gothic" pitchFamily="34" charset="-122"/>
+                <a:cs typeface="Malgun Gothic" pitchFamily="34" charset="-120"/>
+              </a:rPr>
+              <a:t>소 (사양·번식)</a:t>
+            </a:r>
+            <a:endParaRPr lang="en-US" sz="1250" dirty="0"/>
+          </a:p>
+        </p:txBody>
+      </p:sp>
+      <p:sp>
+        <p:nvSpPr>
+          <p:cNvPr id="11" name="Text 9"/>
+          <p:cNvSpPr/>
+          <p:nvPr/>
+        </p:nvSpPr>
+        <p:spPr>
+          <a:xfrm>
+            <a:off x="2523744" y="2395728"/>
+            <a:ext cx="1554480" cy="320040"/>
+          </a:xfrm>
+          <a:prstGeom prst="rect">
+            <a:avLst/>
+          </a:prstGeom>
+          <a:noFill/>
+          <a:ln/>
+        </p:spPr>
+        <p:txBody>
+          <a:bodyPr wrap="square" lIns="0" tIns="0" rIns="0" bIns="0" rtlCol="0" anchor="ctr"/>
+          <a:lstStyle/>
+          <a:p>
+            <a:pPr algn="ctr" indent="0" marL="0">
+              <a:buNone/>
+            </a:pPr>
+            <a:r>
+              <a:rPr lang="en-US" sz="1100" dirty="0">
+                <a:solidFill>
+                  <a:srgbClr val="C8DDA9"/>
+                </a:solidFill>
+                <a:latin typeface="Malgun Gothic" pitchFamily="34" charset="0"/>
+                <a:ea typeface="Malgun Gothic" pitchFamily="34" charset="-122"/>
+                <a:cs typeface="Malgun Gothic" pitchFamily="34" charset="-120"/>
+              </a:rPr>
+              <a:t>구축</a:t>
+            </a:r>
+            <a:endParaRPr lang="en-US" sz="1100" dirty="0"/>
+          </a:p>
+        </p:txBody>
+      </p:sp>
+      <p:sp>
+        <p:nvSpPr>
+          <p:cNvPr id="12" name="Shape 10"/>
+          <p:cNvSpPr/>
+          <p:nvPr/>
+        </p:nvSpPr>
+        <p:spPr>
+          <a:xfrm>
+            <a:off x="4187952" y="2258568"/>
+            <a:ext cx="310896" cy="237744"/>
+          </a:xfrm>
+          <a:prstGeom prst="rightArrow">
+            <a:avLst/>
+          </a:prstGeom>
+          <a:solidFill>
+            <a:srgbClr val="97BC62"/>
+          </a:solidFill>
+          <a:ln/>
+        </p:spPr>
+      </p:sp>
+      <p:sp>
+        <p:nvSpPr>
+          <p:cNvPr id="13" name="Shape 11"/>
+          <p:cNvSpPr/>
+          <p:nvPr/>
+        </p:nvSpPr>
+        <p:spPr>
+          <a:xfrm>
+            <a:off x="4334256" y="1691640"/>
+            <a:ext cx="1700784" cy="1371600"/>
+          </a:xfrm>
+          <a:prstGeom prst="roundRect">
+            <a:avLst>
+              <a:gd name="adj" fmla="val 6667"/>
+            </a:avLst>
+          </a:prstGeom>
+          <a:solidFill>
+            <a:srgbClr val="2C5F2D"/>
+          </a:solidFill>
+          <a:ln/>
+        </p:spPr>
+      </p:sp>
+      <p:sp>
+        <p:nvSpPr>
+          <p:cNvPr id="14" name="Text 12"/>
+          <p:cNvSpPr/>
+          <p:nvPr/>
+        </p:nvSpPr>
+        <p:spPr>
+          <a:xfrm>
+            <a:off x="4407408" y="1801368"/>
+            <a:ext cx="1554480" cy="566928"/>
+          </a:xfrm>
+          <a:prstGeom prst="rect">
+            <a:avLst/>
+          </a:prstGeom>
+          <a:noFill/>
+          <a:ln/>
+        </p:spPr>
+        <p:txBody>
+          <a:bodyPr wrap="square" lIns="0" tIns="0" rIns="0" bIns="0" rtlCol="0" anchor="ctr"/>
+          <a:lstStyle/>
+          <a:p>
+            <a:pPr algn="ctr" indent="0" marL="0">
+              <a:lnSpc>
+                <a:spcPts val="1600"/>
+              </a:lnSpc>
+              <a:buNone/>
+            </a:pPr>
+            <a:r>
+              <a:rPr lang="en-US" sz="1250" b="1" dirty="0">
+                <a:solidFill>
+                  <a:srgbClr val="FFFFFF"/>
+                </a:solidFill>
+                <a:latin typeface="Malgun Gothic" pitchFamily="34" charset="0"/>
+                <a:ea typeface="Malgun Gothic" pitchFamily="34" charset="-122"/>
+                <a:cs typeface="Malgun Gothic" pitchFamily="34" charset="-120"/>
+              </a:rPr>
+              <a:t>착유 · 집유</a:t>
+            </a:r>
+            <a:endParaRPr lang="en-US" sz="1250" dirty="0"/>
+          </a:p>
+        </p:txBody>
+      </p:sp>
+      <p:sp>
+        <p:nvSpPr>
+          <p:cNvPr id="15" name="Text 13"/>
+          <p:cNvSpPr/>
+          <p:nvPr/>
+        </p:nvSpPr>
+        <p:spPr>
+          <a:xfrm>
+            <a:off x="4407408" y="2395728"/>
+            <a:ext cx="1554480" cy="320040"/>
+          </a:xfrm>
+          <a:prstGeom prst="rect">
+            <a:avLst/>
+          </a:prstGeom>
+          <a:noFill/>
+          <a:ln/>
+        </p:spPr>
+        <p:txBody>
+          <a:bodyPr wrap="square" lIns="0" tIns="0" rIns="0" bIns="0" rtlCol="0" anchor="ctr"/>
+          <a:lstStyle/>
+          <a:p>
+            <a:pPr algn="ctr" indent="0" marL="0">
+              <a:buNone/>
+            </a:pPr>
+            <a:r>
+              <a:rPr lang="en-US" sz="1100" dirty="0">
+                <a:solidFill>
+                  <a:srgbClr val="C8DDA9"/>
+                </a:solidFill>
+                <a:latin typeface="Malgun Gothic" pitchFamily="34" charset="0"/>
+                <a:ea typeface="Malgun Gothic" pitchFamily="34" charset="-122"/>
+                <a:cs typeface="Malgun Gothic" pitchFamily="34" charset="-120"/>
+              </a:rPr>
+              <a:t>구축</a:t>
+            </a:r>
+            <a:endParaRPr lang="en-US" sz="1100" dirty="0"/>
+          </a:p>
+        </p:txBody>
+      </p:sp>
+      <p:sp>
+        <p:nvSpPr>
+          <p:cNvPr id="16" name="Shape 14"/>
+          <p:cNvSpPr/>
+          <p:nvPr/>
+        </p:nvSpPr>
+        <p:spPr>
+          <a:xfrm>
+            <a:off x="6071616" y="2258568"/>
+            <a:ext cx="310896" cy="237744"/>
+          </a:xfrm>
+          <a:prstGeom prst="rightArrow">
+            <a:avLst/>
+          </a:prstGeom>
+          <a:solidFill>
+            <a:srgbClr val="97BC62"/>
+          </a:solidFill>
+          <a:ln/>
+        </p:spPr>
+      </p:sp>
+      <p:sp>
+        <p:nvSpPr>
+          <p:cNvPr id="17" name="Shape 15"/>
+          <p:cNvSpPr/>
+          <p:nvPr/>
+        </p:nvSpPr>
+        <p:spPr>
+          <a:xfrm>
+            <a:off x="6217920" y="1691640"/>
+            <a:ext cx="1700784" cy="1371600"/>
+          </a:xfrm>
+          <a:prstGeom prst="roundRect">
+            <a:avLst>
+              <a:gd name="adj" fmla="val 6667"/>
+            </a:avLst>
+          </a:prstGeom>
+          <a:solidFill>
+            <a:srgbClr val="B87333"/>
+          </a:solidFill>
+          <a:ln/>
+        </p:spPr>
+      </p:sp>
+      <p:sp>
+        <p:nvSpPr>
+          <p:cNvPr id="18" name="Text 16"/>
+          <p:cNvSpPr/>
+          <p:nvPr/>
+        </p:nvSpPr>
+        <p:spPr>
+          <a:xfrm>
+            <a:off x="6291072" y="1801368"/>
+            <a:ext cx="1554480" cy="566928"/>
+          </a:xfrm>
+          <a:prstGeom prst="rect">
+            <a:avLst/>
+          </a:prstGeom>
+          <a:noFill/>
+          <a:ln/>
+        </p:spPr>
+        <p:txBody>
+          <a:bodyPr wrap="square" lIns="0" tIns="0" rIns="0" bIns="0" rtlCol="0" anchor="ctr"/>
+          <a:lstStyle/>
+          <a:p>
+            <a:pPr algn="ctr" indent="0" marL="0">
+              <a:lnSpc>
+                <a:spcPts val="1600"/>
+              </a:lnSpc>
+              <a:buNone/>
+            </a:pPr>
+            <a:r>
+              <a:rPr lang="en-US" sz="1250" b="1" dirty="0">
+                <a:solidFill>
+                  <a:srgbClr val="FFFFFF"/>
+                </a:solidFill>
+                <a:latin typeface="Malgun Gothic" pitchFamily="34" charset="0"/>
+                <a:ea typeface="Malgun Gothic" pitchFamily="34" charset="-122"/>
+                <a:cs typeface="Malgun Gothic" pitchFamily="34" charset="-120"/>
+              </a:rPr>
+              <a:t>제조공장</a:t>
+            </a:r>
+            <a:endParaRPr lang="en-US" sz="1250" dirty="0"/>
+          </a:p>
+        </p:txBody>
+      </p:sp>
+      <p:sp>
+        <p:nvSpPr>
+          <p:cNvPr id="19" name="Text 17"/>
+          <p:cNvSpPr/>
+          <p:nvPr/>
+        </p:nvSpPr>
+        <p:spPr>
+          <a:xfrm>
+            <a:off x="6291072" y="2395728"/>
+            <a:ext cx="1554480" cy="320040"/>
+          </a:xfrm>
+          <a:prstGeom prst="rect">
+            <a:avLst/>
+          </a:prstGeom>
+          <a:noFill/>
+          <a:ln/>
+        </p:spPr>
+        <p:txBody>
+          <a:bodyPr wrap="square" lIns="0" tIns="0" rIns="0" bIns="0" rtlCol="0" anchor="ctr"/>
+          <a:lstStyle/>
+          <a:p>
+            <a:pPr algn="ctr" indent="0" marL="0">
+              <a:buNone/>
+            </a:pPr>
+            <a:r>
+              <a:rPr lang="en-US" sz="1100" dirty="0">
+                <a:solidFill>
+                  <a:srgbClr val="FFFFFF"/>
+                </a:solidFill>
+                <a:latin typeface="Malgun Gothic" pitchFamily="34" charset="0"/>
+                <a:ea typeface="Malgun Gothic" pitchFamily="34" charset="-122"/>
+                <a:cs typeface="Malgun Gothic" pitchFamily="34" charset="-120"/>
+              </a:rPr>
+              <a:t>미구축</a:t>
+            </a:r>
+            <a:endParaRPr lang="en-US" sz="1100" dirty="0"/>
+          </a:p>
+        </p:txBody>
+      </p:sp>
+      <p:sp>
+        <p:nvSpPr>
+          <p:cNvPr id="20" name="Shape 18"/>
+          <p:cNvSpPr/>
+          <p:nvPr/>
+        </p:nvSpPr>
+        <p:spPr>
+          <a:xfrm>
+            <a:off x="7955280" y="2258568"/>
+            <a:ext cx="310896" cy="237744"/>
+          </a:xfrm>
+          <a:prstGeom prst="rightArrow">
+            <a:avLst/>
+          </a:prstGeom>
+          <a:solidFill>
+            <a:srgbClr val="97BC62"/>
+          </a:solidFill>
+          <a:ln/>
+        </p:spPr>
+      </p:sp>
+      <p:sp>
+        <p:nvSpPr>
+          <p:cNvPr id="21" name="Shape 19"/>
+          <p:cNvSpPr/>
+          <p:nvPr/>
+        </p:nvSpPr>
+        <p:spPr>
+          <a:xfrm>
+            <a:off x="8101584" y="1691640"/>
+            <a:ext cx="1700784" cy="1371600"/>
+          </a:xfrm>
+          <a:prstGeom prst="roundRect">
+            <a:avLst>
+              <a:gd name="adj" fmla="val 6667"/>
+            </a:avLst>
+          </a:prstGeom>
+          <a:solidFill>
+            <a:srgbClr val="B87333"/>
+          </a:solidFill>
+          <a:ln/>
+        </p:spPr>
+      </p:sp>
+      <p:sp>
+        <p:nvSpPr>
+          <p:cNvPr id="22" name="Text 20"/>
+          <p:cNvSpPr/>
+          <p:nvPr/>
+        </p:nvSpPr>
+        <p:spPr>
+          <a:xfrm>
+            <a:off x="8174736" y="1801368"/>
+            <a:ext cx="1554480" cy="566928"/>
+          </a:xfrm>
+          <a:prstGeom prst="rect">
+            <a:avLst/>
+          </a:prstGeom>
+          <a:noFill/>
+          <a:ln/>
+        </p:spPr>
+        <p:txBody>
+          <a:bodyPr wrap="square" lIns="0" tIns="0" rIns="0" bIns="0" rtlCol="0" anchor="ctr"/>
+          <a:lstStyle/>
+          <a:p>
+            <a:pPr algn="ctr" indent="0" marL="0">
+              <a:lnSpc>
+                <a:spcPts val="1600"/>
+              </a:lnSpc>
+              <a:buNone/>
+            </a:pPr>
+            <a:r>
+              <a:rPr lang="en-US" sz="1250" b="1" dirty="0">
+                <a:solidFill>
+                  <a:srgbClr val="FFFFFF"/>
+                </a:solidFill>
+                <a:latin typeface="Malgun Gothic" pitchFamily="34" charset="0"/>
+                <a:ea typeface="Malgun Gothic" pitchFamily="34" charset="-122"/>
+                <a:cs typeface="Malgun Gothic" pitchFamily="34" charset="-120"/>
+              </a:rPr>
+              <a:t>유통 · 물류</a:t>
+            </a:r>
+            <a:endParaRPr lang="en-US" sz="1250" dirty="0"/>
+          </a:p>
+        </p:txBody>
+      </p:sp>
+      <p:sp>
+        <p:nvSpPr>
+          <p:cNvPr id="23" name="Text 21"/>
+          <p:cNvSpPr/>
+          <p:nvPr/>
+        </p:nvSpPr>
+        <p:spPr>
+          <a:xfrm>
+            <a:off x="8174736" y="2395728"/>
+            <a:ext cx="1554480" cy="320040"/>
+          </a:xfrm>
+          <a:prstGeom prst="rect">
+            <a:avLst/>
+          </a:prstGeom>
+          <a:noFill/>
+          <a:ln/>
+        </p:spPr>
+        <p:txBody>
+          <a:bodyPr wrap="square" lIns="0" tIns="0" rIns="0" bIns="0" rtlCol="0" anchor="ctr"/>
+          <a:lstStyle/>
+          <a:p>
+            <a:pPr algn="ctr" indent="0" marL="0">
+              <a:buNone/>
+            </a:pPr>
+            <a:r>
+              <a:rPr lang="en-US" sz="1100" dirty="0">
+                <a:solidFill>
+                  <a:srgbClr val="FFFFFF"/>
+                </a:solidFill>
+                <a:latin typeface="Malgun Gothic" pitchFamily="34" charset="0"/>
+                <a:ea typeface="Malgun Gothic" pitchFamily="34" charset="-122"/>
+                <a:cs typeface="Malgun Gothic" pitchFamily="34" charset="-120"/>
+              </a:rPr>
+              <a:t>미구축</a:t>
+            </a:r>
+            <a:endParaRPr lang="en-US" sz="1100" dirty="0"/>
+          </a:p>
+        </p:txBody>
+      </p:sp>
+      <p:sp>
+        <p:nvSpPr>
+          <p:cNvPr id="24" name="Shape 22"/>
+          <p:cNvSpPr/>
+          <p:nvPr/>
+        </p:nvSpPr>
+        <p:spPr>
+          <a:xfrm>
+            <a:off x="9838944" y="2258568"/>
+            <a:ext cx="310896" cy="237744"/>
+          </a:xfrm>
+          <a:prstGeom prst="rightArrow">
+            <a:avLst/>
+          </a:prstGeom>
+          <a:solidFill>
+            <a:srgbClr val="97BC62"/>
+          </a:solidFill>
+          <a:ln/>
+        </p:spPr>
+      </p:sp>
+      <p:sp>
+        <p:nvSpPr>
+          <p:cNvPr id="25" name="Shape 23"/>
+          <p:cNvSpPr/>
+          <p:nvPr/>
+        </p:nvSpPr>
+        <p:spPr>
+          <a:xfrm>
+            <a:off x="9985248" y="1691640"/>
+            <a:ext cx="1700784" cy="1371600"/>
+          </a:xfrm>
+          <a:prstGeom prst="roundRect">
+            <a:avLst>
+              <a:gd name="adj" fmla="val 6667"/>
+            </a:avLst>
+          </a:prstGeom>
+          <a:solidFill>
+            <a:srgbClr val="B87333"/>
+          </a:solidFill>
+          <a:ln/>
+        </p:spPr>
+      </p:sp>
+      <p:sp>
+        <p:nvSpPr>
+          <p:cNvPr id="26" name="Text 24"/>
+          <p:cNvSpPr/>
+          <p:nvPr/>
+        </p:nvSpPr>
+        <p:spPr>
+          <a:xfrm>
+            <a:off x="10058400" y="1801368"/>
+            <a:ext cx="1554480" cy="566928"/>
+          </a:xfrm>
+          <a:prstGeom prst="rect">
+            <a:avLst/>
+          </a:prstGeom>
+          <a:noFill/>
+          <a:ln/>
+        </p:spPr>
+        <p:txBody>
+          <a:bodyPr wrap="square" lIns="0" tIns="0" rIns="0" bIns="0" rtlCol="0" anchor="ctr"/>
+          <a:lstStyle/>
+          <a:p>
+            <a:pPr algn="ctr" indent="0" marL="0">
+              <a:lnSpc>
+                <a:spcPts val="1600"/>
+              </a:lnSpc>
+              <a:buNone/>
+            </a:pPr>
+            <a:r>
+              <a:rPr lang="en-US" sz="1250" b="1" dirty="0">
+                <a:solidFill>
+                  <a:srgbClr val="FFFFFF"/>
+                </a:solidFill>
+                <a:latin typeface="Malgun Gothic" pitchFamily="34" charset="0"/>
+                <a:ea typeface="Malgun Gothic" pitchFamily="34" charset="-122"/>
+                <a:cs typeface="Malgun Gothic" pitchFamily="34" charset="-120"/>
+              </a:rPr>
+              <a:t>소비자</a:t>
+            </a:r>
+            <a:endParaRPr lang="en-US" sz="1250" dirty="0"/>
+          </a:p>
+        </p:txBody>
+      </p:sp>
+      <p:sp>
+        <p:nvSpPr>
+          <p:cNvPr id="27" name="Text 25"/>
+          <p:cNvSpPr/>
+          <p:nvPr/>
+        </p:nvSpPr>
+        <p:spPr>
+          <a:xfrm>
+            <a:off x="10058400" y="2395728"/>
+            <a:ext cx="1554480" cy="320040"/>
+          </a:xfrm>
+          <a:prstGeom prst="rect">
+            <a:avLst/>
+          </a:prstGeom>
+          <a:noFill/>
+          <a:ln/>
+        </p:spPr>
+        <p:txBody>
+          <a:bodyPr wrap="square" lIns="0" tIns="0" rIns="0" bIns="0" rtlCol="0" anchor="ctr"/>
+          <a:lstStyle/>
+          <a:p>
+            <a:pPr algn="ctr" indent="0" marL="0">
+              <a:buNone/>
+            </a:pPr>
+            <a:r>
+              <a:rPr lang="en-US" sz="1100" dirty="0">
+                <a:solidFill>
+                  <a:srgbClr val="FFFFFF"/>
+                </a:solidFill>
+                <a:latin typeface="Malgun Gothic" pitchFamily="34" charset="0"/>
+                <a:ea typeface="Malgun Gothic" pitchFamily="34" charset="-122"/>
+                <a:cs typeface="Malgun Gothic" pitchFamily="34" charset="-120"/>
+              </a:rPr>
+              <a:t>미구축</a:t>
+            </a:r>
+            <a:endParaRPr lang="en-US" sz="1100" dirty="0"/>
+          </a:p>
+        </p:txBody>
+      </p:sp>
+      <p:sp>
+        <p:nvSpPr>
+          <p:cNvPr id="28" name="Text 26"/>
+          <p:cNvSpPr/>
+          <p:nvPr/>
+        </p:nvSpPr>
+        <p:spPr>
+          <a:xfrm>
+            <a:off x="6080760" y="3127248"/>
+            <a:ext cx="2926080" cy="292608"/>
+          </a:xfrm>
+          <a:prstGeom prst="rect">
+            <a:avLst/>
+          </a:prstGeom>
+          <a:noFill/>
+          <a:ln/>
+        </p:spPr>
+        <p:txBody>
+          <a:bodyPr wrap="square" lIns="0" tIns="0" rIns="0" bIns="0" rtlCol="0" anchor="ctr"/>
+          <a:lstStyle/>
+          <a:p>
+            <a:pPr indent="0" marL="0">
+              <a:buNone/>
+            </a:pPr>
+            <a:r>
+              <a:rPr lang="en-US" sz="1200" b="1" dirty="0">
+                <a:solidFill>
+                  <a:srgbClr val="E9C79A"/>
+                </a:solidFill>
+                <a:latin typeface="Malgun Gothic" pitchFamily="34" charset="0"/>
+                <a:ea typeface="Malgun Gothic" pitchFamily="34" charset="-122"/>
+                <a:cs typeface="Malgun Gothic" pitchFamily="34" charset="-120"/>
+              </a:rPr>
+              <a:t>↑ 데이터가 여기서 끊깁니다</a:t>
+            </a:r>
+            <a:endParaRPr lang="en-US" sz="1200" dirty="0"/>
+          </a:p>
+        </p:txBody>
+      </p:sp>
+      <p:sp>
+        <p:nvSpPr>
+          <p:cNvPr id="29" name="Shape 27"/>
+          <p:cNvSpPr/>
+          <p:nvPr/>
+        </p:nvSpPr>
+        <p:spPr>
+          <a:xfrm>
+            <a:off x="566928" y="3566160"/>
+            <a:ext cx="3547872" cy="1874520"/>
+          </a:xfrm>
+          <a:prstGeom prst="roundRect">
+            <a:avLst>
+              <a:gd name="adj" fmla="val 4878"/>
+            </a:avLst>
+          </a:prstGeom>
+          <a:solidFill>
+            <a:srgbClr val="1C4028"/>
+          </a:solidFill>
+          <a:ln/>
+        </p:spPr>
+      </p:sp>
+      <p:sp>
+        <p:nvSpPr>
+          <p:cNvPr id="30" name="Shape 28"/>
+          <p:cNvSpPr/>
+          <p:nvPr/>
+        </p:nvSpPr>
+        <p:spPr>
+          <a:xfrm>
+            <a:off x="786384" y="3730752"/>
+            <a:ext cx="420624" cy="420624"/>
+          </a:xfrm>
+          <a:prstGeom prst="ellipse">
+            <a:avLst/>
+          </a:prstGeom>
+          <a:solidFill>
+            <a:srgbClr val="B87333"/>
+          </a:solidFill>
+          <a:ln/>
+        </p:spPr>
+      </p:sp>
+      <p:sp>
+        <p:nvSpPr>
+          <p:cNvPr id="31" name="Text 29"/>
+          <p:cNvSpPr/>
+          <p:nvPr/>
+        </p:nvSpPr>
+        <p:spPr>
+          <a:xfrm>
+            <a:off x="786384" y="3730752"/>
+            <a:ext cx="420624" cy="420624"/>
+          </a:xfrm>
+          <a:prstGeom prst="rect">
+            <a:avLst/>
+          </a:prstGeom>
+          <a:noFill/>
+          <a:ln/>
+        </p:spPr>
+        <p:txBody>
+          <a:bodyPr wrap="square" lIns="0" tIns="0" rIns="0" bIns="0" rtlCol="0" anchor="ctr"/>
+          <a:lstStyle/>
+          <a:p>
+            <a:pPr algn="ctr" indent="0" marL="0">
+              <a:buNone/>
+            </a:pPr>
+            <a:r>
+              <a:rPr lang="en-US" sz="1300" b="1" dirty="0">
+                <a:solidFill>
+                  <a:srgbClr val="FFFFFF"/>
+                </a:solidFill>
+                <a:latin typeface="Malgun Gothic" pitchFamily="34" charset="0"/>
+                <a:ea typeface="Malgun Gothic" pitchFamily="34" charset="-122"/>
+                <a:cs typeface="Malgun Gothic" pitchFamily="34" charset="-120"/>
+              </a:rPr>
+              <a:t>1</a:t>
+            </a:r>
+            <a:endParaRPr lang="en-US" sz="1300" dirty="0"/>
+          </a:p>
+        </p:txBody>
+      </p:sp>
+      <p:sp>
+        <p:nvSpPr>
+          <p:cNvPr id="32" name="Text 30"/>
+          <p:cNvSpPr/>
+          <p:nvPr/>
+        </p:nvSpPr>
+        <p:spPr>
+          <a:xfrm>
+            <a:off x="1316736" y="3730752"/>
+            <a:ext cx="2651760" cy="420624"/>
+          </a:xfrm>
+          <a:prstGeom prst="rect">
+            <a:avLst/>
+          </a:prstGeom>
+          <a:noFill/>
+          <a:ln/>
+        </p:spPr>
+        <p:txBody>
+          <a:bodyPr wrap="square" lIns="0" tIns="0" rIns="0" bIns="0" rtlCol="0" anchor="ctr"/>
+          <a:lstStyle/>
+          <a:p>
+            <a:pPr indent="0" marL="0">
+              <a:buNone/>
+            </a:pPr>
+            <a:r>
+              <a:rPr lang="en-US" sz="1400" b="1" dirty="0">
+                <a:solidFill>
+                  <a:srgbClr val="FFFFFF"/>
+                </a:solidFill>
+                <a:latin typeface="Malgun Gothic" pitchFamily="34" charset="0"/>
+                <a:ea typeface="Malgun Gothic" pitchFamily="34" charset="-122"/>
+                <a:cs typeface="Malgun Gothic" pitchFamily="34" charset="-120"/>
+              </a:rPr>
+              <a:t>스마트팩토리 구축</a:t>
+            </a:r>
+            <a:endParaRPr lang="en-US" sz="1400" dirty="0"/>
+          </a:p>
+        </p:txBody>
+      </p:sp>
+      <p:sp>
+        <p:nvSpPr>
+          <p:cNvPr id="33" name="Text 31"/>
+          <p:cNvSpPr/>
+          <p:nvPr/>
+        </p:nvSpPr>
+        <p:spPr>
+          <a:xfrm>
+            <a:off x="804672" y="4279392"/>
+            <a:ext cx="3090672" cy="1024128"/>
+          </a:xfrm>
+          <a:prstGeom prst="rect">
+            <a:avLst/>
+          </a:prstGeom>
+          <a:noFill/>
+          <a:ln/>
+        </p:spPr>
+        <p:txBody>
+          <a:bodyPr wrap="square" lIns="0" tIns="0" rIns="0" bIns="0" rtlCol="0" anchor="ctr"/>
+          <a:lstStyle/>
+          <a:p>
+            <a:pPr indent="0" marL="0">
+              <a:lnSpc>
+                <a:spcPts val="1700"/>
+              </a:lnSpc>
+              <a:buNone/>
+            </a:pPr>
+            <a:r>
+              <a:rPr lang="en-US" sz="1150" dirty="0">
+                <a:solidFill>
+                  <a:srgbClr val="C8DDA9"/>
+                </a:solidFill>
+                <a:latin typeface="Malgun Gothic" pitchFamily="34" charset="0"/>
+                <a:ea typeface="Malgun Gothic" pitchFamily="34" charset="-122"/>
+                <a:cs typeface="Malgun Gothic" pitchFamily="34" charset="-120"/>
+              </a:rPr>
+              <a:t>공정 센서·배치 자동 기록·품질 데이터 수집.</a:t>
+            </a:r>
+            <a:endParaRPr lang="en-US" sz="1150" dirty="0"/>
+          </a:p>
+          <a:p>
+            <a:pPr indent="0" marL="0">
+              <a:lnSpc>
+                <a:spcPts val="1700"/>
+              </a:lnSpc>
+              <a:buNone/>
+            </a:pPr>
+            <a:r>
+              <a:rPr lang="en-US" sz="1150" dirty="0">
+                <a:solidFill>
+                  <a:srgbClr val="C8DDA9"/>
+                </a:solidFill>
+                <a:latin typeface="Malgun Gothic" pitchFamily="34" charset="0"/>
+                <a:ea typeface="Malgun Gothic" pitchFamily="34" charset="-122"/>
+                <a:cs typeface="Malgun Gothic" pitchFamily="34" charset="-120"/>
+              </a:rPr>
+              <a:t>지금은 수기로 남기는 살균 조건·로트 정보를 자동화합니다.</a:t>
+            </a:r>
+            <a:endParaRPr lang="en-US" sz="1150" dirty="0"/>
+          </a:p>
+        </p:txBody>
+      </p:sp>
+      <p:sp>
+        <p:nvSpPr>
+          <p:cNvPr id="34" name="Shape 32"/>
+          <p:cNvSpPr/>
+          <p:nvPr/>
+        </p:nvSpPr>
+        <p:spPr>
+          <a:xfrm>
+            <a:off x="4315968" y="3566160"/>
+            <a:ext cx="3547872" cy="1874520"/>
+          </a:xfrm>
+          <a:prstGeom prst="roundRect">
+            <a:avLst>
+              <a:gd name="adj" fmla="val 4878"/>
+            </a:avLst>
+          </a:prstGeom>
+          <a:solidFill>
+            <a:srgbClr val="1C4028"/>
+          </a:solidFill>
+          <a:ln/>
+        </p:spPr>
+      </p:sp>
+      <p:sp>
+        <p:nvSpPr>
+          <p:cNvPr id="35" name="Shape 33"/>
+          <p:cNvSpPr/>
+          <p:nvPr/>
+        </p:nvSpPr>
+        <p:spPr>
+          <a:xfrm>
+            <a:off x="4535424" y="3730752"/>
+            <a:ext cx="420624" cy="420624"/>
+          </a:xfrm>
+          <a:prstGeom prst="ellipse">
+            <a:avLst/>
+          </a:prstGeom>
+          <a:solidFill>
+            <a:srgbClr val="B87333"/>
+          </a:solidFill>
+          <a:ln/>
+        </p:spPr>
+      </p:sp>
+      <p:sp>
+        <p:nvSpPr>
+          <p:cNvPr id="36" name="Text 34"/>
+          <p:cNvSpPr/>
+          <p:nvPr/>
+        </p:nvSpPr>
+        <p:spPr>
+          <a:xfrm>
+            <a:off x="4535424" y="3730752"/>
+            <a:ext cx="420624" cy="420624"/>
+          </a:xfrm>
+          <a:prstGeom prst="rect">
+            <a:avLst/>
+          </a:prstGeom>
+          <a:noFill/>
+          <a:ln/>
+        </p:spPr>
+        <p:txBody>
+          <a:bodyPr wrap="square" lIns="0" tIns="0" rIns="0" bIns="0" rtlCol="0" anchor="ctr"/>
+          <a:lstStyle/>
+          <a:p>
+            <a:pPr algn="ctr" indent="0" marL="0">
+              <a:buNone/>
+            </a:pPr>
+            <a:r>
+              <a:rPr lang="en-US" sz="1300" b="1" dirty="0">
+                <a:solidFill>
+                  <a:srgbClr val="FFFFFF"/>
+                </a:solidFill>
+                <a:latin typeface="Malgun Gothic" pitchFamily="34" charset="0"/>
+                <a:ea typeface="Malgun Gothic" pitchFamily="34" charset="-122"/>
+                <a:cs typeface="Malgun Gothic" pitchFamily="34" charset="-120"/>
+              </a:rPr>
+              <a:t>2</a:t>
+            </a:r>
+            <a:endParaRPr lang="en-US" sz="1300" dirty="0"/>
+          </a:p>
+        </p:txBody>
+      </p:sp>
+      <p:sp>
+        <p:nvSpPr>
+          <p:cNvPr id="37" name="Text 35"/>
+          <p:cNvSpPr/>
+          <p:nvPr/>
+        </p:nvSpPr>
+        <p:spPr>
+          <a:xfrm>
+            <a:off x="5065776" y="3730752"/>
+            <a:ext cx="2651760" cy="420624"/>
+          </a:xfrm>
+          <a:prstGeom prst="rect">
+            <a:avLst/>
+          </a:prstGeom>
+          <a:noFill/>
+          <a:ln/>
+        </p:spPr>
+        <p:txBody>
+          <a:bodyPr wrap="square" lIns="0" tIns="0" rIns="0" bIns="0" rtlCol="0" anchor="ctr"/>
+          <a:lstStyle/>
+          <a:p>
+            <a:pPr indent="0" marL="0">
+              <a:buNone/>
+            </a:pPr>
+            <a:r>
+              <a:rPr lang="en-US" sz="1400" b="1" dirty="0">
+                <a:solidFill>
+                  <a:srgbClr val="FFFFFF"/>
+                </a:solidFill>
+                <a:latin typeface="Malgun Gothic" pitchFamily="34" charset="0"/>
+                <a:ea typeface="Malgun Gothic" pitchFamily="34" charset="-122"/>
+                <a:cs typeface="Malgun Gothic" pitchFamily="34" charset="-120"/>
+              </a:rPr>
+              <a:t>농장–공장 데이터 연결</a:t>
+            </a:r>
+            <a:endParaRPr lang="en-US" sz="1400" dirty="0"/>
+          </a:p>
+        </p:txBody>
+      </p:sp>
+      <p:sp>
+        <p:nvSpPr>
+          <p:cNvPr id="38" name="Text 36"/>
+          <p:cNvSpPr/>
+          <p:nvPr/>
+        </p:nvSpPr>
+        <p:spPr>
+          <a:xfrm>
+            <a:off x="4553712" y="4279392"/>
+            <a:ext cx="3090672" cy="1024128"/>
+          </a:xfrm>
+          <a:prstGeom prst="rect">
+            <a:avLst/>
+          </a:prstGeom>
+          <a:noFill/>
+          <a:ln/>
+        </p:spPr>
+        <p:txBody>
+          <a:bodyPr wrap="square" lIns="0" tIns="0" rIns="0" bIns="0" rtlCol="0" anchor="ctr"/>
+          <a:lstStyle/>
+          <a:p>
+            <a:pPr indent="0" marL="0">
+              <a:lnSpc>
+                <a:spcPts val="1700"/>
+              </a:lnSpc>
+              <a:buNone/>
+            </a:pPr>
+            <a:r>
+              <a:rPr lang="en-US" sz="1150" dirty="0">
+                <a:solidFill>
+                  <a:srgbClr val="C8DDA9"/>
+                </a:solidFill>
+                <a:latin typeface="Malgun Gothic" pitchFamily="34" charset="0"/>
+                <a:ea typeface="Malgun Gothic" pitchFamily="34" charset="-122"/>
+                <a:cs typeface="Malgun Gothic" pitchFamily="34" charset="-120"/>
+              </a:rPr>
+              <a:t>어느 소의 원유가 어느 배치로 갔는지 이어붙입니다.</a:t>
+            </a:r>
+            <a:endParaRPr lang="en-US" sz="1150" dirty="0"/>
+          </a:p>
+          <a:p>
+            <a:pPr indent="0" marL="0">
+              <a:lnSpc>
+                <a:spcPts val="1700"/>
+              </a:lnSpc>
+              <a:buNone/>
+            </a:pPr>
+            <a:r>
+              <a:rPr lang="en-US" sz="1150" dirty="0">
+                <a:solidFill>
+                  <a:srgbClr val="C8DDA9"/>
+                </a:solidFill>
+                <a:latin typeface="Malgun Gothic" pitchFamily="34" charset="0"/>
+                <a:ea typeface="Malgun Gothic" pitchFamily="34" charset="-122"/>
+                <a:cs typeface="Malgun Gothic" pitchFamily="34" charset="-120"/>
+              </a:rPr>
+              <a:t>유질 이상이 생겼을 때 개체까지 역추적할 수 있게 됩니다.</a:t>
+            </a:r>
+            <a:endParaRPr lang="en-US" sz="1150" dirty="0"/>
+          </a:p>
+        </p:txBody>
+      </p:sp>
+      <p:sp>
+        <p:nvSpPr>
+          <p:cNvPr id="39" name="Shape 37"/>
+          <p:cNvSpPr/>
+          <p:nvPr/>
+        </p:nvSpPr>
+        <p:spPr>
+          <a:xfrm>
+            <a:off x="8065008" y="3566160"/>
+            <a:ext cx="3547872" cy="1874520"/>
+          </a:xfrm>
+          <a:prstGeom prst="roundRect">
+            <a:avLst>
+              <a:gd name="adj" fmla="val 4878"/>
+            </a:avLst>
+          </a:prstGeom>
+          <a:solidFill>
+            <a:srgbClr val="1C4028"/>
+          </a:solidFill>
+          <a:ln/>
+        </p:spPr>
+      </p:sp>
+      <p:sp>
+        <p:nvSpPr>
+          <p:cNvPr id="40" name="Shape 38"/>
+          <p:cNvSpPr/>
+          <p:nvPr/>
+        </p:nvSpPr>
+        <p:spPr>
+          <a:xfrm>
+            <a:off x="8284464" y="3730752"/>
+            <a:ext cx="420624" cy="420624"/>
+          </a:xfrm>
+          <a:prstGeom prst="ellipse">
+            <a:avLst/>
+          </a:prstGeom>
+          <a:solidFill>
+            <a:srgbClr val="B87333"/>
+          </a:solidFill>
+          <a:ln/>
+        </p:spPr>
+      </p:sp>
+      <p:sp>
+        <p:nvSpPr>
+          <p:cNvPr id="41" name="Text 39"/>
+          <p:cNvSpPr/>
+          <p:nvPr/>
+        </p:nvSpPr>
+        <p:spPr>
+          <a:xfrm>
+            <a:off x="8284464" y="3730752"/>
+            <a:ext cx="420624" cy="420624"/>
+          </a:xfrm>
+          <a:prstGeom prst="rect">
+            <a:avLst/>
+          </a:prstGeom>
+          <a:noFill/>
+          <a:ln/>
+        </p:spPr>
+        <p:txBody>
+          <a:bodyPr wrap="square" lIns="0" tIns="0" rIns="0" bIns="0" rtlCol="0" anchor="ctr"/>
+          <a:lstStyle/>
+          <a:p>
+            <a:pPr algn="ctr" indent="0" marL="0">
+              <a:buNone/>
+            </a:pPr>
+            <a:r>
+              <a:rPr lang="en-US" sz="1300" b="1" dirty="0">
+                <a:solidFill>
+                  <a:srgbClr val="FFFFFF"/>
+                </a:solidFill>
+                <a:latin typeface="Malgun Gothic" pitchFamily="34" charset="0"/>
+                <a:ea typeface="Malgun Gothic" pitchFamily="34" charset="-122"/>
+                <a:cs typeface="Malgun Gothic" pitchFamily="34" charset="-120"/>
+              </a:rPr>
+              <a:t>3</a:t>
+            </a:r>
+            <a:endParaRPr lang="en-US" sz="1300" dirty="0"/>
+          </a:p>
+        </p:txBody>
+      </p:sp>
+      <p:sp>
+        <p:nvSpPr>
+          <p:cNvPr id="42" name="Text 40"/>
+          <p:cNvSpPr/>
+          <p:nvPr/>
+        </p:nvSpPr>
+        <p:spPr>
+          <a:xfrm>
+            <a:off x="8814816" y="3730752"/>
+            <a:ext cx="2651760" cy="420624"/>
+          </a:xfrm>
+          <a:prstGeom prst="rect">
+            <a:avLst/>
+          </a:prstGeom>
+          <a:noFill/>
+          <a:ln/>
+        </p:spPr>
+        <p:txBody>
+          <a:bodyPr wrap="square" lIns="0" tIns="0" rIns="0" bIns="0" rtlCol="0" anchor="ctr"/>
+          <a:lstStyle/>
+          <a:p>
+            <a:pPr indent="0" marL="0">
+              <a:buNone/>
+            </a:pPr>
+            <a:r>
+              <a:rPr lang="en-US" sz="1400" b="1" dirty="0">
+                <a:solidFill>
+                  <a:srgbClr val="FFFFFF"/>
+                </a:solidFill>
+                <a:latin typeface="Malgun Gothic" pitchFamily="34" charset="0"/>
+                <a:ea typeface="Malgun Gothic" pitchFamily="34" charset="-122"/>
+                <a:cs typeface="Malgun Gothic" pitchFamily="34" charset="-120"/>
+              </a:rPr>
+              <a:t>소비자까지 이력 개방</a:t>
+            </a:r>
+            <a:endParaRPr lang="en-US" sz="1400" dirty="0"/>
+          </a:p>
+        </p:txBody>
+      </p:sp>
+      <p:sp>
+        <p:nvSpPr>
+          <p:cNvPr id="43" name="Text 41"/>
+          <p:cNvSpPr/>
+          <p:nvPr/>
+        </p:nvSpPr>
+        <p:spPr>
+          <a:xfrm>
+            <a:off x="8302752" y="4279392"/>
+            <a:ext cx="3090672" cy="1024128"/>
+          </a:xfrm>
+          <a:prstGeom prst="rect">
+            <a:avLst/>
+          </a:prstGeom>
+          <a:noFill/>
+          <a:ln/>
+        </p:spPr>
+        <p:txBody>
+          <a:bodyPr wrap="square" lIns="0" tIns="0" rIns="0" bIns="0" rtlCol="0" anchor="ctr"/>
+          <a:lstStyle/>
+          <a:p>
+            <a:pPr indent="0" marL="0">
+              <a:lnSpc>
+                <a:spcPts val="1700"/>
+              </a:lnSpc>
+              <a:buNone/>
+            </a:pPr>
+            <a:r>
+              <a:rPr lang="en-US" sz="1150" dirty="0">
+                <a:solidFill>
+                  <a:srgbClr val="C8DDA9"/>
+                </a:solidFill>
+                <a:latin typeface="Malgun Gothic" pitchFamily="34" charset="0"/>
+                <a:ea typeface="Malgun Gothic" pitchFamily="34" charset="-122"/>
+                <a:cs typeface="Malgun Gothic" pitchFamily="34" charset="-120"/>
+              </a:rPr>
+              <a:t>제품 QR로 사양·유질·공정 이력을 소비자에게 엽니다.</a:t>
+            </a:r>
+            <a:endParaRPr lang="en-US" sz="1150" dirty="0"/>
+          </a:p>
+          <a:p>
+            <a:pPr indent="0" marL="0">
+              <a:lnSpc>
+                <a:spcPts val="1700"/>
+              </a:lnSpc>
+              <a:buNone/>
+            </a:pPr>
+            <a:r>
+              <a:rPr lang="en-US" sz="1150" dirty="0">
+                <a:solidFill>
+                  <a:srgbClr val="C8DDA9"/>
+                </a:solidFill>
+                <a:latin typeface="Malgun Gothic" pitchFamily="34" charset="0"/>
+                <a:ea typeface="Malgun Gothic" pitchFamily="34" charset="-122"/>
+                <a:cs typeface="Malgun Gothic" pitchFamily="34" charset="-120"/>
+              </a:rPr>
+              <a:t>'왜 비싼지'를 설명하는 가장 강력한 근거가 됩니다.</a:t>
+            </a:r>
+            <a:endParaRPr lang="en-US" sz="1150" dirty="0"/>
+          </a:p>
+        </p:txBody>
+      </p:sp>
+      <p:sp>
+        <p:nvSpPr>
+          <p:cNvPr id="44" name="Shape 42"/>
+          <p:cNvSpPr/>
+          <p:nvPr/>
+        </p:nvSpPr>
+        <p:spPr>
+          <a:xfrm>
+            <a:off x="566928" y="5669280"/>
+            <a:ext cx="11064240" cy="640080"/>
+          </a:xfrm>
+          <a:prstGeom prst="roundRect">
+            <a:avLst>
+              <a:gd name="adj" fmla="val 14286"/>
+            </a:avLst>
+          </a:prstGeom>
+          <a:solidFill>
+            <a:srgbClr val="B87333"/>
+          </a:solidFill>
+          <a:ln/>
+        </p:spPr>
+      </p:sp>
+      <p:sp>
+        <p:nvSpPr>
+          <p:cNvPr id="45" name="Text 43"/>
+          <p:cNvSpPr/>
+          <p:nvPr/>
+        </p:nvSpPr>
+        <p:spPr>
+          <a:xfrm>
+            <a:off x="822960" y="5669280"/>
+            <a:ext cx="10515600" cy="640080"/>
+          </a:xfrm>
+          <a:prstGeom prst="rect">
+            <a:avLst/>
+          </a:prstGeom>
+          <a:noFill/>
+          <a:ln/>
+        </p:spPr>
+        <p:txBody>
+          <a:bodyPr wrap="square" lIns="0" tIns="0" rIns="0" bIns="0" rtlCol="0" anchor="ctr"/>
+          <a:lstStyle/>
+          <a:p>
+            <a:pPr indent="0" marL="0">
+              <a:buNone/>
+            </a:pPr>
+            <a:r>
+              <a:rPr lang="en-US" sz="1500" b="1" dirty="0">
+                <a:solidFill>
+                  <a:srgbClr val="FFFFFF"/>
+                </a:solidFill>
+                <a:latin typeface="Malgun Gothic" pitchFamily="34" charset="0"/>
+                <a:ea typeface="Malgun Gothic" pitchFamily="34" charset="-122"/>
+                <a:cs typeface="Malgun Gothic" pitchFamily="34" charset="-120"/>
+              </a:rPr>
+              <a:t>스마트팜에서 끝내지 말고 스마트팩토리까지 이어야, 축산이 '생산 데이터'가 아니라 '식품 데이터'가 됩니다</a:t>
+            </a:r>
+            <a:endParaRPr lang="en-US" sz="1500" dirty="0"/>
+          </a:p>
+        </p:txBody>
+      </p:sp>
+    </p:spTree>
+  </p:cSld>
+  <p:clrMapOvr>
+    <a:masterClrMapping/>
+  </p:clrMapOvr>
+</p:sld>
+</file>
+
+<file path=ppt/slides/slide45.xml><?xml version="1.0" encoding="utf-8"?>
+<p:sld xmlns:a="http://schemas.openxmlformats.org/drawingml/2006/main" xmlns:r="http://schemas.openxmlformats.org/officeDocument/2006/relationships" xmlns:p="http://schemas.openxmlformats.org/presentationml/2006/main">
+  <p:cSld name="Slide 45">
     <p:bg>
       <p:bgPr>
         <a:solidFill>
@@ -40911,7 +42508,7 @@
                 <a:ea typeface="Malgun Gothic" pitchFamily="34" charset="-122"/>
                 <a:cs typeface="Malgun Gothic" pitchFamily="34" charset="-120"/>
               </a:rPr>
-              <a:t>송영신목장을 '현장 실증 거점'으로 써주십시오</a:t>
+              <a:t>추진 로드맵 (안) — 3년</a:t>
             </a:r>
             <a:endParaRPr lang="en-US" sz="3000" dirty="0"/>
           </a:p>
@@ -40925,58 +42522,48 @@
         </p:nvSpPr>
         <p:spPr>
           <a:xfrm>
-            <a:off x="566928" y="1325880"/>
-            <a:ext cx="5440680" cy="3931920"/>
+            <a:off x="566928" y="1371600"/>
+            <a:ext cx="3547872" cy="3520440"/>
           </a:xfrm>
           <a:prstGeom prst="roundRect">
             <a:avLst>
-              <a:gd name="adj" fmla="val 2326"/>
+              <a:gd name="adj" fmla="val 2597"/>
             </a:avLst>
           </a:prstGeom>
           <a:solidFill>
-            <a:srgbClr val="EEF4E9"/>
+            <a:srgbClr val="F3F6F1"/>
           </a:solidFill>
           <a:ln/>
-        </p:spPr>
-      </p:sp>
-      <p:sp>
-        <p:nvSpPr>
-          <p:cNvPr id="5" name="Text 3"/>
-          <p:cNvSpPr/>
-          <p:nvPr/>
-        </p:nvSpPr>
-        <p:spPr>
-          <a:xfrm>
-            <a:off x="868680" y="1508760"/>
-            <a:ext cx="4846320" cy="365760"/>
-          </a:xfrm>
-          <a:prstGeom prst="rect">
-            <a:avLst/>
-          </a:prstGeom>
-          <a:noFill/>
-          <a:ln/>
-        </p:spPr>
-        <p:txBody>
-          <a:bodyPr wrap="square" lIns="0" tIns="0" rIns="0" bIns="0" rtlCol="0" anchor="t"/>
-          <a:lstStyle/>
-          <a:p>
-            <a:pPr algn="l" indent="0" marL="0">
-              <a:buNone/>
-            </a:pPr>
-            <a:r>
-              <a:rPr lang="en-US" sz="1650" b="1" dirty="0">
-                <a:solidFill>
-                  <a:srgbClr val="1E4420"/>
-                </a:solidFill>
-                <a:latin typeface="Malgun Gothic" pitchFamily="34" charset="0"/>
-                <a:ea typeface="Malgun Gothic" pitchFamily="34" charset="-122"/>
-                <a:cs typeface="Malgun Gothic" pitchFamily="34" charset="-120"/>
-              </a:rPr>
-              <a:t>저희가 제공할 수 있는 것</a:t>
-            </a:r>
-            <a:endParaRPr lang="en-US" sz="1650" dirty="0"/>
-          </a:p>
-        </p:txBody>
+          <a:effectLst>
+            <a:outerShdw sx="100000" sy="100000" kx="0" ky="0" algn="bl" rotWithShape="0" blurRad="76200" dist="12700" dir="5400000">
+              <a:srgbClr val="9AA79B">
+                <a:alpha val="25000"/>
+              </a:srgbClr>
+            </a:outerShdw>
+          </a:effectLst>
+        </p:spPr>
+      </p:sp>
+      <p:sp>
+        <p:nvSpPr>
+          <p:cNvPr id="5" name="Shape 3"/>
+          <p:cNvSpPr/>
+          <p:nvPr/>
+        </p:nvSpPr>
+        <p:spPr>
+          <a:xfrm>
+            <a:off x="566928" y="1371600"/>
+            <a:ext cx="3547872" cy="868680"/>
+          </a:xfrm>
+          <a:prstGeom prst="roundRect">
+            <a:avLst>
+              <a:gd name="adj" fmla="val 10526"/>
+            </a:avLst>
+          </a:prstGeom>
+          <a:solidFill>
+            <a:srgbClr val="97BC62"/>
+          </a:solidFill>
+          <a:ln/>
+        </p:spPr>
       </p:sp>
       <p:sp>
         <p:nvSpPr>
@@ -40986,8 +42573,86 @@
         </p:nvSpPr>
         <p:spPr>
           <a:xfrm>
-            <a:off x="868680" y="2011680"/>
-            <a:ext cx="4892040" cy="3063240"/>
+            <a:off x="768096" y="1444752"/>
+            <a:ext cx="3145536" cy="365760"/>
+          </a:xfrm>
+          <a:prstGeom prst="rect">
+            <a:avLst/>
+          </a:prstGeom>
+          <a:noFill/>
+          <a:ln/>
+        </p:spPr>
+        <p:txBody>
+          <a:bodyPr wrap="square" lIns="0" tIns="0" rIns="0" bIns="0" rtlCol="0" anchor="ctr"/>
+          <a:lstStyle/>
+          <a:p>
+            <a:pPr indent="0" marL="0">
+              <a:buNone/>
+            </a:pPr>
+            <a:r>
+              <a:rPr lang="en-US" sz="1300" b="1" dirty="0">
+                <a:solidFill>
+                  <a:srgbClr val="1F2A20"/>
+                </a:solidFill>
+                <a:latin typeface="Malgun Gothic" pitchFamily="34" charset="0"/>
+                <a:ea typeface="Malgun Gothic" pitchFamily="34" charset="-122"/>
+                <a:cs typeface="Malgun Gothic" pitchFamily="34" charset="-120"/>
+              </a:rPr>
+              <a:t>1년차</a:t>
+            </a:r>
+            <a:endParaRPr lang="en-US" sz="1300" dirty="0"/>
+          </a:p>
+        </p:txBody>
+      </p:sp>
+      <p:sp>
+        <p:nvSpPr>
+          <p:cNvPr id="7" name="Text 5"/>
+          <p:cNvSpPr/>
+          <p:nvPr/>
+        </p:nvSpPr>
+        <p:spPr>
+          <a:xfrm>
+            <a:off x="768096" y="1783080"/>
+            <a:ext cx="3145536" cy="402336"/>
+          </a:xfrm>
+          <a:prstGeom prst="rect">
+            <a:avLst/>
+          </a:prstGeom>
+          <a:noFill/>
+          <a:ln/>
+        </p:spPr>
+        <p:txBody>
+          <a:bodyPr wrap="square" lIns="0" tIns="0" rIns="0" bIns="0" rtlCol="0" anchor="ctr"/>
+          <a:lstStyle/>
+          <a:p>
+            <a:pPr indent="0" marL="0">
+              <a:buNone/>
+            </a:pPr>
+            <a:r>
+              <a:rPr lang="en-US" sz="2000" b="1" dirty="0">
+                <a:solidFill>
+                  <a:srgbClr val="1F2A20"/>
+                </a:solidFill>
+                <a:latin typeface="Malgun Gothic" pitchFamily="34" charset="0"/>
+                <a:ea typeface="Malgun Gothic" pitchFamily="34" charset="-122"/>
+                <a:cs typeface="Malgun Gothic" pitchFamily="34" charset="-120"/>
+              </a:rPr>
+              <a:t>실증</a:t>
+            </a:r>
+            <a:endParaRPr lang="en-US" sz="2000" dirty="0"/>
+          </a:p>
+        </p:txBody>
+      </p:sp>
+      <p:sp>
+        <p:nvSpPr>
+          <p:cNvPr id="8" name="Text 6"/>
+          <p:cNvSpPr/>
+          <p:nvPr/>
+        </p:nvSpPr>
+        <p:spPr>
+          <a:xfrm>
+            <a:off x="804672" y="2395728"/>
+            <a:ext cx="3090672" cy="2331720"/>
           </a:xfrm>
           <a:prstGeom prst="rect">
             <a:avLst/>
@@ -41010,7 +42675,7 @@
               <a:buChar char="•"/>
             </a:pPr>
             <a:r>
-              <a:rPr lang="en-US" sz="1300" dirty="0">
+              <a:rPr lang="en-US" sz="1250" dirty="0">
                 <a:solidFill>
                   <a:srgbClr val="1F2A20"/>
                 </a:solidFill>
@@ -41018,9 +42683,9 @@
                 <a:ea typeface="Malgun Gothic" pitchFamily="34" charset="-122"/>
                 <a:cs typeface="Malgun Gothic" pitchFamily="34" charset="-120"/>
               </a:rPr>
-              <a:t>실증 구간과 대조 구간을 나눈 축사 공간</a:t>
-            </a:r>
-            <a:endParaRPr lang="en-US" sz="1300" dirty="0"/>
+              <a:t>대조구 설계 및 기초 데이터 확보</a:t>
+            </a:r>
+            <a:endParaRPr lang="en-US" sz="1250" dirty="0"/>
           </a:p>
           <a:p>
             <a:pPr marL="342900" indent="-342900">
@@ -41034,7 +42699,7 @@
               <a:buChar char="•"/>
             </a:pPr>
             <a:r>
-              <a:rPr lang="en-US" sz="1300" dirty="0">
+              <a:rPr lang="en-US" sz="1250" dirty="0">
                 <a:solidFill>
                   <a:srgbClr val="1F2A20"/>
                 </a:solidFill>
@@ -41042,9 +42707,9 @@
                 <a:ea typeface="Malgun Gothic" pitchFamily="34" charset="-122"/>
                 <a:cs typeface="Malgun Gothic" pitchFamily="34" charset="-120"/>
               </a:rPr>
-              <a:t>저지종 단일 축군 70두의 개체별 사육·번식 이력</a:t>
-            </a:r>
-            <a:endParaRPr lang="en-US" sz="1300" dirty="0"/>
+              <a:t>HBP·센서 구간 운영 개시</a:t>
+            </a:r>
+            <a:endParaRPr lang="en-US" sz="1250" dirty="0"/>
           </a:p>
           <a:p>
             <a:pPr marL="342900" indent="-342900">
@@ -41058,7 +42723,7 @@
               <a:buChar char="•"/>
             </a:pPr>
             <a:r>
-              <a:rPr lang="en-US" sz="1300" dirty="0">
+              <a:rPr lang="en-US" sz="1250" dirty="0">
                 <a:solidFill>
                   <a:srgbClr val="1F2A20"/>
                 </a:solidFill>
@@ -41066,9 +42731,9 @@
                 <a:ea typeface="Malgun Gothic" pitchFamily="34" charset="-122"/>
                 <a:cs typeface="Malgun Gothic" pitchFamily="34" charset="-120"/>
               </a:rPr>
-              <a:t>센서 기반 실시간 생체 데이터 (동의 범위 내)</a:t>
-            </a:r>
-            <a:endParaRPr lang="en-US" sz="1300" dirty="0"/>
+              <a:t>측정 항목·방법 표준 확정</a:t>
+            </a:r>
+            <a:endParaRPr lang="en-US" sz="1250" dirty="0"/>
           </a:p>
           <a:p>
             <a:pPr marL="342900" indent="-342900">
@@ -41082,7 +42747,7 @@
               <a:buChar char="•"/>
             </a:pPr>
             <a:r>
-              <a:rPr lang="en-US" sz="1300" dirty="0">
+              <a:rPr lang="en-US" sz="1250" dirty="0">
                 <a:solidFill>
                   <a:srgbClr val="1F2A20"/>
                 </a:solidFill>
@@ -41090,10 +42755,181 @@
                 <a:ea typeface="Malgun Gothic" pitchFamily="34" charset="-122"/>
                 <a:cs typeface="Malgun Gothic" pitchFamily="34" charset="-120"/>
               </a:rPr>
-              <a:t>HBP 운영 기록 — 교반·수분·보충·바닥 상태</a:t>
+              <a:t>사양시험 설계 및 공정 데이터 진단</a:t>
+            </a:r>
+            <a:endParaRPr lang="en-US" sz="1250" dirty="0"/>
+          </a:p>
+        </p:txBody>
+      </p:sp>
+      <p:sp>
+        <p:nvSpPr>
+          <p:cNvPr id="9" name="Shape 7"/>
+          <p:cNvSpPr/>
+          <p:nvPr/>
+        </p:nvSpPr>
+        <p:spPr>
+          <a:xfrm>
+            <a:off x="4169664" y="3017520"/>
+            <a:ext cx="310896" cy="237744"/>
+          </a:xfrm>
+          <a:prstGeom prst="rightArrow">
+            <a:avLst/>
+          </a:prstGeom>
+          <a:solidFill>
+            <a:srgbClr val="97BC62"/>
+          </a:solidFill>
+          <a:ln/>
+        </p:spPr>
+      </p:sp>
+      <p:sp>
+        <p:nvSpPr>
+          <p:cNvPr id="10" name="Shape 8"/>
+          <p:cNvSpPr/>
+          <p:nvPr/>
+        </p:nvSpPr>
+        <p:spPr>
+          <a:xfrm>
+            <a:off x="4315968" y="1371600"/>
+            <a:ext cx="3547872" cy="3520440"/>
+          </a:xfrm>
+          <a:prstGeom prst="roundRect">
+            <a:avLst>
+              <a:gd name="adj" fmla="val 2597"/>
+            </a:avLst>
+          </a:prstGeom>
+          <a:solidFill>
+            <a:srgbClr val="F3F6F1"/>
+          </a:solidFill>
+          <a:ln/>
+          <a:effectLst>
+            <a:outerShdw sx="100000" sy="100000" kx="0" ky="0" algn="bl" rotWithShape="0" blurRad="76200" dist="12700" dir="5400000">
+              <a:srgbClr val="9AA79B">
+                <a:alpha val="25000"/>
+              </a:srgbClr>
+            </a:outerShdw>
+          </a:effectLst>
+        </p:spPr>
+      </p:sp>
+      <p:sp>
+        <p:nvSpPr>
+          <p:cNvPr id="11" name="Shape 9"/>
+          <p:cNvSpPr/>
+          <p:nvPr/>
+        </p:nvSpPr>
+        <p:spPr>
+          <a:xfrm>
+            <a:off x="4315968" y="1371600"/>
+            <a:ext cx="3547872" cy="868680"/>
+          </a:xfrm>
+          <a:prstGeom prst="roundRect">
+            <a:avLst>
+              <a:gd name="adj" fmla="val 10526"/>
+            </a:avLst>
+          </a:prstGeom>
+          <a:solidFill>
+            <a:srgbClr val="2C5F2D"/>
+          </a:solidFill>
+          <a:ln/>
+        </p:spPr>
+      </p:sp>
+      <p:sp>
+        <p:nvSpPr>
+          <p:cNvPr id="12" name="Text 10"/>
+          <p:cNvSpPr/>
+          <p:nvPr/>
+        </p:nvSpPr>
+        <p:spPr>
+          <a:xfrm>
+            <a:off x="4517136" y="1444752"/>
+            <a:ext cx="3145536" cy="365760"/>
+          </a:xfrm>
+          <a:prstGeom prst="rect">
+            <a:avLst/>
+          </a:prstGeom>
+          <a:noFill/>
+          <a:ln/>
+        </p:spPr>
+        <p:txBody>
+          <a:bodyPr wrap="square" lIns="0" tIns="0" rIns="0" bIns="0" rtlCol="0" anchor="ctr"/>
+          <a:lstStyle/>
+          <a:p>
+            <a:pPr indent="0" marL="0">
+              <a:buNone/>
+            </a:pPr>
+            <a:r>
+              <a:rPr lang="en-US" sz="1300" b="1" dirty="0">
+                <a:solidFill>
+                  <a:srgbClr val="FFFFFF"/>
+                </a:solidFill>
+                <a:latin typeface="Malgun Gothic" pitchFamily="34" charset="0"/>
+                <a:ea typeface="Malgun Gothic" pitchFamily="34" charset="-122"/>
+                <a:cs typeface="Malgun Gothic" pitchFamily="34" charset="-120"/>
+              </a:rPr>
+              <a:t>2년차</a:t>
             </a:r>
             <a:endParaRPr lang="en-US" sz="1300" dirty="0"/>
           </a:p>
+        </p:txBody>
+      </p:sp>
+      <p:sp>
+        <p:nvSpPr>
+          <p:cNvPr id="13" name="Text 11"/>
+          <p:cNvSpPr/>
+          <p:nvPr/>
+        </p:nvSpPr>
+        <p:spPr>
+          <a:xfrm>
+            <a:off x="4517136" y="1783080"/>
+            <a:ext cx="3145536" cy="402336"/>
+          </a:xfrm>
+          <a:prstGeom prst="rect">
+            <a:avLst/>
+          </a:prstGeom>
+          <a:noFill/>
+          <a:ln/>
+        </p:spPr>
+        <p:txBody>
+          <a:bodyPr wrap="square" lIns="0" tIns="0" rIns="0" bIns="0" rtlCol="0" anchor="ctr"/>
+          <a:lstStyle/>
+          <a:p>
+            <a:pPr indent="0" marL="0">
+              <a:buNone/>
+            </a:pPr>
+            <a:r>
+              <a:rPr lang="en-US" sz="2000" b="1" dirty="0">
+                <a:solidFill>
+                  <a:srgbClr val="FFFFFF"/>
+                </a:solidFill>
+                <a:latin typeface="Malgun Gothic" pitchFamily="34" charset="0"/>
+                <a:ea typeface="Malgun Gothic" pitchFamily="34" charset="-122"/>
+                <a:cs typeface="Malgun Gothic" pitchFamily="34" charset="-120"/>
+              </a:rPr>
+              <a:t>확산</a:t>
+            </a:r>
+            <a:endParaRPr lang="en-US" sz="2000" dirty="0"/>
+          </a:p>
+        </p:txBody>
+      </p:sp>
+      <p:sp>
+        <p:nvSpPr>
+          <p:cNvPr id="14" name="Text 12"/>
+          <p:cNvSpPr/>
+          <p:nvPr/>
+        </p:nvSpPr>
+        <p:spPr>
+          <a:xfrm>
+            <a:off x="4553712" y="2395728"/>
+            <a:ext cx="3090672" cy="2331720"/>
+          </a:xfrm>
+          <a:prstGeom prst="rect">
+            <a:avLst/>
+          </a:prstGeom>
+          <a:noFill/>
+          <a:ln/>
+        </p:spPr>
+        <p:txBody>
+          <a:bodyPr wrap="square" lIns="0" tIns="0" rIns="0" bIns="0" rtlCol="0" anchor="t"/>
+          <a:lstStyle/>
           <a:p>
             <a:pPr marL="342900" indent="-342900">
               <a:lnSpc>
@@ -41106,7 +42942,7 @@
               <a:buChar char="•"/>
             </a:pPr>
             <a:r>
-              <a:rPr lang="en-US" sz="1300" dirty="0">
+              <a:rPr lang="en-US" sz="1250" dirty="0">
                 <a:solidFill>
                   <a:srgbClr val="1F2A20"/>
                 </a:solidFill>
@@ -41114,9 +42950,9 @@
                 <a:ea typeface="Malgun Gothic" pitchFamily="34" charset="-122"/>
                 <a:cs typeface="Malgun Gothic" pitchFamily="34" charset="-120"/>
               </a:rPr>
-              <a:t>유가공 공정·품질·판매 데이터</a:t>
-            </a:r>
-            <a:endParaRPr lang="en-US" sz="1300" dirty="0"/>
+              <a:t>인근 희망 농가로 실증 확대</a:t>
+            </a:r>
+            <a:endParaRPr lang="en-US" sz="1250" dirty="0"/>
           </a:p>
           <a:p>
             <a:pPr marL="342900" indent="-342900">
@@ -41130,7 +42966,7 @@
               <a:buChar char="•"/>
             </a:pPr>
             <a:r>
-              <a:rPr lang="en-US" sz="1300" dirty="0">
+              <a:rPr lang="en-US" sz="1250" dirty="0">
                 <a:solidFill>
                   <a:srgbClr val="1F2A20"/>
                 </a:solidFill>
@@ -41138,9 +42974,9 @@
                 <a:ea typeface="Malgun Gothic" pitchFamily="34" charset="-122"/>
                 <a:cs typeface="Malgun Gothic" pitchFamily="34" charset="-120"/>
               </a:rPr>
-              <a:t>수의사가 직접 기록한 진료·번식 데이터</a:t>
-            </a:r>
-            <a:endParaRPr lang="en-US" sz="1300" dirty="0"/>
+              <a:t>저지 사양시험 처리구 운영</a:t>
+            </a:r>
+            <a:endParaRPr lang="en-US" sz="1250" dirty="0"/>
           </a:p>
           <a:p>
             <a:pPr marL="342900" indent="-342900">
@@ -41154,7 +42990,7 @@
               <a:buChar char="•"/>
             </a:pPr>
             <a:r>
-              <a:rPr lang="en-US" sz="1300" dirty="0">
+              <a:rPr lang="en-US" sz="1250" dirty="0">
                 <a:solidFill>
                   <a:srgbClr val="1F2A20"/>
                 </a:solidFill>
@@ -41162,9 +42998,9 @@
                 <a:ea typeface="Malgun Gothic" pitchFamily="34" charset="-122"/>
                 <a:cs typeface="Malgun Gothic" pitchFamily="34" charset="-120"/>
               </a:rPr>
-              <a:t>농가 견학·교육을 수용할 동선과 인력</a:t>
-            </a:r>
-            <a:endParaRPr lang="en-US" sz="1300" dirty="0"/>
+              <a:t>스마트팩토리 구축·농장 데이터 연결</a:t>
+            </a:r>
+            <a:endParaRPr lang="en-US" sz="1250" dirty="0"/>
           </a:p>
           <a:p>
             <a:pPr marL="342900" indent="-342900">
@@ -41178,7 +43014,7 @@
               <a:buChar char="•"/>
             </a:pPr>
             <a:r>
-              <a:rPr lang="en-US" sz="1300" dirty="0">
+              <a:rPr lang="en-US" sz="1250" dirty="0">
                 <a:solidFill>
                   <a:srgbClr val="1F2A20"/>
                 </a:solidFill>
@@ -41186,83 +43022,171 @@
                 <a:ea typeface="Malgun Gothic" pitchFamily="34" charset="-122"/>
                 <a:cs typeface="Malgun Gothic" pitchFamily="34" charset="-120"/>
               </a:rPr>
-              <a:t>성공뿐 아니라 실패 사례의 공개</a:t>
-            </a:r>
-            <a:endParaRPr lang="en-US" sz="1300" dirty="0"/>
-          </a:p>
-        </p:txBody>
-      </p:sp>
-      <p:sp>
-        <p:nvSpPr>
-          <p:cNvPr id="7" name="Shape 5"/>
-          <p:cNvSpPr/>
-          <p:nvPr/>
-        </p:nvSpPr>
-        <p:spPr>
-          <a:xfrm>
-            <a:off x="6190488" y="1325880"/>
-            <a:ext cx="5440680" cy="3931920"/>
+              <a:t>농가용 관리 SOP 초안 배포</a:t>
+            </a:r>
+            <a:endParaRPr lang="en-US" sz="1250" dirty="0"/>
+          </a:p>
+        </p:txBody>
+      </p:sp>
+      <p:sp>
+        <p:nvSpPr>
+          <p:cNvPr id="15" name="Shape 13"/>
+          <p:cNvSpPr/>
+          <p:nvPr/>
+        </p:nvSpPr>
+        <p:spPr>
+          <a:xfrm>
+            <a:off x="7918704" y="3017520"/>
+            <a:ext cx="310896" cy="237744"/>
+          </a:xfrm>
+          <a:prstGeom prst="rightArrow">
+            <a:avLst/>
+          </a:prstGeom>
+          <a:solidFill>
+            <a:srgbClr val="97BC62"/>
+          </a:solidFill>
+          <a:ln/>
+        </p:spPr>
+      </p:sp>
+      <p:sp>
+        <p:nvSpPr>
+          <p:cNvPr id="16" name="Shape 14"/>
+          <p:cNvSpPr/>
+          <p:nvPr/>
+        </p:nvSpPr>
+        <p:spPr>
+          <a:xfrm>
+            <a:off x="8065008" y="1371600"/>
+            <a:ext cx="3547872" cy="3520440"/>
           </a:xfrm>
           <a:prstGeom prst="roundRect">
             <a:avLst>
-              <a:gd name="adj" fmla="val 2326"/>
+              <a:gd name="adj" fmla="val 2597"/>
             </a:avLst>
           </a:prstGeom>
           <a:solidFill>
-            <a:srgbClr val="C8DDA9"/>
+            <a:srgbClr val="F3F6F1"/>
           </a:solidFill>
           <a:ln/>
-        </p:spPr>
-      </p:sp>
-      <p:sp>
-        <p:nvSpPr>
-          <p:cNvPr id="8" name="Text 6"/>
-          <p:cNvSpPr/>
-          <p:nvPr/>
-        </p:nvSpPr>
-        <p:spPr>
-          <a:xfrm>
-            <a:off x="6492240" y="1508760"/>
-            <a:ext cx="4846320" cy="365760"/>
-          </a:xfrm>
-          <a:prstGeom prst="rect">
-            <a:avLst/>
-          </a:prstGeom>
-          <a:noFill/>
-          <a:ln/>
-        </p:spPr>
-        <p:txBody>
-          <a:bodyPr wrap="square" lIns="0" tIns="0" rIns="0" bIns="0" rtlCol="0" anchor="t"/>
-          <a:lstStyle/>
-          <a:p>
-            <a:pPr algn="l" indent="0" marL="0">
-              <a:buNone/>
-            </a:pPr>
-            <a:r>
-              <a:rPr lang="en-US" sz="1650" b="1" dirty="0">
-                <a:solidFill>
-                  <a:srgbClr val="1E4420"/>
-                </a:solidFill>
-                <a:latin typeface="Malgun Gothic" pitchFamily="34" charset="0"/>
-                <a:ea typeface="Malgun Gothic" pitchFamily="34" charset="-122"/>
-                <a:cs typeface="Malgun Gothic" pitchFamily="34" charset="-120"/>
-              </a:rPr>
-              <a:t>요청드리고 싶은 것</a:t>
-            </a:r>
-            <a:endParaRPr lang="en-US" sz="1650" dirty="0"/>
-          </a:p>
-        </p:txBody>
-      </p:sp>
-      <p:sp>
-        <p:nvSpPr>
-          <p:cNvPr id="9" name="Text 7"/>
-          <p:cNvSpPr/>
-          <p:nvPr/>
-        </p:nvSpPr>
-        <p:spPr>
-          <a:xfrm>
-            <a:off x="6492240" y="2011680"/>
-            <a:ext cx="4892040" cy="3063240"/>
+          <a:effectLst>
+            <a:outerShdw sx="100000" sy="100000" kx="0" ky="0" algn="bl" rotWithShape="0" blurRad="76200" dist="12700" dir="5400000">
+              <a:srgbClr val="9AA79B">
+                <a:alpha val="25000"/>
+              </a:srgbClr>
+            </a:outerShdw>
+          </a:effectLst>
+        </p:spPr>
+      </p:sp>
+      <p:sp>
+        <p:nvSpPr>
+          <p:cNvPr id="17" name="Shape 15"/>
+          <p:cNvSpPr/>
+          <p:nvPr/>
+        </p:nvSpPr>
+        <p:spPr>
+          <a:xfrm>
+            <a:off x="8065008" y="1371600"/>
+            <a:ext cx="3547872" cy="868680"/>
+          </a:xfrm>
+          <a:prstGeom prst="roundRect">
+            <a:avLst>
+              <a:gd name="adj" fmla="val 10526"/>
+            </a:avLst>
+          </a:prstGeom>
+          <a:solidFill>
+            <a:srgbClr val="B87333"/>
+          </a:solidFill>
+          <a:ln/>
+        </p:spPr>
+      </p:sp>
+      <p:sp>
+        <p:nvSpPr>
+          <p:cNvPr id="18" name="Text 16"/>
+          <p:cNvSpPr/>
+          <p:nvPr/>
+        </p:nvSpPr>
+        <p:spPr>
+          <a:xfrm>
+            <a:off x="8266176" y="1444752"/>
+            <a:ext cx="3145536" cy="365760"/>
+          </a:xfrm>
+          <a:prstGeom prst="rect">
+            <a:avLst/>
+          </a:prstGeom>
+          <a:noFill/>
+          <a:ln/>
+        </p:spPr>
+        <p:txBody>
+          <a:bodyPr wrap="square" lIns="0" tIns="0" rIns="0" bIns="0" rtlCol="0" anchor="ctr"/>
+          <a:lstStyle/>
+          <a:p>
+            <a:pPr indent="0" marL="0">
+              <a:buNone/>
+            </a:pPr>
+            <a:r>
+              <a:rPr lang="en-US" sz="1300" b="1" dirty="0">
+                <a:solidFill>
+                  <a:srgbClr val="FFFFFF"/>
+                </a:solidFill>
+                <a:latin typeface="Malgun Gothic" pitchFamily="34" charset="0"/>
+                <a:ea typeface="Malgun Gothic" pitchFamily="34" charset="-122"/>
+                <a:cs typeface="Malgun Gothic" pitchFamily="34" charset="-120"/>
+              </a:rPr>
+              <a:t>3년차</a:t>
+            </a:r>
+            <a:endParaRPr lang="en-US" sz="1300" dirty="0"/>
+          </a:p>
+        </p:txBody>
+      </p:sp>
+      <p:sp>
+        <p:nvSpPr>
+          <p:cNvPr id="19" name="Text 17"/>
+          <p:cNvSpPr/>
+          <p:nvPr/>
+        </p:nvSpPr>
+        <p:spPr>
+          <a:xfrm>
+            <a:off x="8266176" y="1783080"/>
+            <a:ext cx="3145536" cy="402336"/>
+          </a:xfrm>
+          <a:prstGeom prst="rect">
+            <a:avLst/>
+          </a:prstGeom>
+          <a:noFill/>
+          <a:ln/>
+        </p:spPr>
+        <p:txBody>
+          <a:bodyPr wrap="square" lIns="0" tIns="0" rIns="0" bIns="0" rtlCol="0" anchor="ctr"/>
+          <a:lstStyle/>
+          <a:p>
+            <a:pPr indent="0" marL="0">
+              <a:buNone/>
+            </a:pPr>
+            <a:r>
+              <a:rPr lang="en-US" sz="2000" b="1" dirty="0">
+                <a:solidFill>
+                  <a:srgbClr val="FFFFFF"/>
+                </a:solidFill>
+                <a:latin typeface="Malgun Gothic" pitchFamily="34" charset="0"/>
+                <a:ea typeface="Malgun Gothic" pitchFamily="34" charset="-122"/>
+                <a:cs typeface="Malgun Gothic" pitchFamily="34" charset="-120"/>
+              </a:rPr>
+              <a:t>표준화</a:t>
+            </a:r>
+            <a:endParaRPr lang="en-US" sz="2000" dirty="0"/>
+          </a:p>
+        </p:txBody>
+      </p:sp>
+      <p:sp>
+        <p:nvSpPr>
+          <p:cNvPr id="20" name="Text 18"/>
+          <p:cNvSpPr/>
+          <p:nvPr/>
+        </p:nvSpPr>
+        <p:spPr>
+          <a:xfrm>
+            <a:off x="8302752" y="2395728"/>
+            <a:ext cx="3090672" cy="2331720"/>
           </a:xfrm>
           <a:prstGeom prst="rect">
             <a:avLst/>
@@ -41285,7 +43209,7 @@
               <a:buChar char="•"/>
             </a:pPr>
             <a:r>
-              <a:rPr lang="en-US" sz="1300" dirty="0">
+              <a:rPr lang="en-US" sz="1250" dirty="0">
                 <a:solidFill>
                   <a:srgbClr val="1F2A20"/>
                 </a:solidFill>
@@ -41293,9 +43217,9 @@
                 <a:ea typeface="Malgun Gothic" pitchFamily="34" charset="-122"/>
                 <a:cs typeface="Malgun Gothic" pitchFamily="34" charset="-120"/>
               </a:rPr>
-              <a:t>공인된 측정과 분석 (악취·퇴비·유질·성적)</a:t>
-            </a:r>
-            <a:endParaRPr lang="en-US" sz="1300" dirty="0"/>
+              <a:t>표준 매뉴얼·가이드라인 확정</a:t>
+            </a:r>
+            <a:endParaRPr lang="en-US" sz="1250" dirty="0"/>
           </a:p>
           <a:p>
             <a:pPr marL="342900" indent="-342900">
@@ -41309,7 +43233,7 @@
               <a:buChar char="•"/>
             </a:pPr>
             <a:r>
-              <a:rPr lang="en-US" sz="1300" dirty="0">
+              <a:rPr lang="en-US" sz="1250" dirty="0">
                 <a:solidFill>
                   <a:srgbClr val="1F2A20"/>
                 </a:solidFill>
@@ -41317,9 +43241,9 @@
                 <a:ea typeface="Malgun Gothic" pitchFamily="34" charset="-122"/>
                 <a:cs typeface="Malgun Gothic" pitchFamily="34" charset="-120"/>
               </a:rPr>
-              <a:t>실증 설계 자문 — 대조구·표본수·기간 설계</a:t>
-            </a:r>
-            <a:endParaRPr lang="en-US" sz="1300" dirty="0"/>
+              <a:t>저지 사양표준(안) 도출</a:t>
+            </a:r>
+            <a:endParaRPr lang="en-US" sz="1250" dirty="0"/>
           </a:p>
           <a:p>
             <a:pPr marL="342900" indent="-342900">
@@ -41333,7 +43257,7 @@
               <a:buChar char="•"/>
             </a:pPr>
             <a:r>
-              <a:rPr lang="en-US" sz="1300" dirty="0">
+              <a:rPr lang="en-US" sz="1250" dirty="0">
                 <a:solidFill>
                   <a:srgbClr val="1F2A20"/>
                 </a:solidFill>
@@ -41341,9 +43265,9 @@
                 <a:ea typeface="Malgun Gothic" pitchFamily="34" charset="-122"/>
                 <a:cs typeface="Malgun Gothic" pitchFamily="34" charset="-120"/>
               </a:rPr>
-              <a:t>시범사업 과제로의 편입 검토</a:t>
-            </a:r>
-            <a:endParaRPr lang="en-US" sz="1300" dirty="0"/>
+              <a:t>생산–소비 디지털트윈 시연</a:t>
+            </a:r>
+            <a:endParaRPr lang="en-US" sz="1250" dirty="0"/>
           </a:p>
           <a:p>
             <a:pPr marL="342900" indent="-342900">
@@ -41357,7 +43281,7 @@
               <a:buChar char="•"/>
             </a:pPr>
             <a:r>
-              <a:rPr lang="en-US" sz="1300" dirty="0">
+              <a:rPr lang="en-US" sz="1250" dirty="0">
                 <a:solidFill>
                   <a:srgbClr val="1F2A20"/>
                 </a:solidFill>
@@ -41365,10 +43289,326 @@
                 <a:ea typeface="Malgun Gothic" pitchFamily="34" charset="-122"/>
                 <a:cs typeface="Malgun Gothic" pitchFamily="34" charset="-120"/>
               </a:rPr>
-              <a:t>결과의 매뉴얼화 및 보급 채널 연계</a:t>
-            </a:r>
-            <a:endParaRPr lang="en-US" sz="1300" dirty="0"/>
-          </a:p>
+              <a:t>전국 보급 사업 설계 근거 제공</a:t>
+            </a:r>
+            <a:endParaRPr lang="en-US" sz="1250" dirty="0"/>
+          </a:p>
+        </p:txBody>
+      </p:sp>
+      <p:sp>
+        <p:nvSpPr>
+          <p:cNvPr id="21" name="Shape 19"/>
+          <p:cNvSpPr/>
+          <p:nvPr/>
+        </p:nvSpPr>
+        <p:spPr>
+          <a:xfrm>
+            <a:off x="566928" y="5120640"/>
+            <a:ext cx="11064240" cy="1170432"/>
+          </a:xfrm>
+          <a:prstGeom prst="roundRect">
+            <a:avLst>
+              <a:gd name="adj" fmla="val 7813"/>
+            </a:avLst>
+          </a:prstGeom>
+          <a:solidFill>
+            <a:srgbClr val="13301F"/>
+          </a:solidFill>
+          <a:ln/>
+        </p:spPr>
+      </p:sp>
+      <p:sp>
+        <p:nvSpPr>
+          <p:cNvPr id="22" name="Text 20"/>
+          <p:cNvSpPr/>
+          <p:nvPr/>
+        </p:nvSpPr>
+        <p:spPr>
+          <a:xfrm>
+            <a:off x="868680" y="5257800"/>
+            <a:ext cx="10424160" cy="310896"/>
+          </a:xfrm>
+          <a:prstGeom prst="rect">
+            <a:avLst/>
+          </a:prstGeom>
+          <a:noFill/>
+          <a:ln/>
+        </p:spPr>
+        <p:txBody>
+          <a:bodyPr wrap="square" lIns="0" tIns="0" rIns="0" bIns="0" rtlCol="0" anchor="t"/>
+          <a:lstStyle/>
+          <a:p>
+            <a:pPr algn="l" indent="0" marL="0">
+              <a:buNone/>
+            </a:pPr>
+            <a:r>
+              <a:rPr lang="en-US" sz="1400" b="1" dirty="0">
+                <a:solidFill>
+                  <a:srgbClr val="E9C79A"/>
+                </a:solidFill>
+                <a:latin typeface="Malgun Gothic" pitchFamily="34" charset="0"/>
+                <a:ea typeface="Malgun Gothic" pitchFamily="34" charset="-122"/>
+                <a:cs typeface="Malgun Gothic" pitchFamily="34" charset="-120"/>
+              </a:rPr>
+              <a:t>3년 뒤 남는 것</a:t>
+            </a:r>
+            <a:endParaRPr lang="en-US" sz="1400" dirty="0"/>
+          </a:p>
+        </p:txBody>
+      </p:sp>
+      <p:sp>
+        <p:nvSpPr>
+          <p:cNvPr id="23" name="Text 21"/>
+          <p:cNvSpPr/>
+          <p:nvPr/>
+        </p:nvSpPr>
+        <p:spPr>
+          <a:xfrm>
+            <a:off x="868680" y="5596128"/>
+            <a:ext cx="10424160" cy="621792"/>
+          </a:xfrm>
+          <a:prstGeom prst="rect">
+            <a:avLst/>
+          </a:prstGeom>
+          <a:noFill/>
+          <a:ln/>
+        </p:spPr>
+        <p:txBody>
+          <a:bodyPr wrap="square" lIns="0" tIns="0" rIns="0" bIns="0" rtlCol="0" anchor="t"/>
+          <a:lstStyle/>
+          <a:p>
+            <a:pPr algn="l" indent="0" marL="0">
+              <a:lnSpc>
+                <a:spcPts val="1900"/>
+              </a:lnSpc>
+              <a:buNone/>
+            </a:pPr>
+            <a:r>
+              <a:rPr lang="en-US" sz="1250" dirty="0">
+                <a:solidFill>
+                  <a:srgbClr val="FFFFFF"/>
+                </a:solidFill>
+                <a:latin typeface="Malgun Gothic" pitchFamily="34" charset="0"/>
+                <a:ea typeface="Malgun Gothic" pitchFamily="34" charset="-122"/>
+                <a:cs typeface="Malgun Gothic" pitchFamily="34" charset="-120"/>
+              </a:rPr>
+              <a:t>① 공인 측정으로 검증된 기술 효과 데이터  ② 농가가 따라 할 수 있는 표준 매뉴얼  ③ 규모별 경제성 모델</a:t>
+            </a:r>
+            <a:endParaRPr lang="en-US" sz="1250" dirty="0"/>
+          </a:p>
+          <a:p>
+            <a:pPr algn="l" indent="0" marL="0">
+              <a:lnSpc>
+                <a:spcPts val="1900"/>
+              </a:lnSpc>
+              <a:buNone/>
+            </a:pPr>
+            <a:r>
+              <a:rPr lang="en-US" sz="1250" dirty="0">
+                <a:solidFill>
+                  <a:srgbClr val="FFFFFF"/>
+                </a:solidFill>
+                <a:latin typeface="Malgun Gothic" pitchFamily="34" charset="0"/>
+                <a:ea typeface="Malgun Gothic" pitchFamily="34" charset="-122"/>
+                <a:cs typeface="Malgun Gothic" pitchFamily="34" charset="-120"/>
+              </a:rPr>
+              <a:t>④ 실패 사례까지 담긴 보급 자료  ⑤ 다음 국가 보급사업의 설계 근거</a:t>
+            </a:r>
+            <a:endParaRPr lang="en-US" sz="1250" dirty="0"/>
+          </a:p>
+        </p:txBody>
+      </p:sp>
+    </p:spTree>
+  </p:cSld>
+  <p:clrMapOvr>
+    <a:masterClrMapping/>
+  </p:clrMapOvr>
+</p:sld>
+</file>
+
+<file path=ppt/slides/slide46.xml><?xml version="1.0" encoding="utf-8"?>
+<p:sld xmlns:a="http://schemas.openxmlformats.org/drawingml/2006/main" xmlns:r="http://schemas.openxmlformats.org/officeDocument/2006/relationships" xmlns:p="http://schemas.openxmlformats.org/presentationml/2006/main">
+  <p:cSld name="Slide 46">
+    <p:bg>
+      <p:bgPr>
+        <a:solidFill>
+          <a:srgbClr val="FFFFFF"/>
+        </a:solidFill>
+      </p:bgPr>
+    </p:bg>
+    <p:spTree>
+      <p:nvGrpSpPr>
+        <p:cNvPr id="1" name=""/>
+        <p:cNvGrpSpPr/>
+        <p:nvPr/>
+      </p:nvGrpSpPr>
+      <p:grpSpPr>
+        <a:xfrm>
+          <a:off x="0" y="0"/>
+          <a:ext cx="0" cy="0"/>
+          <a:chOff x="0" y="0"/>
+          <a:chExt cx="0" cy="0"/>
+        </a:xfrm>
+      </p:grpSpPr>
+      <p:sp>
+        <p:nvSpPr>
+          <p:cNvPr id="2" name="Text 0"/>
+          <p:cNvSpPr/>
+          <p:nvPr/>
+        </p:nvSpPr>
+        <p:spPr>
+          <a:xfrm>
+            <a:off x="566928" y="109728"/>
+            <a:ext cx="11064240" cy="274320"/>
+          </a:xfrm>
+          <a:prstGeom prst="rect">
+            <a:avLst/>
+          </a:prstGeom>
+          <a:noFill/>
+          <a:ln/>
+        </p:spPr>
+        <p:txBody>
+          <a:bodyPr wrap="square" lIns="0" tIns="0" rIns="0" bIns="0" rtlCol="0" anchor="ctr"/>
+          <a:lstStyle/>
+          <a:p>
+            <a:pPr indent="0" marL="0">
+              <a:buNone/>
+            </a:pPr>
+            <a:r>
+              <a:rPr lang="en-US" sz="1200" b="1" spc="150" kern="0" dirty="0">
+                <a:solidFill>
+                  <a:srgbClr val="B87333"/>
+                </a:solidFill>
+                <a:latin typeface="Malgun Gothic" pitchFamily="34" charset="0"/>
+                <a:ea typeface="Malgun Gothic" pitchFamily="34" charset="-122"/>
+                <a:cs typeface="Malgun Gothic" pitchFamily="34" charset="-120"/>
+              </a:rPr>
+              <a:t>06 시범사업 제안</a:t>
+            </a:r>
+            <a:endParaRPr lang="en-US" sz="1200" dirty="0"/>
+          </a:p>
+        </p:txBody>
+      </p:sp>
+      <p:sp>
+        <p:nvSpPr>
+          <p:cNvPr id="3" name="Text 1"/>
+          <p:cNvSpPr/>
+          <p:nvPr/>
+        </p:nvSpPr>
+        <p:spPr>
+          <a:xfrm>
+            <a:off x="566928" y="365760"/>
+            <a:ext cx="11064240" cy="731520"/>
+          </a:xfrm>
+          <a:prstGeom prst="rect">
+            <a:avLst/>
+          </a:prstGeom>
+          <a:noFill/>
+          <a:ln/>
+        </p:spPr>
+        <p:txBody>
+          <a:bodyPr wrap="square" lIns="0" tIns="0" rIns="0" bIns="0" rtlCol="0" anchor="ctr"/>
+          <a:lstStyle/>
+          <a:p>
+            <a:pPr algn="l" indent="0" marL="0">
+              <a:buNone/>
+            </a:pPr>
+            <a:r>
+              <a:rPr lang="en-US" sz="3000" b="1" dirty="0">
+                <a:solidFill>
+                  <a:srgbClr val="1E4420"/>
+                </a:solidFill>
+                <a:latin typeface="Malgun Gothic" pitchFamily="34" charset="0"/>
+                <a:ea typeface="Malgun Gothic" pitchFamily="34" charset="-122"/>
+                <a:cs typeface="Malgun Gothic" pitchFamily="34" charset="-120"/>
+              </a:rPr>
+              <a:t>송영신목장을 '현장 실증 거점'으로 써주십시오</a:t>
+            </a:r>
+            <a:endParaRPr lang="en-US" sz="3000" dirty="0"/>
+          </a:p>
+        </p:txBody>
+      </p:sp>
+      <p:sp>
+        <p:nvSpPr>
+          <p:cNvPr id="4" name="Shape 2"/>
+          <p:cNvSpPr/>
+          <p:nvPr/>
+        </p:nvSpPr>
+        <p:spPr>
+          <a:xfrm>
+            <a:off x="566928" y="1325880"/>
+            <a:ext cx="5440680" cy="3931920"/>
+          </a:xfrm>
+          <a:prstGeom prst="roundRect">
+            <a:avLst>
+              <a:gd name="adj" fmla="val 2326"/>
+            </a:avLst>
+          </a:prstGeom>
+          <a:solidFill>
+            <a:srgbClr val="EEF4E9"/>
+          </a:solidFill>
+          <a:ln/>
+        </p:spPr>
+      </p:sp>
+      <p:sp>
+        <p:nvSpPr>
+          <p:cNvPr id="5" name="Text 3"/>
+          <p:cNvSpPr/>
+          <p:nvPr/>
+        </p:nvSpPr>
+        <p:spPr>
+          <a:xfrm>
+            <a:off x="868680" y="1508760"/>
+            <a:ext cx="4846320" cy="365760"/>
+          </a:xfrm>
+          <a:prstGeom prst="rect">
+            <a:avLst/>
+          </a:prstGeom>
+          <a:noFill/>
+          <a:ln/>
+        </p:spPr>
+        <p:txBody>
+          <a:bodyPr wrap="square" lIns="0" tIns="0" rIns="0" bIns="0" rtlCol="0" anchor="t"/>
+          <a:lstStyle/>
+          <a:p>
+            <a:pPr algn="l" indent="0" marL="0">
+              <a:buNone/>
+            </a:pPr>
+            <a:r>
+              <a:rPr lang="en-US" sz="1650" b="1" dirty="0">
+                <a:solidFill>
+                  <a:srgbClr val="1E4420"/>
+                </a:solidFill>
+                <a:latin typeface="Malgun Gothic" pitchFamily="34" charset="0"/>
+                <a:ea typeface="Malgun Gothic" pitchFamily="34" charset="-122"/>
+                <a:cs typeface="Malgun Gothic" pitchFamily="34" charset="-120"/>
+              </a:rPr>
+              <a:t>저희가 제공할 수 있는 것</a:t>
+            </a:r>
+            <a:endParaRPr lang="en-US" sz="1650" dirty="0"/>
+          </a:p>
+        </p:txBody>
+      </p:sp>
+      <p:sp>
+        <p:nvSpPr>
+          <p:cNvPr id="6" name="Text 4"/>
+          <p:cNvSpPr/>
+          <p:nvPr/>
+        </p:nvSpPr>
+        <p:spPr>
+          <a:xfrm>
+            <a:off x="868680" y="2011680"/>
+            <a:ext cx="4892040" cy="3063240"/>
+          </a:xfrm>
+          <a:prstGeom prst="rect">
+            <a:avLst/>
+          </a:prstGeom>
+          <a:noFill/>
+          <a:ln/>
+        </p:spPr>
+        <p:txBody>
+          <a:bodyPr wrap="square" lIns="0" tIns="0" rIns="0" bIns="0" rtlCol="0" anchor="t"/>
+          <a:lstStyle/>
           <a:p>
             <a:pPr marL="342900" indent="-342900">
               <a:lnSpc>
@@ -41389,7 +43629,7 @@
                 <a:ea typeface="Malgun Gothic" pitchFamily="34" charset="-122"/>
                 <a:cs typeface="Malgun Gothic" pitchFamily="34" charset="-120"/>
               </a:rPr>
-              <a:t>필요한 경우 관련 기준·표시 제도 검토</a:t>
+              <a:t>실증 구간과 대조 구간을 나눈 축사 공간</a:t>
             </a:r>
             <a:endParaRPr lang="en-US" sz="1300" dirty="0"/>
           </a:p>
@@ -41413,7 +43653,7 @@
                 <a:ea typeface="Malgun Gothic" pitchFamily="34" charset="-122"/>
                 <a:cs typeface="Malgun Gothic" pitchFamily="34" charset="-120"/>
               </a:rPr>
-              <a:t>타 기관·타 지역 실증과의 데이터 연계</a:t>
+              <a:t>저지종 단일 축군 70두의 개체별 사육·번식 이력</a:t>
             </a:r>
             <a:endParaRPr lang="en-US" sz="1300" dirty="0"/>
           </a:p>
@@ -41437,7 +43677,7 @@
                 <a:ea typeface="Malgun Gothic" pitchFamily="34" charset="-122"/>
                 <a:cs typeface="Malgun Gothic" pitchFamily="34" charset="-120"/>
               </a:rPr>
-              <a:t>지도직 대상 현장 교육의 장으로 활용</a:t>
+              <a:t>센서 기반 실시간 생체 데이터 (동의 범위 내)</a:t>
             </a:r>
             <a:endParaRPr lang="en-US" sz="1300" dirty="0"/>
           </a:p>
@@ -41461,6 +43701,377 @@
                 <a:ea typeface="Malgun Gothic" pitchFamily="34" charset="-122"/>
                 <a:cs typeface="Malgun Gothic" pitchFamily="34" charset="-120"/>
               </a:rPr>
+              <a:t>HBP 운영 기록 — 교반·수분·보충·바닥 상태</a:t>
+            </a:r>
+            <a:endParaRPr lang="en-US" sz="1300" dirty="0"/>
+          </a:p>
+          <a:p>
+            <a:pPr marL="342900" indent="-342900">
+              <a:lnSpc>
+                <a:spcPts val="2000"/>
+              </a:lnSpc>
+              <a:spcAft>
+                <a:spcPts val="800"/>
+              </a:spcAft>
+              <a:buSzPct val="100000"/>
+              <a:buChar char="•"/>
+            </a:pPr>
+            <a:r>
+              <a:rPr lang="en-US" sz="1300" dirty="0">
+                <a:solidFill>
+                  <a:srgbClr val="1F2A20"/>
+                </a:solidFill>
+                <a:latin typeface="Malgun Gothic" pitchFamily="34" charset="0"/>
+                <a:ea typeface="Malgun Gothic" pitchFamily="34" charset="-122"/>
+                <a:cs typeface="Malgun Gothic" pitchFamily="34" charset="-120"/>
+              </a:rPr>
+              <a:t>유가공 공정·품질·판매 데이터</a:t>
+            </a:r>
+            <a:endParaRPr lang="en-US" sz="1300" dirty="0"/>
+          </a:p>
+          <a:p>
+            <a:pPr marL="342900" indent="-342900">
+              <a:lnSpc>
+                <a:spcPts val="2000"/>
+              </a:lnSpc>
+              <a:spcAft>
+                <a:spcPts val="800"/>
+              </a:spcAft>
+              <a:buSzPct val="100000"/>
+              <a:buChar char="•"/>
+            </a:pPr>
+            <a:r>
+              <a:rPr lang="en-US" sz="1300" dirty="0">
+                <a:solidFill>
+                  <a:srgbClr val="1F2A20"/>
+                </a:solidFill>
+                <a:latin typeface="Malgun Gothic" pitchFamily="34" charset="0"/>
+                <a:ea typeface="Malgun Gothic" pitchFamily="34" charset="-122"/>
+                <a:cs typeface="Malgun Gothic" pitchFamily="34" charset="-120"/>
+              </a:rPr>
+              <a:t>수의사가 직접 기록한 진료·번식 데이터</a:t>
+            </a:r>
+            <a:endParaRPr lang="en-US" sz="1300" dirty="0"/>
+          </a:p>
+          <a:p>
+            <a:pPr marL="342900" indent="-342900">
+              <a:lnSpc>
+                <a:spcPts val="2000"/>
+              </a:lnSpc>
+              <a:spcAft>
+                <a:spcPts val="800"/>
+              </a:spcAft>
+              <a:buSzPct val="100000"/>
+              <a:buChar char="•"/>
+            </a:pPr>
+            <a:r>
+              <a:rPr lang="en-US" sz="1300" dirty="0">
+                <a:solidFill>
+                  <a:srgbClr val="1F2A20"/>
+                </a:solidFill>
+                <a:latin typeface="Malgun Gothic" pitchFamily="34" charset="0"/>
+                <a:ea typeface="Malgun Gothic" pitchFamily="34" charset="-122"/>
+                <a:cs typeface="Malgun Gothic" pitchFamily="34" charset="-120"/>
+              </a:rPr>
+              <a:t>농가 견학·교육을 수용할 동선과 인력</a:t>
+            </a:r>
+            <a:endParaRPr lang="en-US" sz="1300" dirty="0"/>
+          </a:p>
+          <a:p>
+            <a:pPr marL="342900" indent="-342900">
+              <a:lnSpc>
+                <a:spcPts val="2000"/>
+              </a:lnSpc>
+              <a:spcAft>
+                <a:spcPts val="800"/>
+              </a:spcAft>
+              <a:buSzPct val="100000"/>
+              <a:buChar char="•"/>
+            </a:pPr>
+            <a:r>
+              <a:rPr lang="en-US" sz="1300" dirty="0">
+                <a:solidFill>
+                  <a:srgbClr val="1F2A20"/>
+                </a:solidFill>
+                <a:latin typeface="Malgun Gothic" pitchFamily="34" charset="0"/>
+                <a:ea typeface="Malgun Gothic" pitchFamily="34" charset="-122"/>
+                <a:cs typeface="Malgun Gothic" pitchFamily="34" charset="-120"/>
+              </a:rPr>
+              <a:t>성공뿐 아니라 실패 사례의 공개</a:t>
+            </a:r>
+            <a:endParaRPr lang="en-US" sz="1300" dirty="0"/>
+          </a:p>
+        </p:txBody>
+      </p:sp>
+      <p:sp>
+        <p:nvSpPr>
+          <p:cNvPr id="7" name="Shape 5"/>
+          <p:cNvSpPr/>
+          <p:nvPr/>
+        </p:nvSpPr>
+        <p:spPr>
+          <a:xfrm>
+            <a:off x="6190488" y="1325880"/>
+            <a:ext cx="5440680" cy="3931920"/>
+          </a:xfrm>
+          <a:prstGeom prst="roundRect">
+            <a:avLst>
+              <a:gd name="adj" fmla="val 2326"/>
+            </a:avLst>
+          </a:prstGeom>
+          <a:solidFill>
+            <a:srgbClr val="C8DDA9"/>
+          </a:solidFill>
+          <a:ln/>
+        </p:spPr>
+      </p:sp>
+      <p:sp>
+        <p:nvSpPr>
+          <p:cNvPr id="8" name="Text 6"/>
+          <p:cNvSpPr/>
+          <p:nvPr/>
+        </p:nvSpPr>
+        <p:spPr>
+          <a:xfrm>
+            <a:off x="6492240" y="1508760"/>
+            <a:ext cx="4846320" cy="365760"/>
+          </a:xfrm>
+          <a:prstGeom prst="rect">
+            <a:avLst/>
+          </a:prstGeom>
+          <a:noFill/>
+          <a:ln/>
+        </p:spPr>
+        <p:txBody>
+          <a:bodyPr wrap="square" lIns="0" tIns="0" rIns="0" bIns="0" rtlCol="0" anchor="t"/>
+          <a:lstStyle/>
+          <a:p>
+            <a:pPr algn="l" indent="0" marL="0">
+              <a:buNone/>
+            </a:pPr>
+            <a:r>
+              <a:rPr lang="en-US" sz="1650" b="1" dirty="0">
+                <a:solidFill>
+                  <a:srgbClr val="1E4420"/>
+                </a:solidFill>
+                <a:latin typeface="Malgun Gothic" pitchFamily="34" charset="0"/>
+                <a:ea typeface="Malgun Gothic" pitchFamily="34" charset="-122"/>
+                <a:cs typeface="Malgun Gothic" pitchFamily="34" charset="-120"/>
+              </a:rPr>
+              <a:t>요청드리고 싶은 것</a:t>
+            </a:r>
+            <a:endParaRPr lang="en-US" sz="1650" dirty="0"/>
+          </a:p>
+        </p:txBody>
+      </p:sp>
+      <p:sp>
+        <p:nvSpPr>
+          <p:cNvPr id="9" name="Text 7"/>
+          <p:cNvSpPr/>
+          <p:nvPr/>
+        </p:nvSpPr>
+        <p:spPr>
+          <a:xfrm>
+            <a:off x="6492240" y="2011680"/>
+            <a:ext cx="4892040" cy="3063240"/>
+          </a:xfrm>
+          <a:prstGeom prst="rect">
+            <a:avLst/>
+          </a:prstGeom>
+          <a:noFill/>
+          <a:ln/>
+        </p:spPr>
+        <p:txBody>
+          <a:bodyPr wrap="square" lIns="0" tIns="0" rIns="0" bIns="0" rtlCol="0" anchor="t"/>
+          <a:lstStyle/>
+          <a:p>
+            <a:pPr marL="342900" indent="-342900">
+              <a:lnSpc>
+                <a:spcPts val="2000"/>
+              </a:lnSpc>
+              <a:spcAft>
+                <a:spcPts val="800"/>
+              </a:spcAft>
+              <a:buSzPct val="100000"/>
+              <a:buChar char="•"/>
+            </a:pPr>
+            <a:r>
+              <a:rPr lang="en-US" sz="1300" dirty="0">
+                <a:solidFill>
+                  <a:srgbClr val="1F2A20"/>
+                </a:solidFill>
+                <a:latin typeface="Malgun Gothic" pitchFamily="34" charset="0"/>
+                <a:ea typeface="Malgun Gothic" pitchFamily="34" charset="-122"/>
+                <a:cs typeface="Malgun Gothic" pitchFamily="34" charset="-120"/>
+              </a:rPr>
+              <a:t>공인된 측정과 분석 (악취·퇴비·유질·성적)</a:t>
+            </a:r>
+            <a:endParaRPr lang="en-US" sz="1300" dirty="0"/>
+          </a:p>
+          <a:p>
+            <a:pPr marL="342900" indent="-342900">
+              <a:lnSpc>
+                <a:spcPts val="2000"/>
+              </a:lnSpc>
+              <a:spcAft>
+                <a:spcPts val="800"/>
+              </a:spcAft>
+              <a:buSzPct val="100000"/>
+              <a:buChar char="•"/>
+            </a:pPr>
+            <a:r>
+              <a:rPr lang="en-US" sz="1300" dirty="0">
+                <a:solidFill>
+                  <a:srgbClr val="1F2A20"/>
+                </a:solidFill>
+                <a:latin typeface="Malgun Gothic" pitchFamily="34" charset="0"/>
+                <a:ea typeface="Malgun Gothic" pitchFamily="34" charset="-122"/>
+                <a:cs typeface="Malgun Gothic" pitchFamily="34" charset="-120"/>
+              </a:rPr>
+              <a:t>실증 설계 자문 — 대조구·표본수·기간 설계</a:t>
+            </a:r>
+            <a:endParaRPr lang="en-US" sz="1300" dirty="0"/>
+          </a:p>
+          <a:p>
+            <a:pPr marL="342900" indent="-342900">
+              <a:lnSpc>
+                <a:spcPts val="2000"/>
+              </a:lnSpc>
+              <a:spcAft>
+                <a:spcPts val="800"/>
+              </a:spcAft>
+              <a:buSzPct val="100000"/>
+              <a:buChar char="•"/>
+            </a:pPr>
+            <a:r>
+              <a:rPr lang="en-US" sz="1300" dirty="0">
+                <a:solidFill>
+                  <a:srgbClr val="1F2A20"/>
+                </a:solidFill>
+                <a:latin typeface="Malgun Gothic" pitchFamily="34" charset="0"/>
+                <a:ea typeface="Malgun Gothic" pitchFamily="34" charset="-122"/>
+                <a:cs typeface="Malgun Gothic" pitchFamily="34" charset="-120"/>
+              </a:rPr>
+              <a:t>시범사업 과제로의 편입 검토</a:t>
+            </a:r>
+            <a:endParaRPr lang="en-US" sz="1300" dirty="0"/>
+          </a:p>
+          <a:p>
+            <a:pPr marL="342900" indent="-342900">
+              <a:lnSpc>
+                <a:spcPts val="2000"/>
+              </a:lnSpc>
+              <a:spcAft>
+                <a:spcPts val="800"/>
+              </a:spcAft>
+              <a:buSzPct val="100000"/>
+              <a:buChar char="•"/>
+            </a:pPr>
+            <a:r>
+              <a:rPr lang="en-US" sz="1300" dirty="0">
+                <a:solidFill>
+                  <a:srgbClr val="1F2A20"/>
+                </a:solidFill>
+                <a:latin typeface="Malgun Gothic" pitchFamily="34" charset="0"/>
+                <a:ea typeface="Malgun Gothic" pitchFamily="34" charset="-122"/>
+                <a:cs typeface="Malgun Gothic" pitchFamily="34" charset="-120"/>
+              </a:rPr>
+              <a:t>결과의 매뉴얼화 및 보급 채널 연계</a:t>
+            </a:r>
+            <a:endParaRPr lang="en-US" sz="1300" dirty="0"/>
+          </a:p>
+          <a:p>
+            <a:pPr marL="342900" indent="-342900">
+              <a:lnSpc>
+                <a:spcPts val="2000"/>
+              </a:lnSpc>
+              <a:spcAft>
+                <a:spcPts val="800"/>
+              </a:spcAft>
+              <a:buSzPct val="100000"/>
+              <a:buChar char="•"/>
+            </a:pPr>
+            <a:r>
+              <a:rPr lang="en-US" sz="1300" dirty="0">
+                <a:solidFill>
+                  <a:srgbClr val="1F2A20"/>
+                </a:solidFill>
+                <a:latin typeface="Malgun Gothic" pitchFamily="34" charset="0"/>
+                <a:ea typeface="Malgun Gothic" pitchFamily="34" charset="-122"/>
+                <a:cs typeface="Malgun Gothic" pitchFamily="34" charset="-120"/>
+              </a:rPr>
+              <a:t>필요한 경우 관련 기준·표시 제도 검토</a:t>
+            </a:r>
+            <a:endParaRPr lang="en-US" sz="1300" dirty="0"/>
+          </a:p>
+          <a:p>
+            <a:pPr marL="342900" indent="-342900">
+              <a:lnSpc>
+                <a:spcPts val="2000"/>
+              </a:lnSpc>
+              <a:spcAft>
+                <a:spcPts val="800"/>
+              </a:spcAft>
+              <a:buSzPct val="100000"/>
+              <a:buChar char="•"/>
+            </a:pPr>
+            <a:r>
+              <a:rPr lang="en-US" sz="1300" dirty="0">
+                <a:solidFill>
+                  <a:srgbClr val="1F2A20"/>
+                </a:solidFill>
+                <a:latin typeface="Malgun Gothic" pitchFamily="34" charset="0"/>
+                <a:ea typeface="Malgun Gothic" pitchFamily="34" charset="-122"/>
+                <a:cs typeface="Malgun Gothic" pitchFamily="34" charset="-120"/>
+              </a:rPr>
+              <a:t>타 기관·타 지역 실증과의 데이터 연계</a:t>
+            </a:r>
+            <a:endParaRPr lang="en-US" sz="1300" dirty="0"/>
+          </a:p>
+          <a:p>
+            <a:pPr marL="342900" indent="-342900">
+              <a:lnSpc>
+                <a:spcPts val="2000"/>
+              </a:lnSpc>
+              <a:spcAft>
+                <a:spcPts val="800"/>
+              </a:spcAft>
+              <a:buSzPct val="100000"/>
+              <a:buChar char="•"/>
+            </a:pPr>
+            <a:r>
+              <a:rPr lang="en-US" sz="1300" dirty="0">
+                <a:solidFill>
+                  <a:srgbClr val="1F2A20"/>
+                </a:solidFill>
+                <a:latin typeface="Malgun Gothic" pitchFamily="34" charset="0"/>
+                <a:ea typeface="Malgun Gothic" pitchFamily="34" charset="-122"/>
+                <a:cs typeface="Malgun Gothic" pitchFamily="34" charset="-120"/>
+              </a:rPr>
+              <a:t>지도직 대상 현장 교육의 장으로 활용</a:t>
+            </a:r>
+            <a:endParaRPr lang="en-US" sz="1300" dirty="0"/>
+          </a:p>
+          <a:p>
+            <a:pPr marL="342900" indent="-342900">
+              <a:lnSpc>
+                <a:spcPts val="2000"/>
+              </a:lnSpc>
+              <a:spcAft>
+                <a:spcPts val="800"/>
+              </a:spcAft>
+              <a:buSzPct val="100000"/>
+              <a:buChar char="•"/>
+            </a:pPr>
+            <a:r>
+              <a:rPr lang="en-US" sz="1300" dirty="0">
+                <a:solidFill>
+                  <a:srgbClr val="1F2A20"/>
+                </a:solidFill>
+                <a:latin typeface="Malgun Gothic" pitchFamily="34" charset="0"/>
+                <a:ea typeface="Malgun Gothic" pitchFamily="34" charset="-122"/>
+                <a:cs typeface="Malgun Gothic" pitchFamily="34" charset="-120"/>
+              </a:rPr>
               <a:t>농가 대상 공개 성과 발표의 기회</a:t>
             </a:r>
             <a:endParaRPr lang="en-US" sz="1300" dirty="0"/>
@@ -41536,9 +44147,9 @@
 </p:sld>
 </file>
 
-<file path=ppt/slides/slide45.xml><?xml version="1.0" encoding="utf-8"?>
+<file path=ppt/slides/slide47.xml><?xml version="1.0" encoding="utf-8"?>
 <p:sld xmlns:a="http://schemas.openxmlformats.org/drawingml/2006/main" xmlns:r="http://schemas.openxmlformats.org/officeDocument/2006/relationships" xmlns:p="http://schemas.openxmlformats.org/presentationml/2006/main">
-  <p:cSld name="Slide 45">
+  <p:cSld name="Slide 47">
     <p:bg>
       <p:bgPr>
         <a:solidFill>
@@ -41914,9 +44525,9 @@
 </p:sld>
 </file>
 
-<file path=ppt/slides/slide46.xml><?xml version="1.0" encoding="utf-8"?>
+<file path=ppt/slides/slide48.xml><?xml version="1.0" encoding="utf-8"?>
 <p:sld xmlns:a="http://schemas.openxmlformats.org/drawingml/2006/main" xmlns:r="http://schemas.openxmlformats.org/officeDocument/2006/relationships" xmlns:p="http://schemas.openxmlformats.org/presentationml/2006/main">
-  <p:cSld name="Slide 46">
+  <p:cSld name="Slide 48">
     <p:bg>
       <p:bgPr>
         <a:solidFill>
